--- a/presentation/Mav_Metrics_Final.pptx
+++ b/presentation/Mav_Metrics_Final.pptx
@@ -2271,59 +2271,33 @@
           </a:ln>
         </p:spPr>
       </p:sp>
-      <p:sp>
-        <p:nvSpPr>
-          <p:cNvPr id="11" name="Shape 9"/>
-          <p:cNvSpPr/>
-          <p:nvPr/>
-        </p:nvSpPr>
-        <p:spPr>
-          <a:xfrm>
-            <a:off x="7101230" y="950976"/>
-            <a:ext cx="473659" cy="473659"/>
-          </a:xfrm>
-          <a:prstGeom prst="ellipse">
-            <a:avLst/>
-          </a:prstGeom>
-          <a:solidFill>
-            <a:srgbClr val="39566D"/>
-          </a:solidFill>
-          <a:ln w="12700">
-            <a:solidFill>
-              <a:srgbClr val="39566D"/>
-            </a:solidFill>
-            <a:prstDash val="solid"/>
-          </a:ln>
-        </p:spPr>
-      </p:sp>
-      <p:sp>
-        <p:nvSpPr>
-          <p:cNvPr id="12" name="Shape 10"/>
-          <p:cNvSpPr/>
-          <p:nvPr/>
-        </p:nvSpPr>
-        <p:spPr>
-          <a:xfrm>
-            <a:off x="6898234" y="1417320"/>
-            <a:ext cx="879653" cy="879653"/>
-          </a:xfrm>
-          <a:prstGeom prst="ellipse">
-            <a:avLst/>
-          </a:prstGeom>
-          <a:solidFill>
-            <a:srgbClr val="29465D"/>
-          </a:solidFill>
-          <a:ln w="12700">
-            <a:solidFill>
-              <a:srgbClr val="29465D"/>
-            </a:solidFill>
-            <a:prstDash val="solid"/>
-          </a:ln>
-        </p:spPr>
-      </p:sp>
-      <p:sp>
-        <p:nvSpPr>
-          <p:cNvPr id="13" name="Shape 11"/>
+      <p:pic>
+        <p:nvPicPr>
+          <p:cNvPr id="11" name="Image 0" descr="/home/runner/work/mav-metrics/mav-metrics/presentation/assets/cooper.png">    </p:cNvPr>
+          <p:cNvPicPr>
+            <a:picLocks noChangeAspect="1"/>
+          </p:cNvPicPr>
+          <p:nvPr/>
+        </p:nvPicPr>
+        <p:blipFill>
+          <a:blip r:embed="rId1"/>
+          <a:stretch>
+            <a:fillRect/>
+          </a:stretch>
+        </p:blipFill>
+        <p:spPr>
+          <a:xfrm>
+            <a:off x="6519672" y="667512"/>
+            <a:ext cx="1636776" cy="2093976"/>
+          </a:xfrm>
+          <a:prstGeom prst="rect">
+            <a:avLst/>
+          </a:prstGeom>
+        </p:spPr>
+      </p:pic>
+      <p:sp>
+        <p:nvSpPr>
+          <p:cNvPr id="12" name="Shape 9"/>
           <p:cNvSpPr/>
           <p:nvPr/>
         </p:nvSpPr>
@@ -2352,7 +2326,7 @@
       </p:sp>
       <p:sp>
         <p:nvSpPr>
-          <p:cNvPr id="14" name="Text 12"/>
+          <p:cNvPr id="13" name="Text 10"/>
           <p:cNvSpPr/>
           <p:nvPr/>
         </p:nvSpPr>
@@ -2390,7 +2364,7 @@
       </p:sp>
       <p:sp>
         <p:nvSpPr>
-          <p:cNvPr id="15" name="Shape 13"/>
+          <p:cNvPr id="14" name="Shape 11"/>
           <p:cNvSpPr/>
           <p:nvPr/>
         </p:nvSpPr>
@@ -2415,59 +2389,33 @@
           </a:ln>
         </p:spPr>
       </p:sp>
-      <p:sp>
-        <p:nvSpPr>
-          <p:cNvPr id="16" name="Shape 14"/>
-          <p:cNvSpPr/>
-          <p:nvPr/>
-        </p:nvSpPr>
-        <p:spPr>
-          <a:xfrm>
-            <a:off x="8838590" y="950976"/>
-            <a:ext cx="473659" cy="473659"/>
-          </a:xfrm>
-          <a:prstGeom prst="ellipse">
-            <a:avLst/>
-          </a:prstGeom>
-          <a:solidFill>
-            <a:srgbClr val="39566D"/>
-          </a:solidFill>
-          <a:ln w="12700">
-            <a:solidFill>
-              <a:srgbClr val="39566D"/>
-            </a:solidFill>
-            <a:prstDash val="solid"/>
-          </a:ln>
-        </p:spPr>
-      </p:sp>
-      <p:sp>
-        <p:nvSpPr>
-          <p:cNvPr id="17" name="Shape 15"/>
-          <p:cNvSpPr/>
-          <p:nvPr/>
-        </p:nvSpPr>
-        <p:spPr>
-          <a:xfrm>
-            <a:off x="8635594" y="1417320"/>
-            <a:ext cx="879653" cy="879653"/>
-          </a:xfrm>
-          <a:prstGeom prst="ellipse">
-            <a:avLst/>
-          </a:prstGeom>
-          <a:solidFill>
-            <a:srgbClr val="29465D"/>
-          </a:solidFill>
-          <a:ln w="12700">
-            <a:solidFill>
-              <a:srgbClr val="29465D"/>
-            </a:solidFill>
-            <a:prstDash val="solid"/>
-          </a:ln>
-        </p:spPr>
-      </p:sp>
-      <p:sp>
-        <p:nvSpPr>
-          <p:cNvPr id="18" name="Shape 16"/>
+      <p:pic>
+        <p:nvPicPr>
+          <p:cNvPr id="15" name="Image 1" descr="/home/runner/work/mav-metrics/mav-metrics/presentation/assets/curry.png">    </p:cNvPr>
+          <p:cNvPicPr>
+            <a:picLocks noChangeAspect="1"/>
+          </p:cNvPicPr>
+          <p:nvPr/>
+        </p:nvPicPr>
+        <p:blipFill>
+          <a:blip r:embed="rId2"/>
+          <a:stretch>
+            <a:fillRect/>
+          </a:stretch>
+        </p:blipFill>
+        <p:spPr>
+          <a:xfrm>
+            <a:off x="8257032" y="667512"/>
+            <a:ext cx="1636776" cy="2093976"/>
+          </a:xfrm>
+          <a:prstGeom prst="rect">
+            <a:avLst/>
+          </a:prstGeom>
+        </p:spPr>
+      </p:pic>
+      <p:sp>
+        <p:nvSpPr>
+          <p:cNvPr id="16" name="Shape 12"/>
           <p:cNvSpPr/>
           <p:nvPr/>
         </p:nvSpPr>
@@ -2496,7 +2444,7 @@
       </p:sp>
       <p:sp>
         <p:nvSpPr>
-          <p:cNvPr id="19" name="Text 17"/>
+          <p:cNvPr id="17" name="Text 13"/>
           <p:cNvSpPr/>
           <p:nvPr/>
         </p:nvSpPr>
@@ -2534,7 +2482,7 @@
       </p:sp>
       <p:sp>
         <p:nvSpPr>
-          <p:cNvPr id="20" name="Shape 18"/>
+          <p:cNvPr id="18" name="Shape 14"/>
           <p:cNvSpPr/>
           <p:nvPr/>
         </p:nvSpPr>
@@ -2559,59 +2507,33 @@
           </a:ln>
         </p:spPr>
       </p:sp>
-      <p:sp>
-        <p:nvSpPr>
-          <p:cNvPr id="21" name="Shape 19"/>
-          <p:cNvSpPr/>
-          <p:nvPr/>
-        </p:nvSpPr>
-        <p:spPr>
-          <a:xfrm>
-            <a:off x="10575950" y="950976"/>
-            <a:ext cx="473659" cy="473659"/>
-          </a:xfrm>
-          <a:prstGeom prst="ellipse">
-            <a:avLst/>
-          </a:prstGeom>
-          <a:solidFill>
-            <a:srgbClr val="39566D"/>
-          </a:solidFill>
-          <a:ln w="12700">
-            <a:solidFill>
-              <a:srgbClr val="39566D"/>
-            </a:solidFill>
-            <a:prstDash val="solid"/>
-          </a:ln>
-        </p:spPr>
-      </p:sp>
-      <p:sp>
-        <p:nvSpPr>
-          <p:cNvPr id="22" name="Shape 20"/>
-          <p:cNvSpPr/>
-          <p:nvPr/>
-        </p:nvSpPr>
-        <p:spPr>
-          <a:xfrm>
-            <a:off x="10372954" y="1417320"/>
-            <a:ext cx="879653" cy="879653"/>
-          </a:xfrm>
-          <a:prstGeom prst="ellipse">
-            <a:avLst/>
-          </a:prstGeom>
-          <a:solidFill>
-            <a:srgbClr val="29465D"/>
-          </a:solidFill>
-          <a:ln w="12700">
-            <a:solidFill>
-              <a:srgbClr val="29465D"/>
-            </a:solidFill>
-            <a:prstDash val="solid"/>
-          </a:ln>
-        </p:spPr>
-      </p:sp>
-      <p:sp>
-        <p:nvSpPr>
-          <p:cNvPr id="23" name="Shape 21"/>
+      <p:pic>
+        <p:nvPicPr>
+          <p:cNvPr id="19" name="Image 2" descr="/home/runner/work/mav-metrics/mav-metrics/presentation/assets/luka.png">    </p:cNvPr>
+          <p:cNvPicPr>
+            <a:picLocks noChangeAspect="1"/>
+          </p:cNvPicPr>
+          <p:nvPr/>
+        </p:nvPicPr>
+        <p:blipFill>
+          <a:blip r:embed="rId3"/>
+          <a:stretch>
+            <a:fillRect/>
+          </a:stretch>
+        </p:blipFill>
+        <p:spPr>
+          <a:xfrm>
+            <a:off x="9994392" y="667512"/>
+            <a:ext cx="1636776" cy="2093976"/>
+          </a:xfrm>
+          <a:prstGeom prst="rect">
+            <a:avLst/>
+          </a:prstGeom>
+        </p:spPr>
+      </p:pic>
+      <p:sp>
+        <p:nvSpPr>
+          <p:cNvPr id="20" name="Shape 15"/>
           <p:cNvSpPr/>
           <p:nvPr/>
         </p:nvSpPr>
@@ -2640,7 +2562,7 @@
       </p:sp>
       <p:sp>
         <p:nvSpPr>
-          <p:cNvPr id="24" name="Text 22"/>
+          <p:cNvPr id="21" name="Text 16"/>
           <p:cNvSpPr/>
           <p:nvPr/>
         </p:nvSpPr>
@@ -2678,7 +2600,7 @@
       </p:sp>
       <p:sp>
         <p:nvSpPr>
-          <p:cNvPr id="25" name="Shape 23"/>
+          <p:cNvPr id="22" name="Shape 17"/>
           <p:cNvSpPr/>
           <p:nvPr/>
         </p:nvSpPr>
@@ -2705,7 +2627,7 @@
       </p:sp>
       <p:sp>
         <p:nvSpPr>
-          <p:cNvPr id="26" name="Text 24"/>
+          <p:cNvPr id="23" name="Text 18"/>
           <p:cNvSpPr/>
           <p:nvPr/>
         </p:nvSpPr>
@@ -2743,7 +2665,7 @@
       </p:sp>
       <p:sp>
         <p:nvSpPr>
-          <p:cNvPr id="27" name="Text 25"/>
+          <p:cNvPr id="24" name="Text 19"/>
           <p:cNvSpPr/>
           <p:nvPr/>
         </p:nvSpPr>
@@ -2795,7 +2717,7 @@
       </p:sp>
       <p:sp>
         <p:nvSpPr>
-          <p:cNvPr id="28" name="Text 26"/>
+          <p:cNvPr id="25" name="Text 20"/>
           <p:cNvSpPr/>
           <p:nvPr/>
         </p:nvSpPr>
@@ -2833,7 +2755,7 @@
       </p:sp>
       <p:sp>
         <p:nvSpPr>
-          <p:cNvPr id="29" name="Shape 27"/>
+          <p:cNvPr id="26" name="Shape 21"/>
           <p:cNvSpPr/>
           <p:nvPr/>
         </p:nvSpPr>
@@ -2856,7 +2778,7 @@
       </p:sp>
       <p:sp>
         <p:nvSpPr>
-          <p:cNvPr id="30" name="Text 28"/>
+          <p:cNvPr id="27" name="Text 22"/>
           <p:cNvSpPr/>
           <p:nvPr/>
         </p:nvSpPr>
@@ -2892,7 +2814,7 @@
       </p:sp>
       <p:sp>
         <p:nvSpPr>
-          <p:cNvPr id="31" name="Text 29"/>
+          <p:cNvPr id="28" name="Text 23"/>
           <p:cNvSpPr/>
           <p:nvPr/>
         </p:nvSpPr>
@@ -3223,59 +3145,33 @@
           </a:ln>
         </p:spPr>
       </p:sp>
-      <p:sp>
-        <p:nvSpPr>
-          <p:cNvPr id="10" name="Shape 8"/>
-          <p:cNvSpPr/>
-          <p:nvPr/>
-        </p:nvSpPr>
-        <p:spPr>
-          <a:xfrm>
-            <a:off x="1848917" y="2048256"/>
-            <a:ext cx="883310" cy="883310"/>
-          </a:xfrm>
-          <a:prstGeom prst="ellipse">
-            <a:avLst/>
-          </a:prstGeom>
-          <a:solidFill>
-            <a:srgbClr val="39566D"/>
-          </a:solidFill>
-          <a:ln w="12700">
-            <a:solidFill>
-              <a:srgbClr val="39566D"/>
-            </a:solidFill>
-            <a:prstDash val="solid"/>
-          </a:ln>
-        </p:spPr>
-      </p:sp>
-      <p:sp>
-        <p:nvSpPr>
-          <p:cNvPr id="11" name="Shape 9"/>
-          <p:cNvSpPr/>
-          <p:nvPr/>
-        </p:nvSpPr>
-        <p:spPr>
-          <a:xfrm>
-            <a:off x="1470355" y="2514600"/>
-            <a:ext cx="1640434" cy="1640434"/>
-          </a:xfrm>
-          <a:prstGeom prst="ellipse">
-            <a:avLst/>
-          </a:prstGeom>
-          <a:solidFill>
-            <a:srgbClr val="29465D"/>
-          </a:solidFill>
-          <a:ln w="12700">
-            <a:solidFill>
-              <a:srgbClr val="29465D"/>
-            </a:solidFill>
-            <a:prstDash val="solid"/>
-          </a:ln>
-        </p:spPr>
-      </p:sp>
-      <p:sp>
-        <p:nvSpPr>
-          <p:cNvPr id="12" name="Shape 10"/>
+      <p:pic>
+        <p:nvPicPr>
+          <p:cNvPr id="10" name="Image 0" descr="/home/runner/work/mav-metrics/mav-metrics/presentation/assets/cooper.png">    </p:cNvPr>
+          <p:cNvPicPr>
+            <a:picLocks noChangeAspect="1"/>
+          </p:cNvPicPr>
+          <p:nvPr/>
+        </p:nvPicPr>
+        <p:blipFill>
+          <a:blip r:embed="rId1"/>
+          <a:stretch>
+            <a:fillRect/>
+          </a:stretch>
+        </p:blipFill>
+        <p:spPr>
+          <a:xfrm>
+            <a:off x="740664" y="1764792"/>
+            <a:ext cx="3099816" cy="4315968"/>
+          </a:xfrm>
+          <a:prstGeom prst="rect">
+            <a:avLst/>
+          </a:prstGeom>
+        </p:spPr>
+      </p:pic>
+      <p:sp>
+        <p:nvSpPr>
+          <p:cNvPr id="11" name="Shape 8"/>
           <p:cNvSpPr/>
           <p:nvPr/>
         </p:nvSpPr>
@@ -3304,7 +3200,7 @@
       </p:sp>
       <p:sp>
         <p:nvSpPr>
-          <p:cNvPr id="13" name="Text 11"/>
+          <p:cNvPr id="12" name="Text 9"/>
           <p:cNvSpPr/>
           <p:nvPr/>
         </p:nvSpPr>
@@ -3342,7 +3238,7 @@
       </p:sp>
       <p:sp>
         <p:nvSpPr>
-          <p:cNvPr id="14" name="Shape 12"/>
+          <p:cNvPr id="13" name="Shape 10"/>
           <p:cNvSpPr/>
           <p:nvPr/>
         </p:nvSpPr>
@@ -3365,7 +3261,7 @@
       </p:sp>
       <p:sp>
         <p:nvSpPr>
-          <p:cNvPr id="15" name="Shape 13"/>
+          <p:cNvPr id="14" name="Shape 11"/>
           <p:cNvSpPr/>
           <p:nvPr/>
         </p:nvSpPr>
@@ -3392,7 +3288,7 @@
       </p:sp>
       <p:sp>
         <p:nvSpPr>
-          <p:cNvPr id="16" name="Text 14"/>
+          <p:cNvPr id="15" name="Text 12"/>
           <p:cNvSpPr/>
           <p:nvPr/>
         </p:nvSpPr>
@@ -3430,7 +3326,7 @@
       </p:sp>
       <p:sp>
         <p:nvSpPr>
-          <p:cNvPr id="17" name="Text 15"/>
+          <p:cNvPr id="16" name="Text 13"/>
           <p:cNvSpPr/>
           <p:nvPr/>
         </p:nvSpPr>
@@ -3468,7 +3364,7 @@
       </p:sp>
       <p:sp>
         <p:nvSpPr>
-          <p:cNvPr id="18" name="Text 16"/>
+          <p:cNvPr id="17" name="Text 14"/>
           <p:cNvSpPr/>
           <p:nvPr/>
         </p:nvSpPr>
@@ -3506,7 +3402,7 @@
       </p:sp>
       <p:sp>
         <p:nvSpPr>
-          <p:cNvPr id="19" name="Shape 17"/>
+          <p:cNvPr id="18" name="Shape 15"/>
           <p:cNvSpPr/>
           <p:nvPr/>
         </p:nvSpPr>
@@ -3533,7 +3429,7 @@
       </p:sp>
       <p:sp>
         <p:nvSpPr>
-          <p:cNvPr id="20" name="Text 18"/>
+          <p:cNvPr id="19" name="Text 16"/>
           <p:cNvSpPr/>
           <p:nvPr/>
         </p:nvSpPr>
@@ -3571,7 +3467,7 @@
       </p:sp>
       <p:sp>
         <p:nvSpPr>
-          <p:cNvPr id="21" name="Text 19"/>
+          <p:cNvPr id="20" name="Text 17"/>
           <p:cNvSpPr/>
           <p:nvPr/>
         </p:nvSpPr>
@@ -3609,7 +3505,7 @@
       </p:sp>
       <p:sp>
         <p:nvSpPr>
-          <p:cNvPr id="22" name="Text 20"/>
+          <p:cNvPr id="21" name="Text 18"/>
           <p:cNvSpPr/>
           <p:nvPr/>
         </p:nvSpPr>
@@ -3647,7 +3543,7 @@
       </p:sp>
       <p:sp>
         <p:nvSpPr>
-          <p:cNvPr id="23" name="Shape 21"/>
+          <p:cNvPr id="22" name="Shape 19"/>
           <p:cNvSpPr/>
           <p:nvPr/>
         </p:nvSpPr>
@@ -3674,7 +3570,7 @@
       </p:sp>
       <p:sp>
         <p:nvSpPr>
-          <p:cNvPr id="24" name="Text 22"/>
+          <p:cNvPr id="23" name="Text 20"/>
           <p:cNvSpPr/>
           <p:nvPr/>
         </p:nvSpPr>
@@ -3712,7 +3608,7 @@
       </p:sp>
       <p:sp>
         <p:nvSpPr>
-          <p:cNvPr id="25" name="Text 23"/>
+          <p:cNvPr id="24" name="Text 21"/>
           <p:cNvSpPr/>
           <p:nvPr/>
         </p:nvSpPr>
@@ -3750,7 +3646,7 @@
       </p:sp>
       <p:sp>
         <p:nvSpPr>
-          <p:cNvPr id="26" name="Text 24"/>
+          <p:cNvPr id="25" name="Text 22"/>
           <p:cNvSpPr/>
           <p:nvPr/>
         </p:nvSpPr>
@@ -3788,7 +3684,7 @@
       </p:sp>
       <p:sp>
         <p:nvSpPr>
-          <p:cNvPr id="27" name="Text 25"/>
+          <p:cNvPr id="26" name="Text 23"/>
           <p:cNvSpPr/>
           <p:nvPr/>
         </p:nvSpPr>
@@ -3826,7 +3722,7 @@
       </p:sp>
       <p:sp>
         <p:nvSpPr>
-          <p:cNvPr id="28" name="Shape 26"/>
+          <p:cNvPr id="27" name="Shape 24"/>
           <p:cNvSpPr/>
           <p:nvPr/>
         </p:nvSpPr>
@@ -3857,7 +3753,7 @@
       </p:sp>
       <p:sp>
         <p:nvSpPr>
-          <p:cNvPr id="29" name="Text 27"/>
+          <p:cNvPr id="28" name="Text 25"/>
           <p:cNvSpPr/>
           <p:nvPr/>
         </p:nvSpPr>

--- a/presentation/Mav_Metrics_Final.pptx
+++ b/presentation/Mav_Metrics_Final.pptx
@@ -513,8 +513,7 @@
           <a:lstStyle/>
           <a:p>
             <a:r>
-              <a:rPr lang="en-US" dirty="0"/>
-              <a:t>PRESENTER: Joshua,,SAY:,Most marketability models answer the easy question: who is already famous? We wanted to answer the more useful question: who is about to become commercially valuable before everyone else sees it? Mav Metrics combines performance, reach, attention, engagement, momentum, and brand signals into one explainable system. The output is not just a ranking. It is a decision tool.,,TRANSITION: First, we changed the question from “who is popular?” to “where is the opportunity?”</a:t>
+              <a:t>PRESENTER: Joshua\nTIME: ~35 sec\n\nSAY:\nMost marketability models answer the easy question: who is already famous? We wanted to answer the more useful question: who is about to become commercially valuable before everyone else sees it? Mav Metrics combines performance, reach, attention, engagement, momentum, and brand signals into one explainable system. The output is not just a ranking—it is a decision tool.\n\nHANDOFF: I’ll start with the opportunity signal that makes the model useful.</a:t>
             </a:r>
             <a:endParaRPr lang="en-US" dirty="0"/>
           </a:p>
@@ -601,8 +600,7 @@
           <a:lstStyle/>
           <a:p>
             <a:r>
-              <a:rPr lang="en-US" dirty="0"/>
-              <a:t>PRESENTER: Sejal,,SAY:,Dallas already gives us a clean example of why momentum matters. Cooper Flagg entered the NBA with major attention, debuted at number eleven in the midseason jersey rankings, finished ninth for the full 2025–26 regular season as the only rookie in the top fifteen, and then won Rookie of the Year after leading rookies at 21 points per game. The point is not that our model discovered Cooper Flagg. The point is that the sequence—performance, attention growth, then commercial proof—is exactly the pattern a momentum signal should be built to detect in less obvious players.,,SOURCES: https://pr.nba.com/stephen-curry-lakers-sales-2025-26-season/ ; https://pr.nba.com/stephen-curry-knicks-sales-2025-26-season/ ; https://pr.nba.com/cooper-flagg-2025-26-kia-nba-rookie-of-the-year/,PHOTO: official NBA.com player headshot.</a:t>
+              <a:t>PRESENTER: Sejal\nTIME: ~35 sec\n\nSAY:\nCooper Flagg shows the sequence we want the momentum signal to capture. He debuted at number eleven in the midseason jersey rankings, finished ninth for the full 2025–26 regular season as the only rookie in the top fifteen, and then won Rookie of the Year after leading rookies at 21 points per game. The lesson is not that our model discovered Flagg. It is that attention growth can become measurable commercial proof—and we want to detect that pattern earlier in less obvious players.\n\nTRANSITION: That leads to how Dallas could operationalize the framework.</a:t>
             </a:r>
             <a:endParaRPr lang="en-US" dirty="0"/>
           </a:p>
@@ -689,8 +687,7 @@
           <a:lstStyle/>
           <a:p>
             <a:r>
-              <a:rPr lang="en-US" dirty="0"/>
-              <a:t>PRESENTER: Joshua,,SAY:,Our recommendation is to make this a quarterly scouting process. Refresh the same public signals on a fixed date, validate the model against observable commercial outcomes, create a watchlist, and run one small activation with the best opportunity. Then measure the lift and feed that outcome back into the model. We would start with a small pilot rather than claiming the first version should drive every decision.,,ACTION: A pilot can be run entirely with public data before asking for internal Mavericks data.</a:t>
+              <a:t>PRESENTER: Sejal\nTIME: ~30 sec\n\nSAY:\nOur recommendation is a quarterly scouting process, not a one-time score. Refresh the same public signals on a fixed date, validate against observable outcomes, create a watchlist, run one small content or sponsor activation, and measure the lift. Start with 10 to 20 players so the team can learn quickly before scaling or adding internal Mavericks data.\n\nHANDOFF: Shresta will close the model section with what we would—and would not—claim from public data.</a:t>
             </a:r>
             <a:endParaRPr lang="en-US" dirty="0"/>
           </a:p>
@@ -777,8 +774,7 @@
           <a:lstStyle/>
           <a:p>
             <a:r>
-              <a:rPr lang="en-US" dirty="0"/>
-              <a:t>PRESENTER: Joshua,,SAY:,There are important limits. Public data cannot tell us the exact economics of a private endorsement deal, and correlation does not prove that one variable caused commercial success. We would use this model to prioritize attention, not automate decisions. That is why every recommendation still needs human review, brand-safety checks, and—if the Mavericks adopted it—internal data where available.,,Q&amp;A ANCHOR: The model is a screening system, not a valuation oracle.</a:t>
+              <a:t>PRESENTER: Shresta\nTIME: ~30 sec\n\nSAY:\nThere are important limits. Public data cannot reveal the exact economics of private endorsement deals, and correlation does not prove causation. We would use Mav Metrics to prioritize where humans should investigate, not to automate decisions. Every recommendation still needs brand-safety review, business judgment, and internal data where available.\n\nHANDOFF: Joshua will close with the one idea we want you to remember.</a:t>
             </a:r>
             <a:endParaRPr lang="en-US" dirty="0"/>
           </a:p>
@@ -865,8 +861,7 @@
           <a:lstStyle/>
           <a:p>
             <a:r>
-              <a:rPr lang="en-US" dirty="0"/>
-              <a:t>PRESENTER: Joshua,,SAY:,Mav Metrics is built around one idea: commercial opportunity lives in the gap between what a player is doing on the court and how much value the market has captured off it. We measure that gap, track momentum, validate against real fan behavior, and turn the result into an action. Thank you—we are happy to take questions.,,Q&amp;A ROUTING: Veer = model/weights/validation; Shresta = market/brand rationale; Sejal = dashboard/results; Joshua = strategy/limitations/close.</a:t>
+              <a:t>PRESENTER: Joshua\nTIME: ~20 sec\n\nSAY:\nMav Metrics is built around one idea: commercial opportunity lives in the gap between what a player is doing on the court and how much value the market has captured off it. We measure the gap, track momentum, validate against real fan behavior, and turn the result into an action. Thank you—we’re happy to take questions.\n\nQ&amp;A ROUTING: Veer = model, weights, validation. Shresta = market logic and limitations. Sejal = dashboard and operating process. Joshua = strategy and close.</a:t>
             </a:r>
             <a:endParaRPr lang="en-US" dirty="0"/>
           </a:p>
@@ -953,8 +948,7 @@
           <a:lstStyle/>
           <a:p>
             <a:r>
-              <a:rPr lang="en-US" dirty="0"/>
-              <a:t>PRESENTER: Joshua,,SAY:,The centerpiece is what we call the marketability gap. We estimate how marketable a player should be from basketball performance, then compare that benchmark with the marketability signals we actually observe. A negative gap does not mean a player is bad at marketing. It means there may be uncaptured value. That turns the model from a leaderboard into an opportunity detector.,,Q&amp;A ANCHOR: A residual-style gap is easier to act on than an absolute score because it controls for basketball performance.</a:t>
+              <a:t>PRESENTER: Joshua\nTIME: ~35 sec\n\nSAY:\nThe centerpiece is the marketability gap. We estimate how marketable a player should be from basketball performance, then compare that benchmark with the marketability signals we actually observe. A negative gap does not mean a player is bad at marketing. It means performance may be ahead of commercial attention, which is exactly where a team, agent, or sponsor can act early.\n\nHANDOFF: Shresta will show who uses this and what goes into the score.</a:t>
             </a:r>
             <a:endParaRPr lang="en-US" dirty="0"/>
           </a:p>
@@ -1041,8 +1035,7 @@
           <a:lstStyle/>
           <a:p>
             <a:r>
-              <a:rPr lang="en-US" dirty="0"/>
-              <a:t>PRESENTER: Shresta,,SAY:,We designed the output around decisions, not math for its own sake. A team can use it to decide where to spend content resources. An agent can use it to support a player’s commercial story. A sponsor can use it to identify emerging talent before market pricing catches up. That is why every score in our system needs an explanation and an action.,,TRANSITION: To make those decisions defensible, the model uses six simple pillars.</a:t>
+              <a:t>PRESENTER: Shresta\nTIME: ~30 sec\n\nSAY:\nWe designed the output around decisions, not math for its own sake. A team can use it to decide where to spend content resources. An agent can support a player’s commercial story with evidence. A sponsor can identify rising talent before pricing fully catches up. That is why every score needs both an explanation and a next action.\n\nTRANSITION: To make those decisions defensible, the model uses six public-data pillars.</a:t>
             </a:r>
             <a:endParaRPr lang="en-US" dirty="0"/>
           </a:p>
@@ -1129,8 +1122,7 @@
           <a:lstStyle/>
           <a:p>
             <a:r>
-              <a:rPr lang="en-US" dirty="0"/>
-              <a:t>PRESENTER: Shresta,,SAY:,The six pillars are performance, reach, attention, engagement, momentum, and brand. Performance gives the player credibility and exposure. Reach measures distribution. Attention captures demand beyond the player’s own accounts. Engagement tells us whether the audience is active. Momentum is how quickly that attention is changing. Brand captures commercial proof and fit. We normalize each measure to a zero-to-one-hundred percentile so unlike units can be combined without pretending followers and points are the same thing.,,Q&amp;A ANCHOR: Large count variables are log-scaled before percentile ranking so a handful of megastars do not flatten everyone else.</a:t>
+              <a:t>PRESENTER: Shresta\nTIME: ~35 sec\n\nSAY:\nThe six pillars are performance, reach, attention, engagement, momentum, and brand. Performance creates credibility. Reach measures distribution. Attention captures demand beyond a player’s own accounts. Engagement shows audience quality. Momentum measures change. Brand captures commercial proof and fit. We put unlike variables on the same 0-to-100 percentile scale before weighting them.\n\nHANDOFF: Veer will show exactly how those six pillars turn into the gap.</a:t>
             </a:r>
             <a:endParaRPr lang="en-US" dirty="0"/>
           </a:p>
@@ -1217,8 +1209,7 @@
           <a:lstStyle/>
           <a:p>
             <a:r>
-              <a:rPr lang="en-US" dirty="0"/>
-              <a:t>PRESENTER: Veer,,SAY:,This is the fastest way to understand the output. Players move right as performance increases and move up as marketability increases. The lower-right quadrant is where we look first: strong basketball value without equivalent commercial attention. These dots are illustrative because the final ranking should only be populated after every source is collected on the same date. The decision rule, however, is the part we would operationalize.,,IMPORTANT: Do not present the plotted dots as named real players. They are intentionally unlabeled to avoid overclaiming.</a:t>
+              <a:t>PRESENTER: Veer\nTIME: ~40 sec\n\nSAY:\nThe pipeline has three transparent steps. First, we normalize large count variables with a log transform and convert features to percentiles. Second, we combine the six pillars using the disclosed weights. Third, we estimate expected marketability from basketball performance and subtract it from the observed score. That residual is the marketability gap. Negative gap plus strong momentum is where we scout first.\n\nTRANSITION: Then we test the framework against outcomes we did not invent.</a:t>
             </a:r>
             <a:endParaRPr lang="en-US" dirty="0"/>
           </a:p>
@@ -1305,8 +1296,7 @@
           <a:lstStyle/>
           <a:p>
             <a:r>
-              <a:rPr lang="en-US" dirty="0"/>
-              <a:t>PRESENTER: Veer,,SAY:,We wanted at least one benchmark that did not come from our own model. NBA Communications publishes player-level digital and social view totals. In the 2024–25 regular season, LeBron James generated 3.23 billion views, Stephen Curry 2.56 billion, and Luka Dončić 1.82 billion. These are real observed attention outcomes. A useful model should explain or anticipate outcomes like these instead of only reproducing a score we invented.,,SOURCE: https://pr.nba.com/2024-25-season-social-media-merchandise/,Q&amp;A ANCHOR: We would use rank correlation and holdout tests when enough seasons are available.</a:t>
+              <a:t>PRESENTER: Veer\nTIME: ~35 sec\n\nSAY:\nNBA Communications gives us an outside measure of real fan attention. In the 2024–25 regular season, LeBron James generated 3.23 billion NBA social and digital views, Stephen Curry 2.56 billion, and Luka Dončić 1.82 billion. These are observed outcomes, not our score. A useful model should explain or anticipate behavior like this rather than simply reproduce an internal ranking.\n\nSOURCE: NBA Communications, Apr. 14, 2025.</a:t>
             </a:r>
             <a:endParaRPr lang="en-US" dirty="0"/>
           </a:p>
@@ -1393,8 +1383,7 @@
           <a:lstStyle/>
           <a:p>
             <a:r>
-              <a:rPr lang="en-US" dirty="0"/>
-              <a:t>PRESENTER: Veer,,SAY:,The second reality check is merchandise. The NBA and NBPA publish official top-selling jersey rankings. For the 2025–26 regular season, Curry ranked first, Luka second, Brunson third, Wembanyama fourth, LeBron fifth—and Dallas rookie Cooper Flagg finished ninth. We intentionally keep jersey sales out of the score, then use them as an external validation outcome. If our model can anticipate real buying behavior, it is measuring something meaningful.,,SOURCE: https://pr.nba.com/stephen-curry-knicks-sales-2025-26-season/,METRICS: Spearman rank correlation; Top-K hit rate; outlier review.</a:t>
+              <a:t>PRESENTER: Veer\nTIME: ~35 sec\n\nSAY:\nThe second outside check is merchandise. For the 2025–26 regular season, Curry ranked first in jersey sales, Luka second, Brunson third, Wembanyama fourth, LeBron fifth, and Dallas rookie Cooper Flagg ninth. We keep jersey sales out of the score and use them as an independent commercial outcome. With enough history, we would evaluate rank correlation, top-K hit rate, and the biggest misses.\n\nTRANSITION: We also test whether our answer survives reasonable changes to the weights.</a:t>
             </a:r>
             <a:endParaRPr lang="en-US" dirty="0"/>
           </a:p>
@@ -1481,8 +1470,7 @@
           <a:lstStyle/>
           <a:p>
             <a:r>
-              <a:rPr lang="en-US" dirty="0"/>
-              <a:t>PRESENTER: Veer,,SAY:,Any judge can ask why attention is 20 percent instead of 15. Our answer is: test it. We perturb the pillar weights within a reasonable range and track whether the same opportunities stay near the top. If one recommendation disappears the second a weight moves five points, we should not build a strategy around it. Robustness matters more than fake precision.,,Q&amp;A ANCHOR: The model is transparent enough to run sensitivity analysis live in the dashboard.</a:t>
+              <a:t>PRESENTER: Veer\nTIME: ~30 sec\n\nSAY:\nInstead of arguing that one exact set of weights is perfect, we stress-test the decision. We move each pillar by up to ten points, renormalize, and rerank the players. Our governance rule is simple: keep a recommendation only if it stays in the top opportunity set in at least 80 percent of plausible scenarios. The threshold can change; the important part is defining it before seeing the winner.\n\nHANDOFF: Sejal will show how this becomes a reusable product rather than a one-time deck.</a:t>
             </a:r>
             <a:endParaRPr lang="en-US" dirty="0"/>
           </a:p>
@@ -1569,8 +1557,7 @@
           <a:lstStyle/>
           <a:p>
             <a:r>
-              <a:rPr lang="en-US" dirty="0"/>
-              <a:t>PRESENTER: Sejal,,SAY:,This is the product version of the framework. The dashboard is deliberately one screen. We can filter for younger players, high momentum, or negative marketability gap; adjust weights; compare players; and immediately see why someone ranks where they do. The goal is not to replace the presentation with software. It is to prove the framework is reusable after the case competition ends.,,DEMO: If the dashboard is live, show one weight change and one player filter—do not spend more than 30 seconds.</a:t>
+              <a:t>PRESENTER: Sejal\nTIME: ~30 sec\n\nSAY:\nThe dashboard is deliberately one screen. We can search players, compare them, change assumptions, and see the opportunity map without rebuilding the analysis. The point is not to replace the presentation with software. It is to prove the framework is reusable after the case ends. If we demo it live, we would show only one weight change and one player filter—about thirty seconds total.\n\nTRANSITION: Dallas already gives us a strong example of why momentum belongs in the model.</a:t>
             </a:r>
             <a:endParaRPr lang="en-US" dirty="0"/>
           </a:p>
@@ -1967,6 +1954,10 @@
             <a:prstDash val="solid"/>
           </a:ln>
         </p:spPr>
+        <p:txBody>
+          <a:bodyPr/>
+          <a:p/>
+        </p:txBody>
       </p:sp>
       <p:sp>
         <p:nvSpPr>
@@ -1994,6 +1985,10 @@
             <a:prstDash val="solid"/>
           </a:ln>
         </p:spPr>
+        <p:txBody>
+          <a:bodyPr/>
+          <a:p/>
+        </p:txBody>
       </p:sp>
       <p:sp>
         <p:nvSpPr>
@@ -2167,6 +2162,10 @@
             <a:prstDash val="solid"/>
           </a:ln>
         </p:spPr>
+        <p:txBody>
+          <a:bodyPr/>
+          <a:p/>
+        </p:txBody>
       </p:sp>
       <p:sp>
         <p:nvSpPr>
@@ -2270,6 +2269,10 @@
             <a:prstDash val="solid"/>
           </a:ln>
         </p:spPr>
+        <p:txBody>
+          <a:bodyPr/>
+          <a:p/>
+        </p:txBody>
       </p:sp>
       <p:pic>
         <p:nvPicPr>
@@ -2323,6 +2326,10 @@
             <a:prstDash val="solid"/>
           </a:ln>
         </p:spPr>
+        <p:txBody>
+          <a:bodyPr/>
+          <a:p/>
+        </p:txBody>
       </p:sp>
       <p:sp>
         <p:nvSpPr>
@@ -2388,6 +2395,10 @@
             <a:prstDash val="solid"/>
           </a:ln>
         </p:spPr>
+        <p:txBody>
+          <a:bodyPr/>
+          <a:p/>
+        </p:txBody>
       </p:sp>
       <p:pic>
         <p:nvPicPr>
@@ -2441,6 +2452,10 @@
             <a:prstDash val="solid"/>
           </a:ln>
         </p:spPr>
+        <p:txBody>
+          <a:bodyPr/>
+          <a:p/>
+        </p:txBody>
       </p:sp>
       <p:sp>
         <p:nvSpPr>
@@ -2506,6 +2521,10 @@
             <a:prstDash val="solid"/>
           </a:ln>
         </p:spPr>
+        <p:txBody>
+          <a:bodyPr/>
+          <a:p/>
+        </p:txBody>
       </p:sp>
       <p:pic>
         <p:nvPicPr>
@@ -2559,6 +2578,10 @@
             <a:prstDash val="solid"/>
           </a:ln>
         </p:spPr>
+        <p:txBody>
+          <a:bodyPr/>
+          <a:p/>
+        </p:txBody>
       </p:sp>
       <p:sp>
         <p:nvSpPr>
@@ -2624,6 +2647,10 @@
             <a:prstDash val="solid"/>
           </a:ln>
         </p:spPr>
+        <p:txBody>
+          <a:bodyPr/>
+          <a:p/>
+        </p:txBody>
       </p:sp>
       <p:sp>
         <p:nvSpPr>
@@ -2775,6 +2802,10 @@
             <a:prstDash val="solid"/>
           </a:ln>
         </p:spPr>
+        <p:txBody>
+          <a:bodyPr/>
+          <a:p/>
+        </p:txBody>
       </p:sp>
       <p:sp>
         <p:nvSpPr>
@@ -2805,6 +2836,7 @@
                 <a:solidFill>
                   <a:srgbClr val="6F879A"/>
                 </a:solidFill>
+                <a:latin typeface="Aptos"/>
               </a:rPr>
               <a:t>MAV METRICS  •  01</a:t>
             </a:r>
@@ -2908,6 +2940,10 @@
             <a:prstDash val="solid"/>
           </a:ln>
         </p:spPr>
+        <p:txBody>
+          <a:bodyPr/>
+          <a:p/>
+        </p:txBody>
       </p:sp>
       <p:sp>
         <p:nvSpPr>
@@ -3043,6 +3079,10 @@
             <a:prstDash val="solid"/>
           </a:ln>
         </p:spPr>
+        <p:txBody>
+          <a:bodyPr/>
+          <a:p/>
+        </p:txBody>
       </p:sp>
       <p:sp>
         <p:nvSpPr>
@@ -3073,8 +3113,9 @@
                 <a:solidFill>
                   <a:srgbClr val="6F879A"/>
                 </a:solidFill>
-              </a:rPr>
-              <a:t>MAV METRICS  •  11</a:t>
+                <a:latin typeface="Aptos"/>
+              </a:rPr>
+              <a:t>MAV METRICS  •  10</a:t>
             </a:r>
             <a:endParaRPr lang="en-US" sz="580" dirty="0"/>
           </a:p>
@@ -3144,6 +3185,10 @@
             <a:prstDash val="solid"/>
           </a:ln>
         </p:spPr>
+        <p:txBody>
+          <a:bodyPr/>
+          <a:p/>
+        </p:txBody>
       </p:sp>
       <p:pic>
         <p:nvPicPr>
@@ -3197,6 +3242,10 @@
             <a:prstDash val="solid"/>
           </a:ln>
         </p:spPr>
+        <p:txBody>
+          <a:bodyPr/>
+          <a:p/>
+        </p:txBody>
       </p:sp>
       <p:sp>
         <p:nvSpPr>
@@ -3258,6 +3307,10 @@
             <a:prstDash val="solid"/>
           </a:ln>
         </p:spPr>
+        <p:txBody>
+          <a:bodyPr/>
+          <a:p/>
+        </p:txBody>
       </p:sp>
       <p:sp>
         <p:nvSpPr>
@@ -3285,6 +3338,10 @@
             <a:prstDash val="solid"/>
           </a:ln>
         </p:spPr>
+        <p:txBody>
+          <a:bodyPr/>
+          <a:p/>
+        </p:txBody>
       </p:sp>
       <p:sp>
         <p:nvSpPr>
@@ -3426,6 +3483,10 @@
             <a:prstDash val="solid"/>
           </a:ln>
         </p:spPr>
+        <p:txBody>
+          <a:bodyPr/>
+          <a:p/>
+        </p:txBody>
       </p:sp>
       <p:sp>
         <p:nvSpPr>
@@ -3567,6 +3628,10 @@
             <a:prstDash val="solid"/>
           </a:ln>
         </p:spPr>
+        <p:txBody>
+          <a:bodyPr/>
+          <a:p/>
+        </p:txBody>
       </p:sp>
       <p:sp>
         <p:nvSpPr>
@@ -3750,6 +3815,10 @@
             <a:prstDash val="solid"/>
           </a:ln>
         </p:spPr>
+        <p:txBody>
+          <a:bodyPr/>
+          <a:p/>
+        </p:txBody>
       </p:sp>
       <p:sp>
         <p:nvSpPr>
@@ -3847,6 +3916,10 @@
             <a:prstDash val="solid"/>
           </a:ln>
         </p:spPr>
+        <p:txBody>
+          <a:bodyPr/>
+          <a:p/>
+        </p:txBody>
       </p:sp>
       <p:sp>
         <p:nvSpPr>
@@ -3982,6 +4055,10 @@
             <a:prstDash val="solid"/>
           </a:ln>
         </p:spPr>
+        <p:txBody>
+          <a:bodyPr/>
+          <a:p/>
+        </p:txBody>
       </p:sp>
       <p:sp>
         <p:nvSpPr>
@@ -4012,8 +4089,9 @@
                 <a:solidFill>
                   <a:srgbClr val="6F879A"/>
                 </a:solidFill>
-              </a:rPr>
-              <a:t>MAV METRICS  •  12</a:t>
+                <a:latin typeface="Aptos"/>
+              </a:rPr>
+              <a:t>MAV METRICS  •  11</a:t>
             </a:r>
             <a:endParaRPr lang="en-US" sz="580" dirty="0"/>
           </a:p>
@@ -4155,6 +4233,10 @@
             <a:prstDash val="solid"/>
           </a:ln>
         </p:spPr>
+        <p:txBody>
+          <a:bodyPr/>
+          <a:p/>
+        </p:txBody>
       </p:sp>
       <p:sp>
         <p:nvSpPr>
@@ -4292,6 +4374,10 @@
             <a:prstDash val="solid"/>
           </a:ln>
         </p:spPr>
+        <p:txBody>
+          <a:bodyPr/>
+          <a:p/>
+        </p:txBody>
       </p:sp>
       <p:sp>
         <p:nvSpPr>
@@ -4429,6 +4515,10 @@
             <a:prstDash val="solid"/>
           </a:ln>
         </p:spPr>
+        <p:txBody>
+          <a:bodyPr/>
+          <a:p/>
+        </p:txBody>
       </p:sp>
       <p:sp>
         <p:nvSpPr>
@@ -4566,6 +4656,10 @@
             <a:prstDash val="solid"/>
           </a:ln>
         </p:spPr>
+        <p:txBody>
+          <a:bodyPr/>
+          <a:p/>
+        </p:txBody>
       </p:sp>
       <p:sp>
         <p:nvSpPr>
@@ -4707,6 +4801,10 @@
             <a:prstDash val="solid"/>
           </a:ln>
         </p:spPr>
+        <p:txBody>
+          <a:bodyPr/>
+          <a:p/>
+        </p:txBody>
       </p:sp>
       <p:sp>
         <p:nvSpPr>
@@ -4890,6 +4988,10 @@
             <a:prstDash val="solid"/>
           </a:ln>
         </p:spPr>
+        <p:txBody>
+          <a:bodyPr/>
+          <a:p/>
+        </p:txBody>
       </p:sp>
       <p:sp>
         <p:nvSpPr>
@@ -4987,6 +5089,10 @@
             <a:prstDash val="solid"/>
           </a:ln>
         </p:spPr>
+        <p:txBody>
+          <a:bodyPr/>
+          <a:p/>
+        </p:txBody>
       </p:sp>
       <p:sp>
         <p:nvSpPr>
@@ -5122,6 +5228,10 @@
             <a:prstDash val="solid"/>
           </a:ln>
         </p:spPr>
+        <p:txBody>
+          <a:bodyPr/>
+          <a:p/>
+        </p:txBody>
       </p:sp>
       <p:sp>
         <p:nvSpPr>
@@ -5152,8 +5262,9 @@
                 <a:solidFill>
                   <a:srgbClr val="6F879A"/>
                 </a:solidFill>
-              </a:rPr>
-              <a:t>MAV METRICS  •  13</a:t>
+                <a:latin typeface="Aptos"/>
+              </a:rPr>
+              <a:t>MAV METRICS  •  12</a:t>
             </a:r>
             <a:endParaRPr lang="en-US" sz="580" dirty="0"/>
           </a:p>
@@ -5261,6 +5372,10 @@
             <a:prstDash val="solid"/>
           </a:ln>
         </p:spPr>
+        <p:txBody>
+          <a:bodyPr/>
+          <a:p/>
+        </p:txBody>
       </p:sp>
       <p:sp>
         <p:nvSpPr>
@@ -5326,6 +5441,10 @@
             <a:prstDash val="solid"/>
           </a:ln>
         </p:spPr>
+        <p:txBody>
+          <a:bodyPr/>
+          <a:p/>
+        </p:txBody>
       </p:sp>
       <p:sp>
         <p:nvSpPr>
@@ -5391,6 +5510,10 @@
             <a:prstDash val="solid"/>
           </a:ln>
         </p:spPr>
+        <p:txBody>
+          <a:bodyPr/>
+          <a:p/>
+        </p:txBody>
       </p:sp>
       <p:sp>
         <p:nvSpPr>
@@ -5456,6 +5579,10 @@
             <a:prstDash val="solid"/>
           </a:ln>
         </p:spPr>
+        <p:txBody>
+          <a:bodyPr/>
+          <a:p/>
+        </p:txBody>
       </p:sp>
       <p:sp>
         <p:nvSpPr>
@@ -5521,6 +5648,10 @@
             <a:prstDash val="solid"/>
           </a:ln>
         </p:spPr>
+        <p:txBody>
+          <a:bodyPr/>
+          <a:p/>
+        </p:txBody>
       </p:sp>
       <p:sp>
         <p:nvSpPr>
@@ -5586,6 +5717,10 @@
             <a:prstDash val="solid"/>
           </a:ln>
         </p:spPr>
+        <p:txBody>
+          <a:bodyPr/>
+          <a:p/>
+        </p:txBody>
       </p:sp>
       <p:sp>
         <p:nvSpPr>
@@ -5651,6 +5786,10 @@
             <a:prstDash val="solid"/>
           </a:ln>
         </p:spPr>
+        <p:txBody>
+          <a:bodyPr/>
+          <a:p/>
+        </p:txBody>
       </p:sp>
       <p:sp>
         <p:nvSpPr>
@@ -5716,6 +5855,10 @@
             <a:prstDash val="solid"/>
           </a:ln>
         </p:spPr>
+        <p:txBody>
+          <a:bodyPr/>
+          <a:p/>
+        </p:txBody>
       </p:sp>
       <p:sp>
         <p:nvSpPr>
@@ -5781,6 +5924,10 @@
             <a:prstDash val="solid"/>
           </a:ln>
         </p:spPr>
+        <p:txBody>
+          <a:bodyPr/>
+          <a:p/>
+        </p:txBody>
       </p:sp>
       <p:sp>
         <p:nvSpPr>
@@ -6020,6 +6167,10 @@
             <a:prstDash val="solid"/>
           </a:ln>
         </p:spPr>
+        <p:txBody>
+          <a:bodyPr/>
+          <a:p/>
+        </p:txBody>
       </p:sp>
       <p:sp>
         <p:nvSpPr>
@@ -6165,6 +6316,10 @@
             <a:prstDash val="solid"/>
           </a:ln>
         </p:spPr>
+        <p:txBody>
+          <a:bodyPr/>
+          <a:p/>
+        </p:txBody>
       </p:sp>
       <p:sp>
         <p:nvSpPr>
@@ -6302,6 +6457,10 @@
             <a:prstDash val="solid"/>
           </a:ln>
         </p:spPr>
+        <p:txBody>
+          <a:bodyPr/>
+          <a:p/>
+        </p:txBody>
       </p:sp>
       <p:sp>
         <p:nvSpPr>
@@ -6332,8 +6491,9 @@
                 <a:solidFill>
                   <a:srgbClr val="6F879A"/>
                 </a:solidFill>
-              </a:rPr>
-              <a:t>MAV METRICS  •  14</a:t>
+                <a:latin typeface="Aptos"/>
+              </a:rPr>
+              <a:t>MAV METRICS  •  13</a:t>
             </a:r>
             <a:endParaRPr lang="en-US" sz="580" dirty="0"/>
           </a:p>
@@ -6397,6 +6557,10 @@
             <a:prstDash val="solid"/>
           </a:ln>
         </p:spPr>
+        <p:txBody>
+          <a:bodyPr/>
+          <a:p/>
+        </p:txBody>
       </p:sp>
       <p:sp>
         <p:nvSpPr>
@@ -6532,6 +6696,10 @@
             <a:prstDash val="solid"/>
           </a:ln>
         </p:spPr>
+        <p:txBody>
+          <a:bodyPr/>
+          <a:p/>
+        </p:txBody>
       </p:sp>
       <p:sp>
         <p:nvSpPr>
@@ -6562,6 +6730,7 @@
                 <a:solidFill>
                   <a:srgbClr val="6F879A"/>
                 </a:solidFill>
+                <a:latin typeface="Aptos"/>
               </a:rPr>
               <a:t>MAV METRICS  •  02</a:t>
             </a:r>
@@ -6595,6 +6764,10 @@
             <a:prstDash val="solid"/>
           </a:ln>
         </p:spPr>
+        <p:txBody>
+          <a:bodyPr/>
+          <a:p/>
+        </p:txBody>
       </p:sp>
       <p:sp>
         <p:nvSpPr>
@@ -6770,6 +6943,10 @@
             <a:prstDash val="solid"/>
           </a:ln>
         </p:spPr>
+        <p:txBody>
+          <a:bodyPr/>
+          <a:p/>
+        </p:txBody>
       </p:sp>
       <p:sp>
         <p:nvSpPr>
@@ -6949,6 +7126,10 @@
             <a:prstDash val="solid"/>
           </a:ln>
         </p:spPr>
+        <p:txBody>
+          <a:bodyPr/>
+          <a:p/>
+        </p:txBody>
       </p:sp>
       <p:sp>
         <p:nvSpPr>
@@ -7018,6 +7199,10 @@
             <a:prstDash val="solid"/>
           </a:ln>
         </p:spPr>
+        <p:txBody>
+          <a:bodyPr/>
+          <a:p/>
+        </p:txBody>
       </p:sp>
       <p:sp>
         <p:nvSpPr>
@@ -7125,6 +7310,10 @@
             <a:prstDash val="solid"/>
           </a:ln>
         </p:spPr>
+        <p:txBody>
+          <a:bodyPr/>
+          <a:p/>
+        </p:txBody>
       </p:sp>
       <p:sp>
         <p:nvSpPr>
@@ -7232,6 +7421,10 @@
             <a:prstDash val="solid"/>
           </a:ln>
         </p:spPr>
+        <p:txBody>
+          <a:bodyPr/>
+          <a:p/>
+        </p:txBody>
       </p:sp>
       <p:sp>
         <p:nvSpPr>
@@ -7367,6 +7560,10 @@
             <a:prstDash val="solid"/>
           </a:ln>
         </p:spPr>
+        <p:txBody>
+          <a:bodyPr/>
+          <a:p/>
+        </p:txBody>
       </p:sp>
       <p:sp>
         <p:nvSpPr>
@@ -7502,6 +7699,10 @@
             <a:prstDash val="solid"/>
           </a:ln>
         </p:spPr>
+        <p:txBody>
+          <a:bodyPr/>
+          <a:p/>
+        </p:txBody>
       </p:sp>
       <p:sp>
         <p:nvSpPr>
@@ -7532,6 +7733,7 @@
                 <a:solidFill>
                   <a:srgbClr val="6F879A"/>
                 </a:solidFill>
+                <a:latin typeface="Aptos"/>
               </a:rPr>
               <a:t>MAV METRICS  •  03</a:t>
             </a:r>
@@ -7565,6 +7767,10 @@
             <a:prstDash val="solid"/>
           </a:ln>
         </p:spPr>
+        <p:txBody>
+          <a:bodyPr/>
+          <a:p/>
+        </p:txBody>
       </p:sp>
       <p:sp>
         <p:nvSpPr>
@@ -7744,6 +7950,10 @@
             <a:prstDash val="solid"/>
           </a:ln>
         </p:spPr>
+        <p:txBody>
+          <a:bodyPr/>
+          <a:p/>
+        </p:txBody>
       </p:sp>
       <p:sp>
         <p:nvSpPr>
@@ -7923,6 +8133,10 @@
             <a:prstDash val="solid"/>
           </a:ln>
         </p:spPr>
+        <p:txBody>
+          <a:bodyPr/>
+          <a:p/>
+        </p:txBody>
       </p:sp>
       <p:sp>
         <p:nvSpPr>
@@ -8172,6 +8386,10 @@
             <a:prstDash val="solid"/>
           </a:ln>
         </p:spPr>
+        <p:txBody>
+          <a:bodyPr/>
+          <a:p/>
+        </p:txBody>
       </p:sp>
       <p:sp>
         <p:nvSpPr>
@@ -8307,6 +8525,10 @@
             <a:prstDash val="solid"/>
           </a:ln>
         </p:spPr>
+        <p:txBody>
+          <a:bodyPr/>
+          <a:p/>
+        </p:txBody>
       </p:sp>
       <p:sp>
         <p:nvSpPr>
@@ -8337,6 +8559,7 @@
                 <a:solidFill>
                   <a:srgbClr val="6F879A"/>
                 </a:solidFill>
+                <a:latin typeface="Aptos"/>
               </a:rPr>
               <a:t>MAV METRICS  •  04</a:t>
             </a:r>
@@ -8408,6 +8631,10 @@
             <a:prstDash val="solid"/>
           </a:ln>
         </p:spPr>
+        <p:txBody>
+          <a:bodyPr/>
+          <a:p/>
+        </p:txBody>
       </p:sp>
       <p:sp>
         <p:nvSpPr>
@@ -8549,6 +8776,10 @@
             <a:prstDash val="solid"/>
           </a:ln>
         </p:spPr>
+        <p:txBody>
+          <a:bodyPr/>
+          <a:p/>
+        </p:txBody>
       </p:sp>
       <p:sp>
         <p:nvSpPr>
@@ -8690,6 +8921,10 @@
             <a:prstDash val="solid"/>
           </a:ln>
         </p:spPr>
+        <p:txBody>
+          <a:bodyPr/>
+          <a:p/>
+        </p:txBody>
       </p:sp>
       <p:sp>
         <p:nvSpPr>
@@ -8831,6 +9066,10 @@
             <a:prstDash val="solid"/>
           </a:ln>
         </p:spPr>
+        <p:txBody>
+          <a:bodyPr/>
+          <a:p/>
+        </p:txBody>
       </p:sp>
       <p:sp>
         <p:nvSpPr>
@@ -8972,6 +9211,10 @@
             <a:prstDash val="solid"/>
           </a:ln>
         </p:spPr>
+        <p:txBody>
+          <a:bodyPr/>
+          <a:p/>
+        </p:txBody>
       </p:sp>
       <p:sp>
         <p:nvSpPr>
@@ -9113,6 +9356,10 @@
             <a:prstDash val="solid"/>
           </a:ln>
         </p:spPr>
+        <p:txBody>
+          <a:bodyPr/>
+          <a:p/>
+        </p:txBody>
       </p:sp>
       <p:sp>
         <p:nvSpPr>
@@ -9300,7 +9547,7 @@
       </p:grpSpPr>
       <p:sp>
         <p:nvSpPr>
-          <p:cNvPr id="2" name="Shape 0"/>
+          <p:cNvPr id="2" name="Rectangle 1"/>
           <p:cNvSpPr/>
           <p:nvPr/>
         </p:nvSpPr>
@@ -9315,830 +9562,450 @@
           <a:solidFill>
             <a:srgbClr val="00A3FF"/>
           </a:solidFill>
-          <a:ln w="12700">
-            <a:solidFill>
-              <a:srgbClr val="00A3FF">
-                <a:alpha val="0"/>
-              </a:srgbClr>
-            </a:solidFill>
-            <a:prstDash val="solid"/>
+          <a:ln>
+            <a:noFill/>
           </a:ln>
         </p:spPr>
-      </p:sp>
-      <p:sp>
-        <p:nvSpPr>
-          <p:cNvPr id="3" name="Text 1"/>
-          <p:cNvSpPr/>
+        <p:style>
+          <a:lnRef idx="1">
+            <a:schemeClr val="accent1"/>
+          </a:lnRef>
+          <a:fillRef idx="3">
+            <a:schemeClr val="accent1"/>
+          </a:fillRef>
+          <a:effectRef idx="2">
+            <a:schemeClr val="accent1"/>
+          </a:effectRef>
+          <a:fontRef idx="minor">
+            <a:schemeClr val="lt1"/>
+          </a:fontRef>
+        </p:style>
+        <p:txBody>
+          <a:bodyPr rtlCol="0" anchor="ctr"/>
+          <a:lstStyle/>
+          <a:p>
+            <a:pPr algn="ctr"/>
+          </a:p>
+        </p:txBody>
+      </p:sp>
+      <p:sp>
+        <p:nvSpPr>
+          <p:cNvPr id="3" name="TextBox 2"/>
+          <p:cNvSpPr txBox="1"/>
           <p:nvPr/>
         </p:nvSpPr>
         <p:spPr>
           <a:xfrm>
             <a:off x="621792" y="320040"/>
-            <a:ext cx="3474720" cy="201168"/>
-          </a:xfrm>
-          <a:prstGeom prst="rect">
-            <a:avLst/>
-          </a:prstGeom>
-          <a:noFill/>
-          <a:ln/>
-        </p:spPr>
-        <p:txBody>
-          <a:bodyPr wrap="square" lIns="0" tIns="0" rIns="0" bIns="0" rtlCol="0" anchor="ctr"/>
-          <a:lstStyle/>
-          <a:p>
-            <a:pPr indent="0" marL="0">
-              <a:buNone/>
-            </a:pPr>
-            <a:r>
-              <a:rPr lang="en-US" sz="850" b="1" spc="110" kern="0" dirty="0">
+            <a:ext cx="2926080" cy="201168"/>
+          </a:xfrm>
+          <a:prstGeom prst="rect">
+            <a:avLst/>
+          </a:prstGeom>
+          <a:noFill/>
+        </p:spPr>
+        <p:txBody>
+          <a:bodyPr wrap="none" lIns="0" rIns="0" tIns="0" bIns="0" anchor="ctr">
+            <a:spAutoFit/>
+          </a:bodyPr>
+          <a:lstStyle/>
+          <a:p>
+            <a:pPr algn="l"/>
+            <a:r>
+              <a:rPr sz="850" b="1">
                 <a:solidFill>
                   <a:srgbClr val="00A3FF"/>
                 </a:solidFill>
+                <a:latin typeface="Aptos"/>
               </a:rPr>
               <a:t>MODEL</a:t>
             </a:r>
-            <a:endParaRPr lang="en-US" sz="850" dirty="0"/>
-          </a:p>
-        </p:txBody>
-      </p:sp>
-      <p:sp>
-        <p:nvSpPr>
-          <p:cNvPr id="4" name="Text 2"/>
-          <p:cNvSpPr/>
+          </a:p>
+        </p:txBody>
+      </p:sp>
+      <p:sp>
+        <p:nvSpPr>
+          <p:cNvPr id="4" name="TextBox 3"/>
+          <p:cNvSpPr txBox="1"/>
           <p:nvPr/>
         </p:nvSpPr>
         <p:spPr>
           <a:xfrm>
             <a:off x="621792" y="612648"/>
-            <a:ext cx="10789920" cy="548640"/>
-          </a:xfrm>
-          <a:prstGeom prst="rect">
-            <a:avLst/>
-          </a:prstGeom>
-          <a:noFill/>
-          <a:ln/>
-        </p:spPr>
-        <p:txBody>
-          <a:bodyPr wrap="square" lIns="0" tIns="0" rIns="0" bIns="0" rtlCol="0" anchor="ctr">
-            <a:normAutofit/>
-          </a:bodyPr>
-          <a:lstStyle/>
-          <a:p>
-            <a:pPr indent="0" marL="0">
-              <a:buNone/>
-            </a:pPr>
-            <a:r>
-              <a:rPr lang="en-US" sz="2700" b="1" dirty="0">
+            <a:ext cx="10789920" cy="566928"/>
+          </a:xfrm>
+          <a:prstGeom prst="rect">
+            <a:avLst/>
+          </a:prstGeom>
+          <a:noFill/>
+        </p:spPr>
+        <p:txBody>
+          <a:bodyPr wrap="none" lIns="0" rIns="0" tIns="0" bIns="0" anchor="ctr">
+            <a:spAutoFit/>
+          </a:bodyPr>
+          <a:lstStyle/>
+          <a:p>
+            <a:pPr algn="l"/>
+            <a:r>
+              <a:rPr sz="2700" b="1">
                 <a:solidFill>
                   <a:srgbClr val="F7FAFC"/>
                 </a:solidFill>
+                <a:latin typeface="Aptos Display"/>
               </a:rPr>
               <a:t>Simple enough to defend. Useful enough to act on.</a:t>
             </a:r>
-            <a:endParaRPr lang="en-US" sz="2700" dirty="0"/>
-          </a:p>
-        </p:txBody>
-      </p:sp>
-      <p:sp>
-        <p:nvSpPr>
-          <p:cNvPr id="5" name="Text 3"/>
-          <p:cNvSpPr/>
+          </a:p>
+        </p:txBody>
+      </p:sp>
+      <p:sp>
+        <p:nvSpPr>
+          <p:cNvPr id="5" name="TextBox 4"/>
+          <p:cNvSpPr txBox="1"/>
           <p:nvPr/>
         </p:nvSpPr>
         <p:spPr>
           <a:xfrm>
             <a:off x="630936" y="1225296"/>
-            <a:ext cx="10698480" cy="420624"/>
-          </a:xfrm>
-          <a:prstGeom prst="rect">
-            <a:avLst/>
-          </a:prstGeom>
-          <a:noFill/>
-          <a:ln/>
-        </p:spPr>
-        <p:txBody>
-          <a:bodyPr wrap="square" lIns="0" tIns="0" rIns="0" bIns="0" rtlCol="0" anchor="ctr">
-            <a:normAutofit/>
-          </a:bodyPr>
-          <a:lstStyle/>
-          <a:p>
-            <a:pPr indent="0" marL="0">
-              <a:buNone/>
-            </a:pPr>
-            <a:r>
-              <a:rPr lang="en-US" sz="1250" dirty="0">
+            <a:ext cx="10698480" cy="411480"/>
+          </a:xfrm>
+          <a:prstGeom prst="rect">
+            <a:avLst/>
+          </a:prstGeom>
+          <a:noFill/>
+        </p:spPr>
+        <p:txBody>
+          <a:bodyPr wrap="none" lIns="0" rIns="0" tIns="0" bIns="0" anchor="ctr">
+            <a:spAutoFit/>
+          </a:bodyPr>
+          <a:lstStyle/>
+          <a:p>
+            <a:pPr algn="l"/>
+            <a:r>
+              <a:rPr sz="1250" b="0">
                 <a:solidFill>
                   <a:srgbClr val="A9BAC9"/>
                 </a:solidFill>
-              </a:rPr>
-              <a:t>Transparent weights are a feature, not a weakness—because we can test how much the answer changes.</a:t>
-            </a:r>
-            <a:endParaRPr lang="en-US" sz="1250" dirty="0"/>
-          </a:p>
-        </p:txBody>
-      </p:sp>
-      <p:sp>
-        <p:nvSpPr>
-          <p:cNvPr id="6" name="Shape 4"/>
-          <p:cNvSpPr/>
-          <p:nvPr/>
-        </p:nvSpPr>
-        <p:spPr>
-          <a:xfrm>
-            <a:off x="566928" y="6455664"/>
-            <a:ext cx="11064240" cy="0"/>
-          </a:xfrm>
-          <a:prstGeom prst="line">
-            <a:avLst/>
-          </a:prstGeom>
-          <a:noFill/>
-          <a:ln w="8890">
+                <a:latin typeface="Aptos"/>
+              </a:rPr>
+              <a:t>Normalize → score → gap → action. Every step is visible and testable.</a:t>
+            </a:r>
+          </a:p>
+        </p:txBody>
+      </p:sp>
+      <p:sp>
+        <p:nvSpPr>
+          <p:cNvPr id="6" name="Rounded Rectangle 5"/>
+          <p:cNvSpPr/>
+          <p:nvPr/>
+        </p:nvSpPr>
+        <p:spPr>
+          <a:xfrm>
+            <a:off x="713232" y="1874519"/>
+            <a:ext cx="3246120" cy="3611880"/>
+          </a:xfrm>
+          <a:prstGeom prst="roundRect">
+            <a:avLst/>
+          </a:prstGeom>
+          <a:solidFill>
+            <a:srgbClr val="081D31"/>
+          </a:solidFill>
+          <a:ln w="11430">
             <a:solidFill>
               <a:srgbClr val="193B57"/>
             </a:solidFill>
-            <a:prstDash val="solid"/>
           </a:ln>
         </p:spPr>
-      </p:sp>
-      <p:sp>
-        <p:nvSpPr>
-          <p:cNvPr id="7" name="Text 5"/>
-          <p:cNvSpPr/>
-          <p:nvPr/>
-        </p:nvSpPr>
-        <p:spPr>
-          <a:xfrm>
-            <a:off x="594360" y="6510528"/>
-            <a:ext cx="1737360" cy="146304"/>
-          </a:xfrm>
-          <a:prstGeom prst="rect">
-            <a:avLst/>
-          </a:prstGeom>
-          <a:noFill/>
-          <a:ln/>
-        </p:spPr>
-        <p:txBody>
-          <a:bodyPr wrap="square" lIns="0" tIns="0" rIns="0" bIns="0" rtlCol="0" anchor="ctr"/>
-          <a:lstStyle/>
-          <a:p>
-            <a:pPr indent="0" marL="0">
-              <a:buNone/>
-            </a:pPr>
-            <a:r>
-              <a:rPr lang="en-US" sz="580" b="1" spc="70" kern="0" dirty="0">
-                <a:solidFill>
-                  <a:srgbClr val="6F879A"/>
-                </a:solidFill>
-              </a:rPr>
-              <a:t>MAV METRICS  •  05</a:t>
-            </a:r>
-            <a:endParaRPr lang="en-US" sz="580" dirty="0"/>
-          </a:p>
-        </p:txBody>
-      </p:sp>
-      <p:sp>
-        <p:nvSpPr>
-          <p:cNvPr id="8" name="Text 6"/>
-          <p:cNvSpPr/>
-          <p:nvPr/>
-        </p:nvSpPr>
-        <p:spPr>
-          <a:xfrm>
-            <a:off x="713232" y="1920240"/>
-            <a:ext cx="2834640" cy="256032"/>
-          </a:xfrm>
-          <a:prstGeom prst="rect">
-            <a:avLst/>
-          </a:prstGeom>
-          <a:noFill/>
-          <a:ln/>
-        </p:spPr>
-        <p:txBody>
-          <a:bodyPr wrap="square" lIns="254" tIns="254" rIns="254" bIns="254" rtlCol="0" anchor="ctr">
-            <a:normAutofit/>
-          </a:bodyPr>
-          <a:lstStyle/>
-          <a:p>
-            <a:pPr algn="l" indent="0" marL="0">
-              <a:buNone/>
-            </a:pPr>
-            <a:r>
-              <a:rPr lang="en-US" sz="800" b="1" dirty="0">
+        <p:style>
+          <a:lnRef idx="1">
+            <a:schemeClr val="accent1"/>
+          </a:lnRef>
+          <a:fillRef idx="3">
+            <a:schemeClr val="accent1"/>
+          </a:fillRef>
+          <a:effectRef idx="2">
+            <a:schemeClr val="accent1"/>
+          </a:effectRef>
+          <a:fontRef idx="minor">
+            <a:schemeClr val="lt1"/>
+          </a:fontRef>
+        </p:style>
+        <p:txBody>
+          <a:bodyPr rtlCol="0" anchor="ctr"/>
+          <a:lstStyle/>
+          <a:p>
+            <a:pPr algn="ctr"/>
+          </a:p>
+        </p:txBody>
+      </p:sp>
+      <p:sp>
+        <p:nvSpPr>
+          <p:cNvPr id="7" name="TextBox 6"/>
+          <p:cNvSpPr txBox="1"/>
+          <p:nvPr/>
+        </p:nvSpPr>
+        <p:spPr>
+          <a:xfrm>
+            <a:off x="978408" y="2139696"/>
+            <a:ext cx="2057400" cy="237744"/>
+          </a:xfrm>
+          <a:prstGeom prst="rect">
+            <a:avLst/>
+          </a:prstGeom>
+          <a:noFill/>
+        </p:spPr>
+        <p:txBody>
+          <a:bodyPr wrap="none" lIns="0" rIns="0" tIns="0" bIns="0" anchor="ctr">
+            <a:spAutoFit/>
+          </a:bodyPr>
+          <a:lstStyle/>
+          <a:p>
+            <a:pPr algn="l"/>
+            <a:r>
+              <a:rPr sz="800" b="1">
                 <a:solidFill>
                   <a:srgbClr val="00A3FF"/>
                 </a:solidFill>
-              </a:rPr>
-              <a:t>MARKETABILITY SCORE</a:t>
-            </a:r>
-            <a:endParaRPr lang="en-US" sz="800" dirty="0"/>
-          </a:p>
-        </p:txBody>
-      </p:sp>
-      <p:sp>
-        <p:nvSpPr>
-          <p:cNvPr id="9" name="Text 7"/>
-          <p:cNvSpPr/>
-          <p:nvPr/>
-        </p:nvSpPr>
-        <p:spPr>
-          <a:xfrm>
-            <a:off x="713232" y="2331720"/>
-            <a:ext cx="2377440" cy="347472"/>
-          </a:xfrm>
-          <a:prstGeom prst="rect">
-            <a:avLst/>
-          </a:prstGeom>
-          <a:noFill/>
-          <a:ln/>
-        </p:spPr>
-        <p:txBody>
-          <a:bodyPr wrap="square" lIns="254" tIns="254" rIns="254" bIns="254" rtlCol="0" anchor="ctr">
-            <a:normAutofit/>
-          </a:bodyPr>
-          <a:lstStyle/>
-          <a:p>
-            <a:pPr algn="l" indent="0" marL="0">
-              <a:buNone/>
-            </a:pPr>
-            <a:r>
-              <a:rPr lang="en-US" sz="1800" b="1" dirty="0">
+                <a:latin typeface="Aptos"/>
+              </a:rPr>
+              <a:t>01  NORMALIZE</a:t>
+            </a:r>
+          </a:p>
+        </p:txBody>
+      </p:sp>
+      <p:sp>
+        <p:nvSpPr>
+          <p:cNvPr id="8" name="TextBox 7"/>
+          <p:cNvSpPr txBox="1"/>
+          <p:nvPr/>
+        </p:nvSpPr>
+        <p:spPr>
+          <a:xfrm>
+            <a:off x="978408" y="2633472"/>
+            <a:ext cx="2606040" cy="384048"/>
+          </a:xfrm>
+          <a:prstGeom prst="rect">
+            <a:avLst/>
+          </a:prstGeom>
+          <a:noFill/>
+        </p:spPr>
+        <p:txBody>
+          <a:bodyPr wrap="none" lIns="0" rIns="0" tIns="0" bIns="0" anchor="ctr">
+            <a:spAutoFit/>
+          </a:bodyPr>
+          <a:lstStyle/>
+          <a:p>
+            <a:pPr algn="l"/>
+            <a:r>
+              <a:rPr sz="1500" b="1">
                 <a:solidFill>
                   <a:srgbClr val="FFFFFF"/>
                 </a:solidFill>
-              </a:rPr>
-              <a:t>WeightedScore =</a:t>
-            </a:r>
-            <a:endParaRPr lang="en-US" sz="1800" dirty="0"/>
-          </a:p>
-        </p:txBody>
-      </p:sp>
-      <p:sp>
-        <p:nvSpPr>
-          <p:cNvPr id="10" name="Shape 8"/>
-          <p:cNvSpPr/>
-          <p:nvPr/>
-        </p:nvSpPr>
-        <p:spPr>
-          <a:xfrm>
-            <a:off x="713232" y="2926080"/>
-            <a:ext cx="1268730" cy="457200"/>
-          </a:xfrm>
-          <a:prstGeom prst="rect">
+                <a:latin typeface="Aptos"/>
+              </a:rPr>
+              <a:t>Raw counts are not comparable.</a:t>
+            </a:r>
+          </a:p>
+        </p:txBody>
+      </p:sp>
+      <p:sp>
+        <p:nvSpPr>
+          <p:cNvPr id="9" name="TextBox 8"/>
+          <p:cNvSpPr txBox="1"/>
+          <p:nvPr/>
+        </p:nvSpPr>
+        <p:spPr>
+          <a:xfrm>
+            <a:off x="978408" y="3172968"/>
+            <a:ext cx="2514600" cy="274320"/>
+          </a:xfrm>
+          <a:prstGeom prst="rect">
+            <a:avLst/>
+          </a:prstGeom>
+          <a:noFill/>
+        </p:spPr>
+        <p:txBody>
+          <a:bodyPr wrap="none" lIns="0" rIns="0" tIns="0" bIns="0" anchor="ctr">
+            <a:spAutoFit/>
+          </a:bodyPr>
+          <a:lstStyle/>
+          <a:p>
+            <a:pPr algn="l"/>
+            <a:r>
+              <a:rPr sz="950" b="0">
+                <a:solidFill>
+                  <a:srgbClr val="A9BAC9"/>
+                </a:solidFill>
+                <a:latin typeface="Aptos"/>
+              </a:rPr>
+              <a:t>For followers, views, and mentions:</a:t>
+            </a:r>
+          </a:p>
+        </p:txBody>
+      </p:sp>
+      <p:sp>
+        <p:nvSpPr>
+          <p:cNvPr id="10" name="TextBox 9"/>
+          <p:cNvSpPr txBox="1"/>
+          <p:nvPr/>
+        </p:nvSpPr>
+        <p:spPr>
+          <a:xfrm>
+            <a:off x="978408" y="3566160"/>
+            <a:ext cx="2194560" cy="384048"/>
+          </a:xfrm>
+          <a:prstGeom prst="rect">
+            <a:avLst/>
+          </a:prstGeom>
+          <a:noFill/>
+        </p:spPr>
+        <p:txBody>
+          <a:bodyPr wrap="none" lIns="0" rIns="0" tIns="0" bIns="0" anchor="ctr">
+            <a:spAutoFit/>
+          </a:bodyPr>
+          <a:lstStyle/>
+          <a:p>
+            <a:pPr algn="l"/>
+            <a:r>
+              <a:rPr sz="2200" b="1">
+                <a:solidFill>
+                  <a:srgbClr val="40D9FF"/>
+                </a:solidFill>
+                <a:latin typeface="Aptos"/>
+              </a:rPr>
+              <a:t>log(1 + x)</a:t>
+            </a:r>
+          </a:p>
+        </p:txBody>
+      </p:sp>
+      <p:sp>
+        <p:nvSpPr>
+          <p:cNvPr id="11" name="TextBox 10"/>
+          <p:cNvSpPr txBox="1"/>
+          <p:nvPr/>
+        </p:nvSpPr>
+        <p:spPr>
+          <a:xfrm>
+            <a:off x="978408" y="4069080"/>
+            <a:ext cx="2487168" cy="566928"/>
+          </a:xfrm>
+          <a:prstGeom prst="rect">
+            <a:avLst/>
+          </a:prstGeom>
+          <a:noFill/>
+        </p:spPr>
+        <p:txBody>
+          <a:bodyPr wrap="none" lIns="0" rIns="0" tIns="0" bIns="0" anchor="ctr">
+            <a:spAutoFit/>
+          </a:bodyPr>
+          <a:lstStyle/>
+          <a:p>
+            <a:pPr algn="l"/>
+            <a:r>
+              <a:rPr sz="1000" b="0">
+                <a:solidFill>
+                  <a:srgbClr val="A9BAC9"/>
+                </a:solidFill>
+                <a:latin typeface="Aptos"/>
+              </a:rPr>
+              <a:t>then percentile-rank every feature from 0–100.</a:t>
+            </a:r>
+          </a:p>
+        </p:txBody>
+      </p:sp>
+      <p:sp>
+        <p:nvSpPr>
+          <p:cNvPr id="12" name="Rounded Rectangle 11"/>
+          <p:cNvSpPr/>
+          <p:nvPr/>
+        </p:nvSpPr>
+        <p:spPr>
+          <a:xfrm>
+            <a:off x="978408" y="4882896"/>
+            <a:ext cx="1143000" cy="310896"/>
+          </a:xfrm>
+          <a:prstGeom prst="roundRect">
             <a:avLst/>
           </a:prstGeom>
           <a:solidFill>
-            <a:srgbClr val="00A3FF"/>
+            <a:srgbClr val="0D344F"/>
           </a:solidFill>
-          <a:ln w="12700">
+          <a:ln w="8890">
             <a:solidFill>
-              <a:srgbClr val="04111F">
-                <a:alpha val="0"/>
-              </a:srgbClr>
+              <a:srgbClr val="00A3FF"/>
             </a:solidFill>
-            <a:prstDash val="solid"/>
           </a:ln>
         </p:spPr>
-      </p:sp>
-      <p:sp>
-        <p:nvSpPr>
-          <p:cNvPr id="11" name="Shape 9"/>
-          <p:cNvSpPr/>
-          <p:nvPr/>
-        </p:nvSpPr>
-        <p:spPr>
-          <a:xfrm>
-            <a:off x="1981962" y="2926080"/>
-            <a:ext cx="1014984" cy="457200"/>
-          </a:xfrm>
-          <a:prstGeom prst="rect">
-            <a:avLst/>
-          </a:prstGeom>
-          <a:solidFill>
-            <a:srgbClr val="40D9FF"/>
-          </a:solidFill>
-          <a:ln w="12700">
-            <a:solidFill>
-              <a:srgbClr val="04111F">
-                <a:alpha val="0"/>
-              </a:srgbClr>
-            </a:solidFill>
-            <a:prstDash val="solid"/>
-          </a:ln>
-        </p:spPr>
-      </p:sp>
-      <p:sp>
-        <p:nvSpPr>
-          <p:cNvPr id="12" name="Shape 10"/>
-          <p:cNvSpPr/>
-          <p:nvPr/>
-        </p:nvSpPr>
-        <p:spPr>
-          <a:xfrm>
-            <a:off x="2996946" y="2926080"/>
-            <a:ext cx="1014984" cy="457200"/>
-          </a:xfrm>
-          <a:prstGeom prst="rect">
-            <a:avLst/>
-          </a:prstGeom>
-          <a:solidFill>
-            <a:srgbClr val="35D0BA"/>
-          </a:solidFill>
-          <a:ln w="12700">
-            <a:solidFill>
-              <a:srgbClr val="04111F">
-                <a:alpha val="0"/>
-              </a:srgbClr>
-            </a:solidFill>
-            <a:prstDash val="solid"/>
-          </a:ln>
-        </p:spPr>
-      </p:sp>
-      <p:sp>
-        <p:nvSpPr>
-          <p:cNvPr id="13" name="Shape 11"/>
-          <p:cNvSpPr/>
-          <p:nvPr/>
-        </p:nvSpPr>
-        <p:spPr>
-          <a:xfrm>
-            <a:off x="4011930" y="2926080"/>
-            <a:ext cx="761238" cy="457200"/>
-          </a:xfrm>
-          <a:prstGeom prst="rect">
-            <a:avLst/>
-          </a:prstGeom>
-          <a:solidFill>
-            <a:srgbClr val="F4C95D"/>
-          </a:solidFill>
-          <a:ln w="12700">
-            <a:solidFill>
-              <a:srgbClr val="04111F">
-                <a:alpha val="0"/>
-              </a:srgbClr>
-            </a:solidFill>
-            <a:prstDash val="solid"/>
-          </a:ln>
-        </p:spPr>
-      </p:sp>
-      <p:sp>
-        <p:nvSpPr>
-          <p:cNvPr id="14" name="Shape 12"/>
-          <p:cNvSpPr/>
-          <p:nvPr/>
-        </p:nvSpPr>
-        <p:spPr>
-          <a:xfrm>
-            <a:off x="4773168" y="2926080"/>
-            <a:ext cx="507492" cy="457200"/>
-          </a:xfrm>
-          <a:prstGeom prst="rect">
-            <a:avLst/>
-          </a:prstGeom>
-          <a:solidFill>
-            <a:srgbClr val="2477FF"/>
-          </a:solidFill>
-          <a:ln w="12700">
-            <a:solidFill>
-              <a:srgbClr val="04111F">
-                <a:alpha val="0"/>
-              </a:srgbClr>
-            </a:solidFill>
-            <a:prstDash val="solid"/>
-          </a:ln>
-        </p:spPr>
-      </p:sp>
-      <p:sp>
-        <p:nvSpPr>
-          <p:cNvPr id="15" name="Shape 13"/>
-          <p:cNvSpPr/>
-          <p:nvPr/>
-        </p:nvSpPr>
-        <p:spPr>
-          <a:xfrm>
-            <a:off x="5280660" y="2926080"/>
-            <a:ext cx="507492" cy="457200"/>
-          </a:xfrm>
-          <a:prstGeom prst="rect">
-            <a:avLst/>
-          </a:prstGeom>
-          <a:solidFill>
-            <a:srgbClr val="9B8CFF"/>
-          </a:solidFill>
-          <a:ln w="12700">
-            <a:solidFill>
-              <a:srgbClr val="04111F">
-                <a:alpha val="0"/>
-              </a:srgbClr>
-            </a:solidFill>
-            <a:prstDash val="solid"/>
-          </a:ln>
-        </p:spPr>
-      </p:sp>
-      <p:sp>
-        <p:nvSpPr>
-          <p:cNvPr id="16" name="Shape 14"/>
-          <p:cNvSpPr/>
-          <p:nvPr/>
-        </p:nvSpPr>
-        <p:spPr>
-          <a:xfrm>
-            <a:off x="722376" y="3721608"/>
-            <a:ext cx="128016" cy="128016"/>
-          </a:xfrm>
-          <a:prstGeom prst="ellipse">
-            <a:avLst/>
-          </a:prstGeom>
-          <a:solidFill>
-            <a:srgbClr val="00A3FF"/>
-          </a:solidFill>
-          <a:ln w="12700">
-            <a:solidFill>
-              <a:srgbClr val="00A3FF">
-                <a:alpha val="0"/>
-              </a:srgbClr>
-            </a:solidFill>
-            <a:prstDash val="solid"/>
-          </a:ln>
-        </p:spPr>
-      </p:sp>
-      <p:sp>
-        <p:nvSpPr>
-          <p:cNvPr id="17" name="Text 15"/>
-          <p:cNvSpPr/>
-          <p:nvPr/>
-        </p:nvSpPr>
-        <p:spPr>
-          <a:xfrm>
-            <a:off x="914400" y="3675888"/>
-            <a:ext cx="2240280" cy="228600"/>
-          </a:xfrm>
-          <a:prstGeom prst="rect">
-            <a:avLst/>
-          </a:prstGeom>
-          <a:noFill/>
-          <a:ln/>
-        </p:spPr>
-        <p:txBody>
-          <a:bodyPr wrap="square" lIns="254" tIns="254" rIns="254" bIns="254" rtlCol="0" anchor="ctr">
-            <a:normAutofit/>
-          </a:bodyPr>
-          <a:lstStyle/>
-          <a:p>
-            <a:pPr algn="l" indent="0" marL="0">
-              <a:buNone/>
-            </a:pPr>
-            <a:r>
-              <a:rPr lang="en-US" sz="850" b="1" dirty="0">
-                <a:solidFill>
-                  <a:srgbClr val="A9BAC9"/>
-                </a:solidFill>
-              </a:rPr>
-              <a:t>25% Performance</a:t>
-            </a:r>
-            <a:endParaRPr lang="en-US" sz="850" dirty="0"/>
-          </a:p>
-        </p:txBody>
-      </p:sp>
-      <p:sp>
-        <p:nvSpPr>
-          <p:cNvPr id="18" name="Shape 16"/>
-          <p:cNvSpPr/>
-          <p:nvPr/>
-        </p:nvSpPr>
-        <p:spPr>
-          <a:xfrm>
-            <a:off x="722376" y="4224528"/>
-            <a:ext cx="128016" cy="128016"/>
-          </a:xfrm>
-          <a:prstGeom prst="ellipse">
-            <a:avLst/>
-          </a:prstGeom>
-          <a:solidFill>
-            <a:srgbClr val="40D9FF"/>
-          </a:solidFill>
-          <a:ln w="12700">
-            <a:solidFill>
-              <a:srgbClr val="40D9FF">
-                <a:alpha val="0"/>
-              </a:srgbClr>
-            </a:solidFill>
-            <a:prstDash val="solid"/>
-          </a:ln>
-        </p:spPr>
-      </p:sp>
-      <p:sp>
-        <p:nvSpPr>
-          <p:cNvPr id="19" name="Text 17"/>
-          <p:cNvSpPr/>
-          <p:nvPr/>
-        </p:nvSpPr>
-        <p:spPr>
-          <a:xfrm>
-            <a:off x="914400" y="4178808"/>
-            <a:ext cx="2240280" cy="228600"/>
-          </a:xfrm>
-          <a:prstGeom prst="rect">
-            <a:avLst/>
-          </a:prstGeom>
-          <a:noFill/>
-          <a:ln/>
-        </p:spPr>
-        <p:txBody>
-          <a:bodyPr wrap="square" lIns="254" tIns="254" rIns="254" bIns="254" rtlCol="0" anchor="ctr">
-            <a:normAutofit/>
-          </a:bodyPr>
-          <a:lstStyle/>
-          <a:p>
-            <a:pPr algn="l" indent="0" marL="0">
-              <a:buNone/>
-            </a:pPr>
-            <a:r>
-              <a:rPr lang="en-US" sz="850" b="1" dirty="0">
-                <a:solidFill>
-                  <a:srgbClr val="A9BAC9"/>
-                </a:solidFill>
-              </a:rPr>
-              <a:t>20% Reach</a:t>
-            </a:r>
-            <a:endParaRPr lang="en-US" sz="850" dirty="0"/>
-          </a:p>
-        </p:txBody>
-      </p:sp>
-      <p:sp>
-        <p:nvSpPr>
-          <p:cNvPr id="20" name="Shape 18"/>
-          <p:cNvSpPr/>
-          <p:nvPr/>
-        </p:nvSpPr>
-        <p:spPr>
-          <a:xfrm>
-            <a:off x="722376" y="4727448"/>
-            <a:ext cx="128016" cy="128016"/>
-          </a:xfrm>
-          <a:prstGeom prst="ellipse">
-            <a:avLst/>
-          </a:prstGeom>
-          <a:solidFill>
-            <a:srgbClr val="35D0BA"/>
-          </a:solidFill>
-          <a:ln w="12700">
-            <a:solidFill>
-              <a:srgbClr val="35D0BA">
-                <a:alpha val="0"/>
-              </a:srgbClr>
-            </a:solidFill>
-            <a:prstDash val="solid"/>
-          </a:ln>
-        </p:spPr>
-      </p:sp>
-      <p:sp>
-        <p:nvSpPr>
-          <p:cNvPr id="21" name="Text 19"/>
-          <p:cNvSpPr/>
-          <p:nvPr/>
-        </p:nvSpPr>
-        <p:spPr>
-          <a:xfrm>
-            <a:off x="914400" y="4681728"/>
-            <a:ext cx="2240280" cy="228600"/>
-          </a:xfrm>
-          <a:prstGeom prst="rect">
-            <a:avLst/>
-          </a:prstGeom>
-          <a:noFill/>
-          <a:ln/>
-        </p:spPr>
-        <p:txBody>
-          <a:bodyPr wrap="square" lIns="254" tIns="254" rIns="254" bIns="254" rtlCol="0" anchor="ctr">
-            <a:normAutofit/>
-          </a:bodyPr>
-          <a:lstStyle/>
-          <a:p>
-            <a:pPr algn="l" indent="0" marL="0">
-              <a:buNone/>
-            </a:pPr>
-            <a:r>
-              <a:rPr lang="en-US" sz="850" b="1" dirty="0">
-                <a:solidFill>
-                  <a:srgbClr val="A9BAC9"/>
-                </a:solidFill>
-              </a:rPr>
-              <a:t>20% Attention</a:t>
-            </a:r>
-            <a:endParaRPr lang="en-US" sz="850" dirty="0"/>
-          </a:p>
-        </p:txBody>
-      </p:sp>
-      <p:sp>
-        <p:nvSpPr>
-          <p:cNvPr id="22" name="Shape 20"/>
-          <p:cNvSpPr/>
-          <p:nvPr/>
-        </p:nvSpPr>
-        <p:spPr>
-          <a:xfrm>
-            <a:off x="3419856" y="3721608"/>
-            <a:ext cx="128016" cy="128016"/>
-          </a:xfrm>
-          <a:prstGeom prst="ellipse">
-            <a:avLst/>
-          </a:prstGeom>
-          <a:solidFill>
-            <a:srgbClr val="F4C95D"/>
-          </a:solidFill>
-          <a:ln w="12700">
-            <a:solidFill>
-              <a:srgbClr val="F4C95D">
-                <a:alpha val="0"/>
-              </a:srgbClr>
-            </a:solidFill>
-            <a:prstDash val="solid"/>
-          </a:ln>
-        </p:spPr>
-      </p:sp>
-      <p:sp>
-        <p:nvSpPr>
-          <p:cNvPr id="23" name="Text 21"/>
-          <p:cNvSpPr/>
-          <p:nvPr/>
-        </p:nvSpPr>
-        <p:spPr>
-          <a:xfrm>
-            <a:off x="3611880" y="3675888"/>
-            <a:ext cx="2240280" cy="228600"/>
-          </a:xfrm>
-          <a:prstGeom prst="rect">
-            <a:avLst/>
-          </a:prstGeom>
-          <a:noFill/>
-          <a:ln/>
-        </p:spPr>
-        <p:txBody>
-          <a:bodyPr wrap="square" lIns="254" tIns="254" rIns="254" bIns="254" rtlCol="0" anchor="ctr">
-            <a:normAutofit/>
-          </a:bodyPr>
-          <a:lstStyle/>
-          <a:p>
-            <a:pPr algn="l" indent="0" marL="0">
-              <a:buNone/>
-            </a:pPr>
-            <a:r>
-              <a:rPr lang="en-US" sz="850" b="1" dirty="0">
-                <a:solidFill>
-                  <a:srgbClr val="A9BAC9"/>
-                </a:solidFill>
-              </a:rPr>
-              <a:t>15% Engagement</a:t>
-            </a:r>
-            <a:endParaRPr lang="en-US" sz="850" dirty="0"/>
-          </a:p>
-        </p:txBody>
-      </p:sp>
-      <p:sp>
-        <p:nvSpPr>
-          <p:cNvPr id="24" name="Shape 22"/>
-          <p:cNvSpPr/>
-          <p:nvPr/>
-        </p:nvSpPr>
-        <p:spPr>
-          <a:xfrm>
-            <a:off x="3419856" y="4224528"/>
-            <a:ext cx="128016" cy="128016"/>
-          </a:xfrm>
-          <a:prstGeom prst="ellipse">
-            <a:avLst/>
-          </a:prstGeom>
-          <a:solidFill>
-            <a:srgbClr val="2477FF"/>
-          </a:solidFill>
-          <a:ln w="12700">
-            <a:solidFill>
-              <a:srgbClr val="2477FF">
-                <a:alpha val="0"/>
-              </a:srgbClr>
-            </a:solidFill>
-            <a:prstDash val="solid"/>
-          </a:ln>
-        </p:spPr>
-      </p:sp>
-      <p:sp>
-        <p:nvSpPr>
-          <p:cNvPr id="25" name="Text 23"/>
-          <p:cNvSpPr/>
-          <p:nvPr/>
-        </p:nvSpPr>
-        <p:spPr>
-          <a:xfrm>
-            <a:off x="3611880" y="4178808"/>
-            <a:ext cx="2240280" cy="228600"/>
-          </a:xfrm>
-          <a:prstGeom prst="rect">
-            <a:avLst/>
-          </a:prstGeom>
-          <a:noFill/>
-          <a:ln/>
-        </p:spPr>
-        <p:txBody>
-          <a:bodyPr wrap="square" lIns="254" tIns="254" rIns="254" bIns="254" rtlCol="0" anchor="ctr">
-            <a:normAutofit/>
-          </a:bodyPr>
-          <a:lstStyle/>
-          <a:p>
-            <a:pPr algn="l" indent="0" marL="0">
-              <a:buNone/>
-            </a:pPr>
-            <a:r>
-              <a:rPr lang="en-US" sz="850" b="1" dirty="0">
-                <a:solidFill>
-                  <a:srgbClr val="A9BAC9"/>
-                </a:solidFill>
-              </a:rPr>
-              <a:t>10% Momentum</a:t>
-            </a:r>
-            <a:endParaRPr lang="en-US" sz="850" dirty="0"/>
-          </a:p>
-        </p:txBody>
-      </p:sp>
-      <p:sp>
-        <p:nvSpPr>
-          <p:cNvPr id="26" name="Shape 24"/>
-          <p:cNvSpPr/>
-          <p:nvPr/>
-        </p:nvSpPr>
-        <p:spPr>
-          <a:xfrm>
-            <a:off x="3419856" y="4727448"/>
-            <a:ext cx="128016" cy="128016"/>
-          </a:xfrm>
-          <a:prstGeom prst="ellipse">
-            <a:avLst/>
-          </a:prstGeom>
-          <a:solidFill>
-            <a:srgbClr val="9B8CFF"/>
-          </a:solidFill>
-          <a:ln w="12700">
-            <a:solidFill>
-              <a:srgbClr val="9B8CFF">
-                <a:alpha val="0"/>
-              </a:srgbClr>
-            </a:solidFill>
-            <a:prstDash val="solid"/>
-          </a:ln>
-        </p:spPr>
-      </p:sp>
-      <p:sp>
-        <p:nvSpPr>
-          <p:cNvPr id="27" name="Text 25"/>
-          <p:cNvSpPr/>
-          <p:nvPr/>
-        </p:nvSpPr>
-        <p:spPr>
-          <a:xfrm>
-            <a:off x="3611880" y="4681728"/>
-            <a:ext cx="2240280" cy="228600"/>
-          </a:xfrm>
-          <a:prstGeom prst="rect">
-            <a:avLst/>
-          </a:prstGeom>
-          <a:noFill/>
-          <a:ln/>
-        </p:spPr>
-        <p:txBody>
-          <a:bodyPr wrap="square" lIns="254" tIns="254" rIns="254" bIns="254" rtlCol="0" anchor="ctr">
-            <a:normAutofit/>
-          </a:bodyPr>
-          <a:lstStyle/>
-          <a:p>
-            <a:pPr algn="l" indent="0" marL="0">
-              <a:buNone/>
-            </a:pPr>
-            <a:r>
-              <a:rPr lang="en-US" sz="850" b="1" dirty="0">
-                <a:solidFill>
-                  <a:srgbClr val="A9BAC9"/>
-                </a:solidFill>
-              </a:rPr>
-              <a:t>10% Brand</a:t>
-            </a:r>
-            <a:endParaRPr lang="en-US" sz="850" dirty="0"/>
-          </a:p>
-        </p:txBody>
-      </p:sp>
-      <p:sp>
-        <p:nvSpPr>
-          <p:cNvPr id="28" name="Shape 26"/>
-          <p:cNvSpPr/>
-          <p:nvPr/>
-        </p:nvSpPr>
-        <p:spPr>
-          <a:xfrm>
-            <a:off x="6492240" y="1874520"/>
-            <a:ext cx="4892040" cy="3493008"/>
+        <p:style>
+          <a:lnRef idx="1">
+            <a:schemeClr val="accent1"/>
+          </a:lnRef>
+          <a:fillRef idx="3">
+            <a:schemeClr val="accent1"/>
+          </a:fillRef>
+          <a:effectRef idx="2">
+            <a:schemeClr val="accent1"/>
+          </a:effectRef>
+          <a:fontRef idx="minor">
+            <a:schemeClr val="lt1"/>
+          </a:fontRef>
+        </p:style>
+        <p:txBody>
+          <a:bodyPr rtlCol="0" anchor="ctr"/>
+          <a:lstStyle/>
+          <a:p>
+            <a:pPr algn="ctr"/>
+          </a:p>
+        </p:txBody>
+      </p:sp>
+      <p:sp>
+        <p:nvSpPr>
+          <p:cNvPr id="13" name="TextBox 12"/>
+          <p:cNvSpPr txBox="1"/>
+          <p:nvPr/>
+        </p:nvSpPr>
+        <p:spPr>
+          <a:xfrm>
+            <a:off x="1033272" y="4910328"/>
+            <a:ext cx="1033271" cy="228600"/>
+          </a:xfrm>
+          <a:prstGeom prst="rect">
+            <a:avLst/>
+          </a:prstGeom>
+          <a:noFill/>
+        </p:spPr>
+        <p:txBody>
+          <a:bodyPr wrap="none" lIns="0" rIns="0" tIns="0" bIns="0" anchor="ctr">
+            <a:spAutoFit/>
+          </a:bodyPr>
+          <a:lstStyle/>
+          <a:p>
+            <a:pPr algn="ctr"/>
+            <a:r>
+              <a:rPr sz="720" b="1">
+                <a:solidFill>
+                  <a:srgbClr val="F7FAFC"/>
+                </a:solidFill>
+                <a:latin typeface="Aptos"/>
+              </a:rPr>
+              <a:t>SAME SCALE</a:t>
+            </a:r>
+          </a:p>
+        </p:txBody>
+      </p:sp>
+      <p:sp>
+        <p:nvSpPr>
+          <p:cNvPr id="14" name="Rounded Rectangle 13"/>
+          <p:cNvSpPr/>
+          <p:nvPr/>
+        </p:nvSpPr>
+        <p:spPr>
+          <a:xfrm>
+            <a:off x="4160520" y="1874519"/>
+            <a:ext cx="3657600" cy="3611880"/>
           </a:xfrm>
           <a:prstGeom prst="roundRect">
-            <a:avLst>
-              <a:gd name="adj" fmla="val 2094"/>
-            </a:avLst>
+            <a:avLst/>
           </a:prstGeom>
           <a:solidFill>
             <a:srgbClr val="0B2741"/>
@@ -10147,402 +10014,110 @@
             <a:solidFill>
               <a:srgbClr val="193B57"/>
             </a:solidFill>
-            <a:prstDash val="solid"/>
           </a:ln>
         </p:spPr>
-      </p:sp>
-      <p:sp>
-        <p:nvSpPr>
-          <p:cNvPr id="29" name="Text 27"/>
-          <p:cNvSpPr/>
-          <p:nvPr/>
-        </p:nvSpPr>
-        <p:spPr>
-          <a:xfrm>
-            <a:off x="6793992" y="2176272"/>
-            <a:ext cx="2103120" cy="246888"/>
-          </a:xfrm>
-          <a:prstGeom prst="rect">
-            <a:avLst/>
-          </a:prstGeom>
-          <a:noFill/>
-          <a:ln/>
-        </p:spPr>
-        <p:txBody>
-          <a:bodyPr wrap="square" lIns="254" tIns="254" rIns="254" bIns="254" rtlCol="0" anchor="ctr">
-            <a:normAutofit/>
-          </a:bodyPr>
-          <a:lstStyle/>
-          <a:p>
-            <a:pPr algn="l" indent="0" marL="0">
-              <a:buNone/>
-            </a:pPr>
-            <a:r>
-              <a:rPr lang="en-US" sz="800" b="1" dirty="0">
+        <p:style>
+          <a:lnRef idx="1">
+            <a:schemeClr val="accent1"/>
+          </a:lnRef>
+          <a:fillRef idx="3">
+            <a:schemeClr val="accent1"/>
+          </a:fillRef>
+          <a:effectRef idx="2">
+            <a:schemeClr val="accent1"/>
+          </a:effectRef>
+          <a:fontRef idx="minor">
+            <a:schemeClr val="lt1"/>
+          </a:fontRef>
+        </p:style>
+        <p:txBody>
+          <a:bodyPr rtlCol="0" anchor="ctr"/>
+          <a:lstStyle/>
+          <a:p>
+            <a:pPr algn="ctr"/>
+          </a:p>
+        </p:txBody>
+      </p:sp>
+      <p:sp>
+        <p:nvSpPr>
+          <p:cNvPr id="15" name="TextBox 14"/>
+          <p:cNvSpPr txBox="1"/>
+          <p:nvPr/>
+        </p:nvSpPr>
+        <p:spPr>
+          <a:xfrm>
+            <a:off x="4425696" y="2139696"/>
+            <a:ext cx="2057400" cy="237744"/>
+          </a:xfrm>
+          <a:prstGeom prst="rect">
+            <a:avLst/>
+          </a:prstGeom>
+          <a:noFill/>
+        </p:spPr>
+        <p:txBody>
+          <a:bodyPr wrap="none" lIns="0" rIns="0" tIns="0" bIns="0" anchor="ctr">
+            <a:spAutoFit/>
+          </a:bodyPr>
+          <a:lstStyle/>
+          <a:p>
+            <a:pPr algn="l"/>
+            <a:r>
+              <a:rPr sz="800" b="1">
                 <a:solidFill>
                   <a:srgbClr val="35D0BA"/>
                 </a:solidFill>
-              </a:rPr>
-              <a:t>MARKETABILITY GAP</a:t>
-            </a:r>
-            <a:endParaRPr lang="en-US" sz="800" dirty="0"/>
-          </a:p>
-        </p:txBody>
-      </p:sp>
-      <p:sp>
-        <p:nvSpPr>
-          <p:cNvPr id="30" name="Text 28"/>
-          <p:cNvSpPr/>
-          <p:nvPr/>
-        </p:nvSpPr>
-        <p:spPr>
-          <a:xfrm>
-            <a:off x="6793992" y="2761488"/>
-            <a:ext cx="3749040" cy="438912"/>
-          </a:xfrm>
-          <a:prstGeom prst="rect">
-            <a:avLst/>
-          </a:prstGeom>
-          <a:noFill/>
-          <a:ln/>
-        </p:spPr>
-        <p:txBody>
-          <a:bodyPr wrap="square" lIns="254" tIns="254" rIns="254" bIns="254" rtlCol="0" anchor="ctr">
-            <a:normAutofit/>
-          </a:bodyPr>
-          <a:lstStyle/>
-          <a:p>
-            <a:pPr algn="l" indent="0" marL="0">
-              <a:buNone/>
-            </a:pPr>
-            <a:r>
-              <a:rPr lang="en-US" sz="2200" b="1" dirty="0">
+                <a:latin typeface="Aptos"/>
+              </a:rPr>
+              <a:t>02  SCORE</a:t>
+            </a:r>
+          </a:p>
+        </p:txBody>
+      </p:sp>
+      <p:sp>
+        <p:nvSpPr>
+          <p:cNvPr id="16" name="TextBox 15"/>
+          <p:cNvSpPr txBox="1"/>
+          <p:nvPr/>
+        </p:nvSpPr>
+        <p:spPr>
+          <a:xfrm>
+            <a:off x="4425696" y="2578608"/>
+            <a:ext cx="2651760" cy="320040"/>
+          </a:xfrm>
+          <a:prstGeom prst="rect">
+            <a:avLst/>
+          </a:prstGeom>
+          <a:noFill/>
+        </p:spPr>
+        <p:txBody>
+          <a:bodyPr wrap="none" lIns="0" rIns="0" tIns="0" bIns="0" anchor="ctr">
+            <a:spAutoFit/>
+          </a:bodyPr>
+          <a:lstStyle/>
+          <a:p>
+            <a:pPr algn="l"/>
+            <a:r>
+              <a:rPr sz="1700" b="1">
                 <a:solidFill>
                   <a:srgbClr val="FFFFFF"/>
                 </a:solidFill>
-              </a:rPr>
-              <a:t>Gap = Actual − Expected</a:t>
-            </a:r>
-            <a:endParaRPr lang="en-US" sz="2200" dirty="0"/>
-          </a:p>
-        </p:txBody>
-      </p:sp>
-      <p:sp>
-        <p:nvSpPr>
-          <p:cNvPr id="31" name="Text 29"/>
-          <p:cNvSpPr/>
-          <p:nvPr/>
-        </p:nvSpPr>
-        <p:spPr>
-          <a:xfrm>
-            <a:off x="6793992" y="3456432"/>
-            <a:ext cx="4023360" cy="896112"/>
-          </a:xfrm>
-          <a:prstGeom prst="rect">
-            <a:avLst/>
-          </a:prstGeom>
-          <a:noFill/>
-          <a:ln/>
-        </p:spPr>
-        <p:txBody>
-          <a:bodyPr wrap="square" lIns="254" tIns="254" rIns="254" bIns="254" rtlCol="0" anchor="ctr">
-            <a:normAutofit/>
-          </a:bodyPr>
-          <a:lstStyle/>
-          <a:p>
-            <a:pPr algn="l" indent="0" marL="0">
-              <a:buNone/>
-            </a:pPr>
-            <a:r>
-              <a:rPr lang="en-US" sz="1200" dirty="0">
-                <a:solidFill>
-                  <a:srgbClr val="A9BAC9"/>
-                </a:solidFill>
-              </a:rPr>
-              <a:t>Expected marketability is estimated from basketball performance. The residual becomes the opportunity signal.</a:t>
-            </a:r>
-            <a:endParaRPr lang="en-US" sz="1200" dirty="0"/>
-          </a:p>
-        </p:txBody>
-      </p:sp>
-      <p:sp>
-        <p:nvSpPr>
-          <p:cNvPr id="32" name="Shape 30"/>
-          <p:cNvSpPr/>
-          <p:nvPr/>
-        </p:nvSpPr>
-        <p:spPr>
-          <a:xfrm>
-            <a:off x="6766560" y="4736592"/>
-            <a:ext cx="2606040" cy="310896"/>
-          </a:xfrm>
-          <a:prstGeom prst="roundRect">
-            <a:avLst>
-              <a:gd name="adj" fmla="val 29412"/>
-            </a:avLst>
-          </a:prstGeom>
-          <a:solidFill>
-            <a:srgbClr val="F4C95D">
-              <a:alpha val="18000"/>
-            </a:srgbClr>
-          </a:solidFill>
-          <a:ln w="7620">
-            <a:solidFill>
-              <a:srgbClr val="F4C95D">
-                <a:alpha val="65000"/>
-              </a:srgbClr>
-            </a:solidFill>
-            <a:prstDash val="solid"/>
-          </a:ln>
-        </p:spPr>
-      </p:sp>
-      <p:sp>
-        <p:nvSpPr>
-          <p:cNvPr id="33" name="Text 31"/>
-          <p:cNvSpPr/>
-          <p:nvPr/>
-        </p:nvSpPr>
-        <p:spPr>
-          <a:xfrm>
-            <a:off x="6821424" y="4773168"/>
-            <a:ext cx="2496312" cy="219456"/>
-          </a:xfrm>
-          <a:prstGeom prst="rect">
-            <a:avLst/>
-          </a:prstGeom>
-          <a:noFill/>
-          <a:ln/>
-        </p:spPr>
-        <p:txBody>
-          <a:bodyPr wrap="square" lIns="254" tIns="254" rIns="254" bIns="254" rtlCol="0" anchor="ctr">
-            <a:normAutofit/>
-          </a:bodyPr>
-          <a:lstStyle/>
-          <a:p>
-            <a:pPr algn="ctr" indent="0" marL="0">
-              <a:buNone/>
-            </a:pPr>
-            <a:r>
-              <a:rPr lang="en-US" sz="730" b="1" dirty="0">
-                <a:solidFill>
-                  <a:srgbClr val="F7FAFC"/>
-                </a:solidFill>
-              </a:rPr>
-              <a:t>NEGATIVE GAP = UNTAPPED UPSIDE</a:t>
-            </a:r>
-            <a:endParaRPr lang="en-US" sz="730" dirty="0"/>
-          </a:p>
-        </p:txBody>
-      </p:sp>
-      <p:sp>
-        <p:nvSpPr>
-          <p:cNvPr id="34" name="Shape 32"/>
-          <p:cNvSpPr/>
-          <p:nvPr/>
-        </p:nvSpPr>
-        <p:spPr>
-          <a:xfrm>
-            <a:off x="914400" y="5413248"/>
-            <a:ext cx="6903720" cy="0"/>
-          </a:xfrm>
-          <a:prstGeom prst="line">
-            <a:avLst/>
-          </a:prstGeom>
-          <a:noFill/>
-          <a:ln w="13970">
-            <a:solidFill>
-              <a:srgbClr val="7891A4"/>
-            </a:solidFill>
-            <a:prstDash val="solid"/>
-            <a:headEnd type="none"/>
-            <a:tailEnd type="triangle"/>
-          </a:ln>
-        </p:spPr>
-      </p:sp>
-      <p:sp>
-        <p:nvSpPr>
-          <p:cNvPr id="35" name="Shape 33"/>
-          <p:cNvSpPr/>
-          <p:nvPr/>
-        </p:nvSpPr>
-        <p:spPr>
-          <a:xfrm>
-            <a:off x="914400" y="5413248"/>
-            <a:ext cx="0" cy="-3538728"/>
-          </a:xfrm>
-          <a:prstGeom prst="line">
-            <a:avLst/>
-          </a:prstGeom>
-          <a:noFill/>
-          <a:ln w="13970">
-            <a:solidFill>
-              <a:srgbClr val="7891A4"/>
-            </a:solidFill>
-            <a:prstDash val="solid"/>
-            <a:headEnd type="none"/>
-            <a:tailEnd type="triangle"/>
-          </a:ln>
-        </p:spPr>
-      </p:sp>
-      <p:sp>
-        <p:nvSpPr>
-          <p:cNvPr id="36" name="Shape 34"/>
-          <p:cNvSpPr/>
-          <p:nvPr/>
-        </p:nvSpPr>
-        <p:spPr>
-          <a:xfrm>
-            <a:off x="4370832" y="2011680"/>
-            <a:ext cx="0" cy="3246120"/>
-          </a:xfrm>
-          <a:prstGeom prst="line">
-            <a:avLst/>
-          </a:prstGeom>
-          <a:noFill/>
-          <a:ln w="10160">
-            <a:solidFill>
-              <a:srgbClr val="193B57"/>
-            </a:solidFill>
-            <a:prstDash val="solid"/>
-          </a:ln>
-        </p:spPr>
-      </p:sp>
-      <p:sp>
-        <p:nvSpPr>
-          <p:cNvPr id="37" name="Shape 35"/>
-          <p:cNvSpPr/>
-          <p:nvPr/>
-        </p:nvSpPr>
-        <p:spPr>
-          <a:xfrm>
-            <a:off x="1051560" y="3703320"/>
-            <a:ext cx="6583680" cy="0"/>
-          </a:xfrm>
-          <a:prstGeom prst="line">
-            <a:avLst/>
-          </a:prstGeom>
-          <a:noFill/>
-          <a:ln w="10160">
-            <a:solidFill>
-              <a:srgbClr val="193B57"/>
-            </a:solidFill>
-            <a:prstDash val="solid"/>
-          </a:ln>
-        </p:spPr>
-      </p:sp>
-      <p:sp>
-        <p:nvSpPr>
-          <p:cNvPr id="38" name="Text 36"/>
-          <p:cNvSpPr/>
-          <p:nvPr/>
-        </p:nvSpPr>
-        <p:spPr>
-          <a:xfrm>
-            <a:off x="2852928" y="5623560"/>
-            <a:ext cx="3108960" cy="237744"/>
-          </a:xfrm>
-          <a:prstGeom prst="rect">
-            <a:avLst/>
-          </a:prstGeom>
-          <a:noFill/>
-          <a:ln/>
-        </p:spPr>
-        <p:txBody>
-          <a:bodyPr wrap="square" lIns="254" tIns="254" rIns="254" bIns="254" rtlCol="0" anchor="ctr">
-            <a:normAutofit/>
-          </a:bodyPr>
-          <a:lstStyle/>
-          <a:p>
-            <a:pPr algn="ctr" indent="0" marL="0">
-              <a:buNone/>
-            </a:pPr>
-            <a:r>
-              <a:rPr lang="en-US" sz="800" b="1" dirty="0">
-                <a:solidFill>
-                  <a:srgbClr val="7F95A6"/>
-                </a:solidFill>
-              </a:rPr>
-              <a:t>BASKETBALL PERFORMANCE →</a:t>
-            </a:r>
-            <a:endParaRPr lang="en-US" sz="800" dirty="0"/>
-          </a:p>
-        </p:txBody>
-      </p:sp>
-      <p:sp>
-        <p:nvSpPr>
-          <p:cNvPr id="39" name="Text 37"/>
-          <p:cNvSpPr/>
-          <p:nvPr/>
-        </p:nvSpPr>
-        <p:spPr>
-          <a:xfrm>
-            <a:off x="164592" y="2944368"/>
-            <a:ext cx="1005840" cy="228600"/>
-          </a:xfrm>
-          <a:prstGeom prst="rect">
-            <a:avLst/>
-          </a:prstGeom>
-          <a:noFill/>
-          <a:ln/>
-        </p:spPr>
-        <p:txBody>
-          <a:bodyPr wrap="square" lIns="254" tIns="254" rIns="254" bIns="254" rtlCol="0" anchor="ctr">
-            <a:normAutofit/>
-          </a:bodyPr>
-          <a:lstStyle/>
-          <a:p>
-            <a:pPr algn="l" indent="0" marL="0">
-              <a:buNone/>
-            </a:pPr>
-            <a:r>
-              <a:rPr lang="en-US" sz="740" b="1" dirty="0">
-                <a:solidFill>
-                  <a:srgbClr val="7F95A6"/>
-                </a:solidFill>
-              </a:rPr>
-              <a:t>MARKETABILITY →</a:t>
-            </a:r>
-            <a:endParaRPr lang="en-US" sz="740" dirty="0"/>
-          </a:p>
-        </p:txBody>
-      </p:sp>
-      <p:sp>
-        <p:nvSpPr>
-          <p:cNvPr id="40" name="Shape 38"/>
-          <p:cNvSpPr/>
-          <p:nvPr/>
-        </p:nvSpPr>
-        <p:spPr>
-          <a:xfrm>
-            <a:off x="1751076" y="4585716"/>
-            <a:ext cx="155448" cy="155448"/>
-          </a:xfrm>
-          <a:prstGeom prst="ellipse">
-            <a:avLst/>
-          </a:prstGeom>
-          <a:solidFill>
-            <a:srgbClr val="66798B"/>
-          </a:solidFill>
-          <a:ln w="12700">
-            <a:solidFill>
-              <a:srgbClr val="66798B">
-                <a:alpha val="0"/>
-              </a:srgbClr>
-            </a:solidFill>
-            <a:prstDash val="solid"/>
-          </a:ln>
-        </p:spPr>
-      </p:sp>
-      <p:sp>
-        <p:nvSpPr>
-          <p:cNvPr id="41" name="Shape 39"/>
-          <p:cNvSpPr/>
-          <p:nvPr/>
-        </p:nvSpPr>
-        <p:spPr>
-          <a:xfrm>
-            <a:off x="2208276" y="4128516"/>
-            <a:ext cx="155448" cy="155448"/>
+                <a:latin typeface="Aptos"/>
+              </a:rPr>
+              <a:t>Marketability score</a:t>
+            </a:r>
+          </a:p>
+        </p:txBody>
+      </p:sp>
+      <p:sp>
+        <p:nvSpPr>
+          <p:cNvPr id="17" name="Oval 16"/>
+          <p:cNvSpPr/>
+          <p:nvPr/>
+        </p:nvSpPr>
+        <p:spPr>
+          <a:xfrm>
+            <a:off x="4443984" y="3154679"/>
+            <a:ext cx="91440" cy="91440"/>
           </a:xfrm>
           <a:prstGeom prst="ellipse">
             <a:avLst/>
@@ -10550,53 +10125,225 @@
           <a:solidFill>
             <a:srgbClr val="00A3FF"/>
           </a:solidFill>
-          <a:ln w="12700">
-            <a:solidFill>
-              <a:srgbClr val="00A3FF">
-                <a:alpha val="0"/>
-              </a:srgbClr>
-            </a:solidFill>
-            <a:prstDash val="solid"/>
+          <a:ln>
+            <a:noFill/>
           </a:ln>
         </p:spPr>
-      </p:sp>
-      <p:sp>
-        <p:nvSpPr>
-          <p:cNvPr id="42" name="Shape 40"/>
-          <p:cNvSpPr/>
-          <p:nvPr/>
-        </p:nvSpPr>
-        <p:spPr>
-          <a:xfrm>
-            <a:off x="2939796" y="4448556"/>
-            <a:ext cx="155448" cy="155448"/>
+        <p:style>
+          <a:lnRef idx="1">
+            <a:schemeClr val="accent1"/>
+          </a:lnRef>
+          <a:fillRef idx="3">
+            <a:schemeClr val="accent1"/>
+          </a:fillRef>
+          <a:effectRef idx="2">
+            <a:schemeClr val="accent1"/>
+          </a:effectRef>
+          <a:fontRef idx="minor">
+            <a:schemeClr val="lt1"/>
+          </a:fontRef>
+        </p:style>
+        <p:txBody>
+          <a:bodyPr rtlCol="0" anchor="ctr"/>
+          <a:lstStyle/>
+          <a:p>
+            <a:pPr algn="ctr"/>
+          </a:p>
+        </p:txBody>
+      </p:sp>
+      <p:sp>
+        <p:nvSpPr>
+          <p:cNvPr id="18" name="TextBox 17"/>
+          <p:cNvSpPr txBox="1"/>
+          <p:nvPr/>
+        </p:nvSpPr>
+        <p:spPr>
+          <a:xfrm>
+            <a:off x="4645152" y="3090672"/>
+            <a:ext cx="530352" cy="210312"/>
+          </a:xfrm>
+          <a:prstGeom prst="rect">
+            <a:avLst/>
+          </a:prstGeom>
+          <a:noFill/>
+        </p:spPr>
+        <p:txBody>
+          <a:bodyPr wrap="none" lIns="0" rIns="0" tIns="0" bIns="0" anchor="ctr">
+            <a:spAutoFit/>
+          </a:bodyPr>
+          <a:lstStyle/>
+          <a:p>
+            <a:pPr algn="l"/>
+            <a:r>
+              <a:rPr sz="850" b="1">
+                <a:solidFill>
+                  <a:srgbClr val="00A3FF"/>
+                </a:solidFill>
+                <a:latin typeface="Aptos"/>
+              </a:rPr>
+              <a:t>25%</a:t>
+            </a:r>
+          </a:p>
+        </p:txBody>
+      </p:sp>
+      <p:sp>
+        <p:nvSpPr>
+          <p:cNvPr id="19" name="TextBox 18"/>
+          <p:cNvSpPr txBox="1"/>
+          <p:nvPr/>
+        </p:nvSpPr>
+        <p:spPr>
+          <a:xfrm>
+            <a:off x="5230368" y="3090672"/>
+            <a:ext cx="1737360" cy="210312"/>
+          </a:xfrm>
+          <a:prstGeom prst="rect">
+            <a:avLst/>
+          </a:prstGeom>
+          <a:noFill/>
+        </p:spPr>
+        <p:txBody>
+          <a:bodyPr wrap="none" lIns="0" rIns="0" tIns="0" bIns="0" anchor="ctr">
+            <a:spAutoFit/>
+          </a:bodyPr>
+          <a:lstStyle/>
+          <a:p>
+            <a:pPr algn="l"/>
+            <a:r>
+              <a:rPr sz="850" b="1">
+                <a:solidFill>
+                  <a:srgbClr val="F7FAFC"/>
+                </a:solidFill>
+                <a:latin typeface="Aptos"/>
+              </a:rPr>
+              <a:t>Performance</a:t>
+            </a:r>
+          </a:p>
+        </p:txBody>
+      </p:sp>
+      <p:sp>
+        <p:nvSpPr>
+          <p:cNvPr id="20" name="Oval 19"/>
+          <p:cNvSpPr/>
+          <p:nvPr/>
+        </p:nvSpPr>
+        <p:spPr>
+          <a:xfrm>
+            <a:off x="4443984" y="3483863"/>
+            <a:ext cx="91440" cy="91440"/>
           </a:xfrm>
           <a:prstGeom prst="ellipse">
             <a:avLst/>
           </a:prstGeom>
           <a:solidFill>
-            <a:srgbClr val="66798B"/>
+            <a:srgbClr val="40D9FF"/>
           </a:solidFill>
-          <a:ln w="12700">
-            <a:solidFill>
-              <a:srgbClr val="66798B">
-                <a:alpha val="0"/>
-              </a:srgbClr>
-            </a:solidFill>
-            <a:prstDash val="solid"/>
+          <a:ln>
+            <a:noFill/>
           </a:ln>
         </p:spPr>
-      </p:sp>
-      <p:sp>
-        <p:nvSpPr>
-          <p:cNvPr id="43" name="Shape 41"/>
-          <p:cNvSpPr/>
-          <p:nvPr/>
-        </p:nvSpPr>
-        <p:spPr>
-          <a:xfrm>
-            <a:off x="3488436" y="3351276"/>
-            <a:ext cx="155448" cy="155448"/>
+        <p:style>
+          <a:lnRef idx="1">
+            <a:schemeClr val="accent1"/>
+          </a:lnRef>
+          <a:fillRef idx="3">
+            <a:schemeClr val="accent1"/>
+          </a:fillRef>
+          <a:effectRef idx="2">
+            <a:schemeClr val="accent1"/>
+          </a:effectRef>
+          <a:fontRef idx="minor">
+            <a:schemeClr val="lt1"/>
+          </a:fontRef>
+        </p:style>
+        <p:txBody>
+          <a:bodyPr rtlCol="0" anchor="ctr"/>
+          <a:lstStyle/>
+          <a:p>
+            <a:pPr algn="ctr"/>
+          </a:p>
+        </p:txBody>
+      </p:sp>
+      <p:sp>
+        <p:nvSpPr>
+          <p:cNvPr id="21" name="TextBox 20"/>
+          <p:cNvSpPr txBox="1"/>
+          <p:nvPr/>
+        </p:nvSpPr>
+        <p:spPr>
+          <a:xfrm>
+            <a:off x="4645152" y="3419856"/>
+            <a:ext cx="530352" cy="210312"/>
+          </a:xfrm>
+          <a:prstGeom prst="rect">
+            <a:avLst/>
+          </a:prstGeom>
+          <a:noFill/>
+        </p:spPr>
+        <p:txBody>
+          <a:bodyPr wrap="none" lIns="0" rIns="0" tIns="0" bIns="0" anchor="ctr">
+            <a:spAutoFit/>
+          </a:bodyPr>
+          <a:lstStyle/>
+          <a:p>
+            <a:pPr algn="l"/>
+            <a:r>
+              <a:rPr sz="850" b="1">
+                <a:solidFill>
+                  <a:srgbClr val="40D9FF"/>
+                </a:solidFill>
+                <a:latin typeface="Aptos"/>
+              </a:rPr>
+              <a:t>20%</a:t>
+            </a:r>
+          </a:p>
+        </p:txBody>
+      </p:sp>
+      <p:sp>
+        <p:nvSpPr>
+          <p:cNvPr id="22" name="TextBox 21"/>
+          <p:cNvSpPr txBox="1"/>
+          <p:nvPr/>
+        </p:nvSpPr>
+        <p:spPr>
+          <a:xfrm>
+            <a:off x="5230368" y="3419856"/>
+            <a:ext cx="1737360" cy="210312"/>
+          </a:xfrm>
+          <a:prstGeom prst="rect">
+            <a:avLst/>
+          </a:prstGeom>
+          <a:noFill/>
+        </p:spPr>
+        <p:txBody>
+          <a:bodyPr wrap="none" lIns="0" rIns="0" tIns="0" bIns="0" anchor="ctr">
+            <a:spAutoFit/>
+          </a:bodyPr>
+          <a:lstStyle/>
+          <a:p>
+            <a:pPr algn="l"/>
+            <a:r>
+              <a:rPr sz="850" b="1">
+                <a:solidFill>
+                  <a:srgbClr val="F7FAFC"/>
+                </a:solidFill>
+                <a:latin typeface="Aptos"/>
+              </a:rPr>
+              <a:t>Reach</a:t>
+            </a:r>
+          </a:p>
+        </p:txBody>
+      </p:sp>
+      <p:sp>
+        <p:nvSpPr>
+          <p:cNvPr id="23" name="Oval 22"/>
+          <p:cNvSpPr/>
+          <p:nvPr/>
+        </p:nvSpPr>
+        <p:spPr>
+          <a:xfrm>
+            <a:off x="4443984" y="3813048"/>
+            <a:ext cx="91440" cy="91440"/>
           </a:xfrm>
           <a:prstGeom prst="ellipse">
             <a:avLst/>
@@ -10604,26 +10351,112 @@
           <a:solidFill>
             <a:srgbClr val="35D0BA"/>
           </a:solidFill>
-          <a:ln w="12700">
-            <a:solidFill>
-              <a:srgbClr val="35D0BA">
-                <a:alpha val="0"/>
-              </a:srgbClr>
-            </a:solidFill>
-            <a:prstDash val="solid"/>
+          <a:ln>
+            <a:noFill/>
           </a:ln>
         </p:spPr>
-      </p:sp>
-      <p:sp>
-        <p:nvSpPr>
-          <p:cNvPr id="44" name="Shape 42"/>
-          <p:cNvSpPr/>
-          <p:nvPr/>
-        </p:nvSpPr>
-        <p:spPr>
-          <a:xfrm>
-            <a:off x="4791456" y="4398264"/>
-            <a:ext cx="201168" cy="201168"/>
+        <p:style>
+          <a:lnRef idx="1">
+            <a:schemeClr val="accent1"/>
+          </a:lnRef>
+          <a:fillRef idx="3">
+            <a:schemeClr val="accent1"/>
+          </a:fillRef>
+          <a:effectRef idx="2">
+            <a:schemeClr val="accent1"/>
+          </a:effectRef>
+          <a:fontRef idx="minor">
+            <a:schemeClr val="lt1"/>
+          </a:fontRef>
+        </p:style>
+        <p:txBody>
+          <a:bodyPr rtlCol="0" anchor="ctr"/>
+          <a:lstStyle/>
+          <a:p>
+            <a:pPr algn="ctr"/>
+          </a:p>
+        </p:txBody>
+      </p:sp>
+      <p:sp>
+        <p:nvSpPr>
+          <p:cNvPr id="24" name="TextBox 23"/>
+          <p:cNvSpPr txBox="1"/>
+          <p:nvPr/>
+        </p:nvSpPr>
+        <p:spPr>
+          <a:xfrm>
+            <a:off x="4645152" y="3749039"/>
+            <a:ext cx="530352" cy="210312"/>
+          </a:xfrm>
+          <a:prstGeom prst="rect">
+            <a:avLst/>
+          </a:prstGeom>
+          <a:noFill/>
+        </p:spPr>
+        <p:txBody>
+          <a:bodyPr wrap="none" lIns="0" rIns="0" tIns="0" bIns="0" anchor="ctr">
+            <a:spAutoFit/>
+          </a:bodyPr>
+          <a:lstStyle/>
+          <a:p>
+            <a:pPr algn="l"/>
+            <a:r>
+              <a:rPr sz="850" b="1">
+                <a:solidFill>
+                  <a:srgbClr val="35D0BA"/>
+                </a:solidFill>
+                <a:latin typeface="Aptos"/>
+              </a:rPr>
+              <a:t>20%</a:t>
+            </a:r>
+          </a:p>
+        </p:txBody>
+      </p:sp>
+      <p:sp>
+        <p:nvSpPr>
+          <p:cNvPr id="25" name="TextBox 24"/>
+          <p:cNvSpPr txBox="1"/>
+          <p:nvPr/>
+        </p:nvSpPr>
+        <p:spPr>
+          <a:xfrm>
+            <a:off x="5230368" y="3749039"/>
+            <a:ext cx="1737360" cy="210312"/>
+          </a:xfrm>
+          <a:prstGeom prst="rect">
+            <a:avLst/>
+          </a:prstGeom>
+          <a:noFill/>
+        </p:spPr>
+        <p:txBody>
+          <a:bodyPr wrap="none" lIns="0" rIns="0" tIns="0" bIns="0" anchor="ctr">
+            <a:spAutoFit/>
+          </a:bodyPr>
+          <a:lstStyle/>
+          <a:p>
+            <a:pPr algn="l"/>
+            <a:r>
+              <a:rPr sz="850" b="1">
+                <a:solidFill>
+                  <a:srgbClr val="F7FAFC"/>
+                </a:solidFill>
+                <a:latin typeface="Aptos"/>
+              </a:rPr>
+              <a:t>Attention</a:t>
+            </a:r>
+          </a:p>
+        </p:txBody>
+      </p:sp>
+      <p:sp>
+        <p:nvSpPr>
+          <p:cNvPr id="26" name="Oval 25"/>
+          <p:cNvSpPr/>
+          <p:nvPr/>
+        </p:nvSpPr>
+        <p:spPr>
+          <a:xfrm>
+            <a:off x="4443984" y="4142232"/>
+            <a:ext cx="91440" cy="91440"/>
           </a:xfrm>
           <a:prstGeom prst="ellipse">
             <a:avLst/>
@@ -10631,139 +10464,376 @@
           <a:solidFill>
             <a:srgbClr val="F4C95D"/>
           </a:solidFill>
-          <a:ln w="12700">
-            <a:solidFill>
-              <a:srgbClr val="F4C95D">
-                <a:alpha val="0"/>
-              </a:srgbClr>
-            </a:solidFill>
-            <a:prstDash val="solid"/>
+          <a:ln>
+            <a:noFill/>
           </a:ln>
         </p:spPr>
-      </p:sp>
-      <p:sp>
-        <p:nvSpPr>
-          <p:cNvPr id="45" name="Shape 43"/>
-          <p:cNvSpPr/>
-          <p:nvPr/>
-        </p:nvSpPr>
-        <p:spPr>
-          <a:xfrm>
-            <a:off x="5340096" y="4059936"/>
-            <a:ext cx="201168" cy="201168"/>
+        <p:style>
+          <a:lnRef idx="1">
+            <a:schemeClr val="accent1"/>
+          </a:lnRef>
+          <a:fillRef idx="3">
+            <a:schemeClr val="accent1"/>
+          </a:fillRef>
+          <a:effectRef idx="2">
+            <a:schemeClr val="accent1"/>
+          </a:effectRef>
+          <a:fontRef idx="minor">
+            <a:schemeClr val="lt1"/>
+          </a:fontRef>
+        </p:style>
+        <p:txBody>
+          <a:bodyPr rtlCol="0" anchor="ctr"/>
+          <a:lstStyle/>
+          <a:p>
+            <a:pPr algn="ctr"/>
+          </a:p>
+        </p:txBody>
+      </p:sp>
+      <p:sp>
+        <p:nvSpPr>
+          <p:cNvPr id="27" name="TextBox 26"/>
+          <p:cNvSpPr txBox="1"/>
+          <p:nvPr/>
+        </p:nvSpPr>
+        <p:spPr>
+          <a:xfrm>
+            <a:off x="4645152" y="4078224"/>
+            <a:ext cx="530352" cy="210312"/>
+          </a:xfrm>
+          <a:prstGeom prst="rect">
+            <a:avLst/>
+          </a:prstGeom>
+          <a:noFill/>
+        </p:spPr>
+        <p:txBody>
+          <a:bodyPr wrap="none" lIns="0" rIns="0" tIns="0" bIns="0" anchor="ctr">
+            <a:spAutoFit/>
+          </a:bodyPr>
+          <a:lstStyle/>
+          <a:p>
+            <a:pPr algn="l"/>
+            <a:r>
+              <a:rPr sz="850" b="1">
+                <a:solidFill>
+                  <a:srgbClr val="F4C95D"/>
+                </a:solidFill>
+                <a:latin typeface="Aptos"/>
+              </a:rPr>
+              <a:t>15%</a:t>
+            </a:r>
+          </a:p>
+        </p:txBody>
+      </p:sp>
+      <p:sp>
+        <p:nvSpPr>
+          <p:cNvPr id="28" name="TextBox 27"/>
+          <p:cNvSpPr txBox="1"/>
+          <p:nvPr/>
+        </p:nvSpPr>
+        <p:spPr>
+          <a:xfrm>
+            <a:off x="5230368" y="4078224"/>
+            <a:ext cx="1737360" cy="210312"/>
+          </a:xfrm>
+          <a:prstGeom prst="rect">
+            <a:avLst/>
+          </a:prstGeom>
+          <a:noFill/>
+        </p:spPr>
+        <p:txBody>
+          <a:bodyPr wrap="none" lIns="0" rIns="0" tIns="0" bIns="0" anchor="ctr">
+            <a:spAutoFit/>
+          </a:bodyPr>
+          <a:lstStyle/>
+          <a:p>
+            <a:pPr algn="l"/>
+            <a:r>
+              <a:rPr sz="850" b="1">
+                <a:solidFill>
+                  <a:srgbClr val="F7FAFC"/>
+                </a:solidFill>
+                <a:latin typeface="Aptos"/>
+              </a:rPr>
+              <a:t>Engagement</a:t>
+            </a:r>
+          </a:p>
+        </p:txBody>
+      </p:sp>
+      <p:sp>
+        <p:nvSpPr>
+          <p:cNvPr id="29" name="Oval 28"/>
+          <p:cNvSpPr/>
+          <p:nvPr/>
+        </p:nvSpPr>
+        <p:spPr>
+          <a:xfrm>
+            <a:off x="4443984" y="4471416"/>
+            <a:ext cx="91440" cy="91440"/>
           </a:xfrm>
           <a:prstGeom prst="ellipse">
             <a:avLst/>
           </a:prstGeom>
           <a:solidFill>
-            <a:srgbClr val="F4C95D"/>
+            <a:srgbClr val="2477FF"/>
           </a:solidFill>
-          <a:ln w="12700">
-            <a:solidFill>
-              <a:srgbClr val="F4C95D">
-                <a:alpha val="0"/>
-              </a:srgbClr>
-            </a:solidFill>
-            <a:prstDash val="solid"/>
+          <a:ln>
+            <a:noFill/>
           </a:ln>
         </p:spPr>
-      </p:sp>
-      <p:sp>
-        <p:nvSpPr>
-          <p:cNvPr id="46" name="Shape 44"/>
-          <p:cNvSpPr/>
-          <p:nvPr/>
-        </p:nvSpPr>
-        <p:spPr>
-          <a:xfrm>
-            <a:off x="6048756" y="3140964"/>
-            <a:ext cx="155448" cy="155448"/>
+        <p:style>
+          <a:lnRef idx="1">
+            <a:schemeClr val="accent1"/>
+          </a:lnRef>
+          <a:fillRef idx="3">
+            <a:schemeClr val="accent1"/>
+          </a:fillRef>
+          <a:effectRef idx="2">
+            <a:schemeClr val="accent1"/>
+          </a:effectRef>
+          <a:fontRef idx="minor">
+            <a:schemeClr val="lt1"/>
+          </a:fontRef>
+        </p:style>
+        <p:txBody>
+          <a:bodyPr rtlCol="0" anchor="ctr"/>
+          <a:lstStyle/>
+          <a:p>
+            <a:pPr algn="ctr"/>
+          </a:p>
+        </p:txBody>
+      </p:sp>
+      <p:sp>
+        <p:nvSpPr>
+          <p:cNvPr id="30" name="TextBox 29"/>
+          <p:cNvSpPr txBox="1"/>
+          <p:nvPr/>
+        </p:nvSpPr>
+        <p:spPr>
+          <a:xfrm>
+            <a:off x="4645152" y="4407408"/>
+            <a:ext cx="530352" cy="210312"/>
+          </a:xfrm>
+          <a:prstGeom prst="rect">
+            <a:avLst/>
+          </a:prstGeom>
+          <a:noFill/>
+        </p:spPr>
+        <p:txBody>
+          <a:bodyPr wrap="none" lIns="0" rIns="0" tIns="0" bIns="0" anchor="ctr">
+            <a:spAutoFit/>
+          </a:bodyPr>
+          <a:lstStyle/>
+          <a:p>
+            <a:pPr algn="l"/>
+            <a:r>
+              <a:rPr sz="850" b="1">
+                <a:solidFill>
+                  <a:srgbClr val="2477FF"/>
+                </a:solidFill>
+                <a:latin typeface="Aptos"/>
+              </a:rPr>
+              <a:t>10%</a:t>
+            </a:r>
+          </a:p>
+        </p:txBody>
+      </p:sp>
+      <p:sp>
+        <p:nvSpPr>
+          <p:cNvPr id="31" name="TextBox 30"/>
+          <p:cNvSpPr txBox="1"/>
+          <p:nvPr/>
+        </p:nvSpPr>
+        <p:spPr>
+          <a:xfrm>
+            <a:off x="5230368" y="4407408"/>
+            <a:ext cx="1737360" cy="210312"/>
+          </a:xfrm>
+          <a:prstGeom prst="rect">
+            <a:avLst/>
+          </a:prstGeom>
+          <a:noFill/>
+        </p:spPr>
+        <p:txBody>
+          <a:bodyPr wrap="none" lIns="0" rIns="0" tIns="0" bIns="0" anchor="ctr">
+            <a:spAutoFit/>
+          </a:bodyPr>
+          <a:lstStyle/>
+          <a:p>
+            <a:pPr algn="l"/>
+            <a:r>
+              <a:rPr sz="850" b="1">
+                <a:solidFill>
+                  <a:srgbClr val="F7FAFC"/>
+                </a:solidFill>
+                <a:latin typeface="Aptos"/>
+              </a:rPr>
+              <a:t>Momentum</a:t>
+            </a:r>
+          </a:p>
+        </p:txBody>
+      </p:sp>
+      <p:sp>
+        <p:nvSpPr>
+          <p:cNvPr id="32" name="Oval 31"/>
+          <p:cNvSpPr/>
+          <p:nvPr/>
+        </p:nvSpPr>
+        <p:spPr>
+          <a:xfrm>
+            <a:off x="4443984" y="4800600"/>
+            <a:ext cx="91440" cy="91440"/>
           </a:xfrm>
           <a:prstGeom prst="ellipse">
             <a:avLst/>
           </a:prstGeom>
           <a:solidFill>
-            <a:srgbClr val="00A3FF"/>
+            <a:srgbClr val="9B8CFF"/>
           </a:solidFill>
-          <a:ln w="12700">
-            <a:solidFill>
-              <a:srgbClr val="00A3FF">
-                <a:alpha val="0"/>
-              </a:srgbClr>
-            </a:solidFill>
-            <a:prstDash val="solid"/>
+          <a:ln>
+            <a:noFill/>
           </a:ln>
         </p:spPr>
-      </p:sp>
-      <p:sp>
-        <p:nvSpPr>
-          <p:cNvPr id="47" name="Shape 45"/>
-          <p:cNvSpPr/>
-          <p:nvPr/>
-        </p:nvSpPr>
-        <p:spPr>
-          <a:xfrm>
-            <a:off x="6734556" y="2500884"/>
-            <a:ext cx="155448" cy="155448"/>
-          </a:xfrm>
-          <a:prstGeom prst="ellipse">
-            <a:avLst/>
-          </a:prstGeom>
-          <a:solidFill>
-            <a:srgbClr val="35D0BA"/>
-          </a:solidFill>
-          <a:ln w="12700">
-            <a:solidFill>
-              <a:srgbClr val="35D0BA">
-                <a:alpha val="0"/>
-              </a:srgbClr>
-            </a:solidFill>
-            <a:prstDash val="solid"/>
-          </a:ln>
-        </p:spPr>
-      </p:sp>
-      <p:sp>
-        <p:nvSpPr>
-          <p:cNvPr id="48" name="Shape 46"/>
-          <p:cNvSpPr/>
-          <p:nvPr/>
-        </p:nvSpPr>
-        <p:spPr>
-          <a:xfrm>
-            <a:off x="5682996" y="2391156"/>
-            <a:ext cx="155448" cy="155448"/>
-          </a:xfrm>
-          <a:prstGeom prst="ellipse">
-            <a:avLst/>
-          </a:prstGeom>
-          <a:solidFill>
-            <a:srgbClr val="00A3FF"/>
-          </a:solidFill>
-          <a:ln w="12700">
-            <a:solidFill>
-              <a:srgbClr val="00A3FF">
-                <a:alpha val="0"/>
-              </a:srgbClr>
-            </a:solidFill>
-            <a:prstDash val="solid"/>
-          </a:ln>
-        </p:spPr>
-      </p:sp>
-      <p:sp>
-        <p:nvSpPr>
-          <p:cNvPr id="49" name="Shape 47"/>
-          <p:cNvSpPr/>
-          <p:nvPr/>
-        </p:nvSpPr>
-        <p:spPr>
-          <a:xfrm>
-            <a:off x="8275320" y="1874520"/>
-            <a:ext cx="3246120" cy="3547872"/>
+        <p:style>
+          <a:lnRef idx="1">
+            <a:schemeClr val="accent1"/>
+          </a:lnRef>
+          <a:fillRef idx="3">
+            <a:schemeClr val="accent1"/>
+          </a:fillRef>
+          <a:effectRef idx="2">
+            <a:schemeClr val="accent1"/>
+          </a:effectRef>
+          <a:fontRef idx="minor">
+            <a:schemeClr val="lt1"/>
+          </a:fontRef>
+        </p:style>
+        <p:txBody>
+          <a:bodyPr rtlCol="0" anchor="ctr"/>
+          <a:lstStyle/>
+          <a:p>
+            <a:pPr algn="ctr"/>
+          </a:p>
+        </p:txBody>
+      </p:sp>
+      <p:sp>
+        <p:nvSpPr>
+          <p:cNvPr id="33" name="TextBox 32"/>
+          <p:cNvSpPr txBox="1"/>
+          <p:nvPr/>
+        </p:nvSpPr>
+        <p:spPr>
+          <a:xfrm>
+            <a:off x="4645152" y="4736592"/>
+            <a:ext cx="530352" cy="210312"/>
+          </a:xfrm>
+          <a:prstGeom prst="rect">
+            <a:avLst/>
+          </a:prstGeom>
+          <a:noFill/>
+        </p:spPr>
+        <p:txBody>
+          <a:bodyPr wrap="none" lIns="0" rIns="0" tIns="0" bIns="0" anchor="ctr">
+            <a:spAutoFit/>
+          </a:bodyPr>
+          <a:lstStyle/>
+          <a:p>
+            <a:pPr algn="l"/>
+            <a:r>
+              <a:rPr sz="850" b="1">
+                <a:solidFill>
+                  <a:srgbClr val="9B8CFF"/>
+                </a:solidFill>
+                <a:latin typeface="Aptos"/>
+              </a:rPr>
+              <a:t>10%</a:t>
+            </a:r>
+          </a:p>
+        </p:txBody>
+      </p:sp>
+      <p:sp>
+        <p:nvSpPr>
+          <p:cNvPr id="34" name="TextBox 33"/>
+          <p:cNvSpPr txBox="1"/>
+          <p:nvPr/>
+        </p:nvSpPr>
+        <p:spPr>
+          <a:xfrm>
+            <a:off x="5230368" y="4736592"/>
+            <a:ext cx="1737360" cy="210312"/>
+          </a:xfrm>
+          <a:prstGeom prst="rect">
+            <a:avLst/>
+          </a:prstGeom>
+          <a:noFill/>
+        </p:spPr>
+        <p:txBody>
+          <a:bodyPr wrap="none" lIns="0" rIns="0" tIns="0" bIns="0" anchor="ctr">
+            <a:spAutoFit/>
+          </a:bodyPr>
+          <a:lstStyle/>
+          <a:p>
+            <a:pPr algn="l"/>
+            <a:r>
+              <a:rPr sz="850" b="1">
+                <a:solidFill>
+                  <a:srgbClr val="F7FAFC"/>
+                </a:solidFill>
+                <a:latin typeface="Aptos"/>
+              </a:rPr>
+              <a:t>Brand</a:t>
+            </a:r>
+          </a:p>
+        </p:txBody>
+      </p:sp>
+      <p:sp>
+        <p:nvSpPr>
+          <p:cNvPr id="35" name="TextBox 34"/>
+          <p:cNvSpPr txBox="1"/>
+          <p:nvPr/>
+        </p:nvSpPr>
+        <p:spPr>
+          <a:xfrm>
+            <a:off x="4425696" y="5184648"/>
+            <a:ext cx="2834640" cy="219456"/>
+          </a:xfrm>
+          <a:prstGeom prst="rect">
+            <a:avLst/>
+          </a:prstGeom>
+          <a:noFill/>
+        </p:spPr>
+        <p:txBody>
+          <a:bodyPr wrap="none" lIns="0" rIns="0" tIns="0" bIns="0" anchor="ctr">
+            <a:spAutoFit/>
+          </a:bodyPr>
+          <a:lstStyle/>
+          <a:p>
+            <a:pPr algn="l"/>
+            <a:r>
+              <a:rPr sz="830" b="0">
+                <a:solidFill>
+                  <a:srgbClr val="A9BAC9"/>
+                </a:solidFill>
+                <a:latin typeface="Aptos"/>
+              </a:rPr>
+              <a:t>Weights are transparent—and stress-tested next.</a:t>
+            </a:r>
+          </a:p>
+        </p:txBody>
+      </p:sp>
+      <p:sp>
+        <p:nvSpPr>
+          <p:cNvPr id="36" name="Rounded Rectangle 35"/>
+          <p:cNvSpPr/>
+          <p:nvPr/>
+        </p:nvSpPr>
+        <p:spPr>
+          <a:xfrm>
+            <a:off x="8028431" y="1874519"/>
+            <a:ext cx="3447288" cy="3611880"/>
           </a:xfrm>
           <a:prstGeom prst="roundRect">
-            <a:avLst>
-              <a:gd name="adj" fmla="val 2254"/>
-            </a:avLst>
+            <a:avLst/>
           </a:prstGeom>
           <a:solidFill>
             <a:srgbClr val="081D31"/>
@@ -10772,284 +10842,508 @@
             <a:solidFill>
               <a:srgbClr val="193B57"/>
             </a:solidFill>
-            <a:prstDash val="solid"/>
           </a:ln>
         </p:spPr>
-      </p:sp>
-      <p:sp>
-        <p:nvSpPr>
-          <p:cNvPr id="50" name="Text 48"/>
-          <p:cNvSpPr/>
-          <p:nvPr/>
-        </p:nvSpPr>
-        <p:spPr>
-          <a:xfrm>
-            <a:off x="8577072" y="2240280"/>
-            <a:ext cx="2606040" cy="658368"/>
-          </a:xfrm>
-          <a:prstGeom prst="rect">
-            <a:avLst/>
-          </a:prstGeom>
-          <a:noFill/>
-          <a:ln/>
-        </p:spPr>
-        <p:txBody>
-          <a:bodyPr wrap="square" lIns="254" tIns="254" rIns="254" bIns="254" rtlCol="0" anchor="ctr">
-            <a:normAutofit/>
-          </a:bodyPr>
-          <a:lstStyle/>
-          <a:p>
-            <a:pPr algn="l" indent="0" marL="0">
-              <a:buNone/>
-            </a:pPr>
-            <a:r>
-              <a:rPr lang="en-US" sz="1300" b="1" dirty="0">
+        <p:style>
+          <a:lnRef idx="1">
+            <a:schemeClr val="accent1"/>
+          </a:lnRef>
+          <a:fillRef idx="3">
+            <a:schemeClr val="accent1"/>
+          </a:fillRef>
+          <a:effectRef idx="2">
+            <a:schemeClr val="accent1"/>
+          </a:effectRef>
+          <a:fontRef idx="minor">
+            <a:schemeClr val="lt1"/>
+          </a:fontRef>
+        </p:style>
+        <p:txBody>
+          <a:bodyPr rtlCol="0" anchor="ctr"/>
+          <a:lstStyle/>
+          <a:p>
+            <a:pPr algn="ctr"/>
+          </a:p>
+        </p:txBody>
+      </p:sp>
+      <p:sp>
+        <p:nvSpPr>
+          <p:cNvPr id="37" name="TextBox 36"/>
+          <p:cNvSpPr txBox="1"/>
+          <p:nvPr/>
+        </p:nvSpPr>
+        <p:spPr>
+          <a:xfrm>
+            <a:off x="8302752" y="2139696"/>
+            <a:ext cx="2103120" cy="237744"/>
+          </a:xfrm>
+          <a:prstGeom prst="rect">
+            <a:avLst/>
+          </a:prstGeom>
+          <a:noFill/>
+        </p:spPr>
+        <p:txBody>
+          <a:bodyPr wrap="none" lIns="0" rIns="0" tIns="0" bIns="0" anchor="ctr">
+            <a:spAutoFit/>
+          </a:bodyPr>
+          <a:lstStyle/>
+          <a:p>
+            <a:pPr algn="l"/>
+            <a:r>
+              <a:rPr sz="800" b="1">
                 <a:solidFill>
                   <a:srgbClr val="F4C95D"/>
                 </a:solidFill>
-              </a:rPr>
-              <a:t>HIGH PERFORMANCE</a:t>
-            </a:r>
-            <a:endParaRPr lang="en-US" sz="1300" dirty="0"/>
-          </a:p>
-          <a:p>
-            <a:pPr algn="l" indent="0" marL="0">
-              <a:buNone/>
-            </a:pPr>
-            <a:r>
-              <a:rPr lang="en-US" sz="1300" b="1" dirty="0">
+                <a:latin typeface="Aptos"/>
+              </a:rPr>
+              <a:t>03  FIND THE GAP</a:t>
+            </a:r>
+          </a:p>
+        </p:txBody>
+      </p:sp>
+      <p:sp>
+        <p:nvSpPr>
+          <p:cNvPr id="38" name="TextBox 37"/>
+          <p:cNvSpPr txBox="1"/>
+          <p:nvPr/>
+        </p:nvSpPr>
+        <p:spPr>
+          <a:xfrm>
+            <a:off x="8302752" y="2670048"/>
+            <a:ext cx="2697480" cy="347472"/>
+          </a:xfrm>
+          <a:prstGeom prst="rect">
+            <a:avLst/>
+          </a:prstGeom>
+          <a:noFill/>
+        </p:spPr>
+        <p:txBody>
+          <a:bodyPr wrap="none" lIns="0" rIns="0" tIns="0" bIns="0" anchor="ctr">
+            <a:spAutoFit/>
+          </a:bodyPr>
+          <a:lstStyle/>
+          <a:p>
+            <a:pPr algn="l"/>
+            <a:r>
+              <a:rPr sz="1500" b="1">
+                <a:solidFill>
+                  <a:srgbClr val="FFFFFF"/>
+                </a:solidFill>
+                <a:latin typeface="Aptos"/>
+              </a:rPr>
+              <a:t>Expected = f(Performance)</a:t>
+            </a:r>
+          </a:p>
+        </p:txBody>
+      </p:sp>
+      <p:sp>
+        <p:nvSpPr>
+          <p:cNvPr id="39" name="TextBox 38"/>
+          <p:cNvSpPr txBox="1"/>
+          <p:nvPr/>
+        </p:nvSpPr>
+        <p:spPr>
+          <a:xfrm>
+            <a:off x="8302752" y="3163824"/>
+            <a:ext cx="2761488" cy="402336"/>
+          </a:xfrm>
+          <a:prstGeom prst="rect">
+            <a:avLst/>
+          </a:prstGeom>
+          <a:noFill/>
+        </p:spPr>
+        <p:txBody>
+          <a:bodyPr wrap="none" lIns="0" rIns="0" tIns="0" bIns="0" anchor="ctr">
+            <a:spAutoFit/>
+          </a:bodyPr>
+          <a:lstStyle/>
+          <a:p>
+            <a:pPr algn="l"/>
+            <a:r>
+              <a:rPr sz="1700" b="1">
+                <a:solidFill>
+                  <a:srgbClr val="FFFFFF"/>
+                </a:solidFill>
+                <a:latin typeface="Aptos"/>
+              </a:rPr>
+              <a:t>Gap = Marketability − Expected</a:t>
+            </a:r>
+          </a:p>
+        </p:txBody>
+      </p:sp>
+      <p:sp>
+        <p:nvSpPr>
+          <p:cNvPr id="40" name="Rectangle 39"/>
+          <p:cNvSpPr/>
+          <p:nvPr/>
+        </p:nvSpPr>
+        <p:spPr>
+          <a:xfrm>
+            <a:off x="8302752" y="3767328"/>
+            <a:ext cx="2670048" cy="8890"/>
+          </a:xfrm>
+          <a:prstGeom prst="rect">
+            <a:avLst/>
+          </a:prstGeom>
+          <a:solidFill>
+            <a:srgbClr val="193B57"/>
+          </a:solidFill>
+          <a:ln>
+            <a:noFill/>
+          </a:ln>
+        </p:spPr>
+        <p:style>
+          <a:lnRef idx="1">
+            <a:schemeClr val="accent1"/>
+          </a:lnRef>
+          <a:fillRef idx="3">
+            <a:schemeClr val="accent1"/>
+          </a:fillRef>
+          <a:effectRef idx="2">
+            <a:schemeClr val="accent1"/>
+          </a:effectRef>
+          <a:fontRef idx="minor">
+            <a:schemeClr val="lt1"/>
+          </a:fontRef>
+        </p:style>
+        <p:txBody>
+          <a:bodyPr rtlCol="0" anchor="ctr"/>
+          <a:lstStyle/>
+          <a:p>
+            <a:pPr algn="ctr"/>
+          </a:p>
+        </p:txBody>
+      </p:sp>
+      <p:sp>
+        <p:nvSpPr>
+          <p:cNvPr id="41" name="TextBox 40"/>
+          <p:cNvSpPr txBox="1"/>
+          <p:nvPr/>
+        </p:nvSpPr>
+        <p:spPr>
+          <a:xfrm>
+            <a:off x="8302752" y="4005072"/>
+            <a:ext cx="713232" cy="274320"/>
+          </a:xfrm>
+          <a:prstGeom prst="rect">
+            <a:avLst/>
+          </a:prstGeom>
+          <a:noFill/>
+        </p:spPr>
+        <p:txBody>
+          <a:bodyPr wrap="none" lIns="0" rIns="0" tIns="0" bIns="0" anchor="ctr">
+            <a:spAutoFit/>
+          </a:bodyPr>
+          <a:lstStyle/>
+          <a:p>
+            <a:pPr algn="l"/>
+            <a:r>
+              <a:rPr sz="1400" b="1">
                 <a:solidFill>
                   <a:srgbClr val="F4C95D"/>
                 </a:solidFill>
-              </a:rPr>
-              <a:t>LOWER MARKETABILITY</a:t>
-            </a:r>
-            <a:endParaRPr lang="en-US" sz="1300" dirty="0"/>
-          </a:p>
-        </p:txBody>
-      </p:sp>
-      <p:sp>
-        <p:nvSpPr>
-          <p:cNvPr id="51" name="Text 49"/>
-          <p:cNvSpPr/>
-          <p:nvPr/>
-        </p:nvSpPr>
-        <p:spPr>
-          <a:xfrm>
-            <a:off x="8577072" y="3108960"/>
-            <a:ext cx="2194560" cy="256032"/>
-          </a:xfrm>
-          <a:prstGeom prst="rect">
-            <a:avLst/>
-          </a:prstGeom>
-          <a:noFill/>
-          <a:ln/>
-        </p:spPr>
-        <p:txBody>
-          <a:bodyPr wrap="square" lIns="254" tIns="254" rIns="254" bIns="254" rtlCol="0" anchor="ctr">
-            <a:normAutofit/>
-          </a:bodyPr>
-          <a:lstStyle/>
-          <a:p>
-            <a:pPr algn="l" indent="0" marL="0">
-              <a:buNone/>
-            </a:pPr>
-            <a:r>
-              <a:rPr lang="en-US" sz="900" b="1" dirty="0">
-                <a:solidFill>
-                  <a:srgbClr val="FFFFFF"/>
-                </a:solidFill>
-              </a:rPr>
-              <a:t>Primary target</a:t>
-            </a:r>
-            <a:endParaRPr lang="en-US" sz="900" dirty="0"/>
-          </a:p>
-        </p:txBody>
-      </p:sp>
-      <p:sp>
-        <p:nvSpPr>
-          <p:cNvPr id="52" name="Text 50"/>
-          <p:cNvSpPr/>
-          <p:nvPr/>
-        </p:nvSpPr>
-        <p:spPr>
-          <a:xfrm>
-            <a:off x="8577072" y="3511296"/>
-            <a:ext cx="2487168" cy="1115568"/>
-          </a:xfrm>
-          <a:prstGeom prst="rect">
-            <a:avLst/>
-          </a:prstGeom>
-          <a:noFill/>
-          <a:ln/>
-        </p:spPr>
-        <p:txBody>
-          <a:bodyPr wrap="square" lIns="254" tIns="254" rIns="254" bIns="254" rtlCol="0" anchor="ctr">
-            <a:normAutofit/>
-          </a:bodyPr>
-          <a:lstStyle/>
-          <a:p>
-            <a:pPr algn="l" indent="0" marL="0">
-              <a:buNone/>
-            </a:pPr>
-            <a:r>
-              <a:rPr lang="en-US" sz="1000" dirty="0">
-                <a:solidFill>
-                  <a:srgbClr val="A9BAC9"/>
-                </a:solidFill>
-              </a:rPr>
-              <a:t>• More player-led content</a:t>
-            </a:r>
-            <a:endParaRPr lang="en-US" sz="1000" dirty="0"/>
-          </a:p>
-          <a:p>
-            <a:pPr algn="l" indent="0" marL="0">
-              <a:buNone/>
-            </a:pPr>
-            <a:r>
-              <a:rPr lang="en-US" sz="1000" dirty="0">
-                <a:solidFill>
-                  <a:srgbClr val="A9BAC9"/>
-                </a:solidFill>
-              </a:rPr>
-              <a:t>• Sponsor packaging</a:t>
-            </a:r>
-            <a:endParaRPr lang="en-US" sz="1000" dirty="0"/>
-          </a:p>
-          <a:p>
-            <a:pPr algn="l" indent="0" marL="0">
-              <a:buNone/>
-            </a:pPr>
-            <a:r>
-              <a:rPr lang="en-US" sz="1000" dirty="0">
-                <a:solidFill>
-                  <a:srgbClr val="A9BAC9"/>
-                </a:solidFill>
-              </a:rPr>
-              <a:t>• International / local storytelling</a:t>
-            </a:r>
-            <a:endParaRPr lang="en-US" sz="1000" dirty="0"/>
-          </a:p>
-          <a:p>
-            <a:pPr algn="l" indent="0" marL="0">
-              <a:buNone/>
-            </a:pPr>
-            <a:r>
-              <a:rPr lang="en-US" sz="1000" dirty="0">
-                <a:solidFill>
-                  <a:srgbClr val="A9BAC9"/>
-                </a:solidFill>
-              </a:rPr>
-              <a:t>• Track momentum quarterly</a:t>
-            </a:r>
-            <a:endParaRPr lang="en-US" sz="1000" dirty="0"/>
-          </a:p>
-        </p:txBody>
-      </p:sp>
-      <p:sp>
-        <p:nvSpPr>
-          <p:cNvPr id="53" name="Shape 51"/>
-          <p:cNvSpPr/>
-          <p:nvPr/>
-        </p:nvSpPr>
-        <p:spPr>
-          <a:xfrm>
-            <a:off x="8577072" y="4828032"/>
-            <a:ext cx="1572768" cy="310896"/>
+                <a:latin typeface="Aptos"/>
+              </a:rPr>
+              <a:t>GAP &lt; 0</a:t>
+            </a:r>
+          </a:p>
+        </p:txBody>
+      </p:sp>
+      <p:sp>
+        <p:nvSpPr>
+          <p:cNvPr id="42" name="TextBox 41"/>
+          <p:cNvSpPr txBox="1"/>
+          <p:nvPr/>
+        </p:nvSpPr>
+        <p:spPr>
+          <a:xfrm>
+            <a:off x="9125712" y="3977639"/>
+            <a:ext cx="1938528" cy="402336"/>
+          </a:xfrm>
+          <a:prstGeom prst="rect">
+            <a:avLst/>
+          </a:prstGeom>
+          <a:noFill/>
+        </p:spPr>
+        <p:txBody>
+          <a:bodyPr wrap="none" lIns="0" rIns="0" tIns="0" bIns="0" anchor="ctr">
+            <a:spAutoFit/>
+          </a:bodyPr>
+          <a:lstStyle/>
+          <a:p>
+            <a:pPr algn="l"/>
+            <a:r>
+              <a:rPr sz="930" b="1">
+                <a:solidFill>
+                  <a:srgbClr val="F7FAFC"/>
+                </a:solidFill>
+                <a:latin typeface="Aptos"/>
+              </a:rPr>
+              <a:t>Underexposed relative to performance.</a:t>
+            </a:r>
+          </a:p>
+        </p:txBody>
+      </p:sp>
+      <p:sp>
+        <p:nvSpPr>
+          <p:cNvPr id="43" name="TextBox 42"/>
+          <p:cNvSpPr txBox="1"/>
+          <p:nvPr/>
+        </p:nvSpPr>
+        <p:spPr>
+          <a:xfrm>
+            <a:off x="8302752" y="4553712"/>
+            <a:ext cx="713232" cy="274320"/>
+          </a:xfrm>
+          <a:prstGeom prst="rect">
+            <a:avLst/>
+          </a:prstGeom>
+          <a:noFill/>
+        </p:spPr>
+        <p:txBody>
+          <a:bodyPr wrap="none" lIns="0" rIns="0" tIns="0" bIns="0" anchor="ctr">
+            <a:spAutoFit/>
+          </a:bodyPr>
+          <a:lstStyle/>
+          <a:p>
+            <a:pPr algn="l"/>
+            <a:r>
+              <a:rPr sz="1400" b="1">
+                <a:solidFill>
+                  <a:srgbClr val="35D0BA"/>
+                </a:solidFill>
+                <a:latin typeface="Aptos"/>
+              </a:rPr>
+              <a:t>GAP &gt; 0</a:t>
+            </a:r>
+          </a:p>
+        </p:txBody>
+      </p:sp>
+      <p:sp>
+        <p:nvSpPr>
+          <p:cNvPr id="44" name="TextBox 43"/>
+          <p:cNvSpPr txBox="1"/>
+          <p:nvPr/>
+        </p:nvSpPr>
+        <p:spPr>
+          <a:xfrm>
+            <a:off x="9125712" y="4526280"/>
+            <a:ext cx="1938528" cy="402336"/>
+          </a:xfrm>
+          <a:prstGeom prst="rect">
+            <a:avLst/>
+          </a:prstGeom>
+          <a:noFill/>
+        </p:spPr>
+        <p:txBody>
+          <a:bodyPr wrap="none" lIns="0" rIns="0" tIns="0" bIns="0" anchor="ctr">
+            <a:spAutoFit/>
+          </a:bodyPr>
+          <a:lstStyle/>
+          <a:p>
+            <a:pPr algn="l"/>
+            <a:r>
+              <a:rPr sz="930" b="1">
+                <a:solidFill>
+                  <a:srgbClr val="F7FAFC"/>
+                </a:solidFill>
+                <a:latin typeface="Aptos"/>
+              </a:rPr>
+              <a:t>Brand demand is ahead of the baseline.</a:t>
+            </a:r>
+          </a:p>
+        </p:txBody>
+      </p:sp>
+      <p:sp>
+        <p:nvSpPr>
+          <p:cNvPr id="45" name="Rounded Rectangle 44"/>
+          <p:cNvSpPr/>
+          <p:nvPr/>
+        </p:nvSpPr>
+        <p:spPr>
+          <a:xfrm>
+            <a:off x="8302752" y="5038344"/>
+            <a:ext cx="2487168" cy="310896"/>
           </a:xfrm>
           <a:prstGeom prst="roundRect">
-            <a:avLst>
-              <a:gd name="adj" fmla="val 29412"/>
-            </a:avLst>
+            <a:avLst/>
           </a:prstGeom>
           <a:solidFill>
-            <a:srgbClr val="F4C95D">
-              <a:alpha val="18000"/>
-            </a:srgbClr>
+            <a:srgbClr val="0D344F"/>
           </a:solidFill>
-          <a:ln w="7620">
+          <a:ln w="8890">
             <a:solidFill>
-              <a:srgbClr val="F4C95D">
-                <a:alpha val="65000"/>
-              </a:srgbClr>
+              <a:srgbClr val="F4C95D"/>
             </a:solidFill>
-            <a:prstDash val="solid"/>
           </a:ln>
         </p:spPr>
-      </p:sp>
-      <p:sp>
-        <p:nvSpPr>
-          <p:cNvPr id="54" name="Text 52"/>
-          <p:cNvSpPr/>
-          <p:nvPr/>
-        </p:nvSpPr>
-        <p:spPr>
-          <a:xfrm>
-            <a:off x="8631936" y="4864608"/>
-            <a:ext cx="1463040" cy="219456"/>
-          </a:xfrm>
-          <a:prstGeom prst="rect">
-            <a:avLst/>
-          </a:prstGeom>
-          <a:noFill/>
-          <a:ln/>
-        </p:spPr>
-        <p:txBody>
-          <a:bodyPr wrap="square" lIns="254" tIns="254" rIns="254" bIns="254" rtlCol="0" anchor="ctr">
-            <a:normAutofit/>
-          </a:bodyPr>
-          <a:lstStyle/>
-          <a:p>
-            <a:pPr algn="ctr" indent="0" marL="0">
-              <a:buNone/>
-            </a:pPr>
-            <a:r>
-              <a:rPr lang="en-US" sz="730" b="1" dirty="0">
+        <p:style>
+          <a:lnRef idx="1">
+            <a:schemeClr val="accent1"/>
+          </a:lnRef>
+          <a:fillRef idx="3">
+            <a:schemeClr val="accent1"/>
+          </a:fillRef>
+          <a:effectRef idx="2">
+            <a:schemeClr val="accent1"/>
+          </a:effectRef>
+          <a:fontRef idx="minor">
+            <a:schemeClr val="lt1"/>
+          </a:fontRef>
+        </p:style>
+        <p:txBody>
+          <a:bodyPr rtlCol="0" anchor="ctr"/>
+          <a:lstStyle/>
+          <a:p>
+            <a:pPr algn="ctr"/>
+          </a:p>
+        </p:txBody>
+      </p:sp>
+      <p:sp>
+        <p:nvSpPr>
+          <p:cNvPr id="46" name="TextBox 45"/>
+          <p:cNvSpPr txBox="1"/>
+          <p:nvPr/>
+        </p:nvSpPr>
+        <p:spPr>
+          <a:xfrm>
+            <a:off x="8357616" y="5065776"/>
+            <a:ext cx="2377440" cy="228600"/>
+          </a:xfrm>
+          <a:prstGeom prst="rect">
+            <a:avLst/>
+          </a:prstGeom>
+          <a:noFill/>
+        </p:spPr>
+        <p:txBody>
+          <a:bodyPr wrap="none" lIns="0" rIns="0" tIns="0" bIns="0" anchor="ctr">
+            <a:spAutoFit/>
+          </a:bodyPr>
+          <a:lstStyle/>
+          <a:p>
+            <a:pPr algn="ctr"/>
+            <a:r>
+              <a:rPr sz="720" b="1">
                 <a:solidFill>
                   <a:srgbClr val="F7FAFC"/>
                 </a:solidFill>
-              </a:rPr>
-              <a:t>SCOUT HERE FIRST</a:t>
-            </a:r>
-            <a:endParaRPr lang="en-US" sz="730" dirty="0"/>
-          </a:p>
-        </p:txBody>
-      </p:sp>
-      <p:sp>
-        <p:nvSpPr>
-          <p:cNvPr id="55" name="Text 53"/>
-          <p:cNvSpPr/>
-          <p:nvPr/>
-        </p:nvSpPr>
-        <p:spPr>
-          <a:xfrm>
-            <a:off x="713232" y="6108192"/>
-            <a:ext cx="7406640" cy="201168"/>
-          </a:xfrm>
-          <a:prstGeom prst="rect">
-            <a:avLst/>
-          </a:prstGeom>
-          <a:noFill/>
-          <a:ln/>
-        </p:spPr>
-        <p:txBody>
-          <a:bodyPr wrap="square" lIns="254" tIns="254" rIns="254" bIns="254" rtlCol="0" anchor="ctr">
-            <a:normAutofit/>
-          </a:bodyPr>
-          <a:lstStyle/>
-          <a:p>
-            <a:pPr algn="l" indent="0" marL="0">
-              <a:buNone/>
-            </a:pPr>
-            <a:r>
-              <a:rPr lang="en-US" sz="560" dirty="0">
-                <a:solidFill>
-                  <a:srgbClr val="71879A"/>
-                </a:solidFill>
-              </a:rPr>
-              <a:t>Illustrative framework visualization — not a final player ranking.</a:t>
-            </a:r>
-            <a:endParaRPr lang="en-US" sz="560" dirty="0"/>
+                <a:latin typeface="Aptos"/>
+              </a:rPr>
+              <a:t>SCOUT NEGATIVE GAP + MOMENTUM</a:t>
+            </a:r>
+          </a:p>
+        </p:txBody>
+      </p:sp>
+      <p:sp>
+        <p:nvSpPr>
+          <p:cNvPr id="47" name="Rectangle 46"/>
+          <p:cNvSpPr/>
+          <p:nvPr/>
+        </p:nvSpPr>
+        <p:spPr>
+          <a:xfrm>
+            <a:off x="566928" y="6455664"/>
+            <a:ext cx="11064240" cy="7620"/>
+          </a:xfrm>
+          <a:prstGeom prst="rect">
+            <a:avLst/>
+          </a:prstGeom>
+          <a:solidFill>
+            <a:srgbClr val="193B57"/>
+          </a:solidFill>
+          <a:ln>
+            <a:noFill/>
+          </a:ln>
+        </p:spPr>
+        <p:style>
+          <a:lnRef idx="1">
+            <a:schemeClr val="accent1"/>
+          </a:lnRef>
+          <a:fillRef idx="3">
+            <a:schemeClr val="accent1"/>
+          </a:fillRef>
+          <a:effectRef idx="2">
+            <a:schemeClr val="accent1"/>
+          </a:effectRef>
+          <a:fontRef idx="minor">
+            <a:schemeClr val="lt1"/>
+          </a:fontRef>
+        </p:style>
+        <p:txBody>
+          <a:bodyPr rtlCol="0" anchor="ctr"/>
+          <a:lstStyle/>
+          <a:p>
+            <a:pPr algn="ctr"/>
+          </a:p>
+        </p:txBody>
+      </p:sp>
+      <p:sp>
+        <p:nvSpPr>
+          <p:cNvPr id="48" name="TextBox 47"/>
+          <p:cNvSpPr txBox="1"/>
+          <p:nvPr/>
+        </p:nvSpPr>
+        <p:spPr>
+          <a:xfrm>
+            <a:off x="594360" y="6492240"/>
+            <a:ext cx="1828800" cy="155448"/>
+          </a:xfrm>
+          <a:prstGeom prst="rect">
+            <a:avLst/>
+          </a:prstGeom>
+          <a:noFill/>
+        </p:spPr>
+        <p:txBody>
+          <a:bodyPr wrap="none" lIns="0" rIns="0" tIns="0" bIns="0" anchor="ctr">
+            <a:spAutoFit/>
+          </a:bodyPr>
+          <a:lstStyle/>
+          <a:p>
+            <a:pPr algn="l"/>
+            <a:r>
+              <a:rPr sz="580" b="1">
+                <a:solidFill>
+                  <a:srgbClr val="6F879A"/>
+                </a:solidFill>
+                <a:latin typeface="Aptos"/>
+              </a:rPr>
+              <a:t>MAV METRICS  •  05</a:t>
+            </a:r>
+          </a:p>
+        </p:txBody>
+      </p:sp>
+      <p:sp>
+        <p:nvSpPr>
+          <p:cNvPr id="49" name="TextBox 48"/>
+          <p:cNvSpPr txBox="1"/>
+          <p:nvPr/>
+        </p:nvSpPr>
+        <p:spPr>
+          <a:xfrm>
+            <a:off x="2377440" y="6473952"/>
+            <a:ext cx="9189720" cy="182880"/>
+          </a:xfrm>
+          <a:prstGeom prst="rect">
+            <a:avLst/>
+          </a:prstGeom>
+          <a:noFill/>
+        </p:spPr>
+        <p:txBody>
+          <a:bodyPr wrap="none" lIns="0" rIns="0" tIns="0" bIns="0" anchor="ctr">
+            <a:spAutoFit/>
+          </a:bodyPr>
+          <a:lstStyle/>
+          <a:p>
+            <a:pPr algn="r"/>
+            <a:r>
+              <a:rPr sz="509" b="0">
+                <a:solidFill>
+                  <a:srgbClr val="63798B"/>
+                </a:solidFill>
+                <a:latin typeface="Aptos"/>
+              </a:rPr>
+              <a:t>Framework formula — weights disclosed and sensitivity-tested</a:t>
+            </a:r>
           </a:p>
         </p:txBody>
       </p:sp>
@@ -11111,6 +11405,10 @@
             <a:prstDash val="solid"/>
           </a:ln>
         </p:spPr>
+        <p:txBody>
+          <a:bodyPr/>
+          <a:p/>
+        </p:txBody>
       </p:sp>
       <p:sp>
         <p:nvSpPr>
@@ -11246,6 +11544,10 @@
             <a:prstDash val="solid"/>
           </a:ln>
         </p:spPr>
+        <p:txBody>
+          <a:bodyPr/>
+          <a:p/>
+        </p:txBody>
       </p:sp>
       <p:sp>
         <p:nvSpPr>
@@ -11276,8 +11578,9 @@
                 <a:solidFill>
                   <a:srgbClr val="6F879A"/>
                 </a:solidFill>
-              </a:rPr>
-              <a:t>MAV METRICS  •  07</a:t>
+                <a:latin typeface="Aptos"/>
+              </a:rPr>
+              <a:t>MAV METRICS  •  06</a:t>
             </a:r>
             <a:endParaRPr lang="en-US" sz="580" dirty="0"/>
           </a:p>
@@ -11423,6 +11726,10 @@
             <a:prstDash val="solid"/>
           </a:ln>
         </p:spPr>
+        <p:txBody>
+          <a:bodyPr/>
+          <a:p/>
+        </p:txBody>
       </p:sp>
       <p:sp>
         <p:nvSpPr>
@@ -11564,6 +11871,10 @@
             <a:prstDash val="solid"/>
           </a:ln>
         </p:spPr>
+        <p:txBody>
+          <a:bodyPr/>
+          <a:p/>
+        </p:txBody>
       </p:sp>
       <p:sp>
         <p:nvSpPr>
@@ -11705,6 +12016,10 @@
             <a:prstDash val="solid"/>
           </a:ln>
         </p:spPr>
+        <p:txBody>
+          <a:bodyPr/>
+          <a:p/>
+        </p:txBody>
       </p:sp>
       <p:sp>
         <p:nvSpPr>
@@ -11846,6 +12161,10 @@
             <a:prstDash val="solid"/>
           </a:ln>
         </p:spPr>
+        <p:txBody>
+          <a:bodyPr/>
+          <a:p/>
+        </p:txBody>
       </p:sp>
       <p:sp>
         <p:nvSpPr>
@@ -11987,6 +12306,10 @@
             <a:prstDash val="solid"/>
           </a:ln>
         </p:spPr>
+        <p:txBody>
+          <a:bodyPr/>
+          <a:p/>
+        </p:txBody>
       </p:sp>
       <p:sp>
         <p:nvSpPr>
@@ -12128,6 +12451,10 @@
             <a:prstDash val="solid"/>
           </a:ln>
         </p:spPr>
+        <p:txBody>
+          <a:bodyPr/>
+          <a:p/>
+        </p:txBody>
       </p:sp>
       <p:sp>
         <p:nvSpPr>
@@ -12269,6 +12596,10 @@
             <a:prstDash val="solid"/>
           </a:ln>
         </p:spPr>
+        <p:txBody>
+          <a:bodyPr/>
+          <a:p/>
+        </p:txBody>
       </p:sp>
       <p:sp>
         <p:nvSpPr>
@@ -12410,6 +12741,10 @@
             <a:prstDash val="solid"/>
           </a:ln>
         </p:spPr>
+        <p:txBody>
+          <a:bodyPr/>
+          <a:p/>
+        </p:txBody>
       </p:sp>
       <p:sp>
         <p:nvSpPr>
@@ -12551,6 +12886,10 @@
             <a:prstDash val="solid"/>
           </a:ln>
         </p:spPr>
+        <p:txBody>
+          <a:bodyPr/>
+          <a:p/>
+        </p:txBody>
       </p:sp>
       <p:sp>
         <p:nvSpPr>
@@ -12692,6 +13031,10 @@
             <a:prstDash val="solid"/>
           </a:ln>
         </p:spPr>
+        <p:txBody>
+          <a:bodyPr/>
+          <a:p/>
+        </p:txBody>
       </p:sp>
       <p:sp>
         <p:nvSpPr>
@@ -12757,6 +13100,10 @@
             <a:prstDash val="solid"/>
           </a:ln>
         </p:spPr>
+        <p:txBody>
+          <a:bodyPr/>
+          <a:p/>
+        </p:txBody>
       </p:sp>
       <p:sp>
         <p:nvSpPr>
@@ -13054,6 +13401,10 @@
             <a:prstDash val="solid"/>
           </a:ln>
         </p:spPr>
+        <p:txBody>
+          <a:bodyPr/>
+          <a:p/>
+        </p:txBody>
       </p:sp>
       <p:sp>
         <p:nvSpPr>
@@ -13151,6 +13502,10 @@
             <a:prstDash val="solid"/>
           </a:ln>
         </p:spPr>
+        <p:txBody>
+          <a:bodyPr/>
+          <a:p/>
+        </p:txBody>
       </p:sp>
       <p:sp>
         <p:nvSpPr>
@@ -13286,6 +13641,10 @@
             <a:prstDash val="solid"/>
           </a:ln>
         </p:spPr>
+        <p:txBody>
+          <a:bodyPr/>
+          <a:p/>
+        </p:txBody>
       </p:sp>
       <p:sp>
         <p:nvSpPr>
@@ -13316,8 +13675,9 @@
                 <a:solidFill>
                   <a:srgbClr val="6F879A"/>
                 </a:solidFill>
-              </a:rPr>
-              <a:t>MAV METRICS  •  08</a:t>
+                <a:latin typeface="Aptos"/>
+              </a:rPr>
+              <a:t>MAV METRICS  •  07</a:t>
             </a:r>
             <a:endParaRPr lang="en-US" sz="580" dirty="0"/>
           </a:p>
@@ -13387,6 +13747,10 @@
             <a:prstDash val="solid"/>
           </a:ln>
         </p:spPr>
+        <p:txBody>
+          <a:bodyPr/>
+          <a:p/>
+        </p:txBody>
       </p:sp>
       <p:sp>
         <p:nvSpPr>
@@ -14136,6 +14500,10 @@
             <a:prstDash val="solid"/>
           </a:ln>
         </p:spPr>
+        <p:txBody>
+          <a:bodyPr/>
+          <a:p/>
+        </p:txBody>
       </p:sp>
       <p:sp>
         <p:nvSpPr>
@@ -14585,6 +14953,10 @@
             <a:prstDash val="solid"/>
           </a:ln>
         </p:spPr>
+        <p:txBody>
+          <a:bodyPr/>
+          <a:p/>
+        </p:txBody>
       </p:sp>
       <p:sp>
         <p:nvSpPr>
@@ -14658,7 +15030,7 @@
       </p:grpSpPr>
       <p:sp>
         <p:nvSpPr>
-          <p:cNvPr id="2" name="Shape 0"/>
+          <p:cNvPr id="2" name="Rectangle 1"/>
           <p:cNvSpPr/>
           <p:nvPr/>
         </p:nvSpPr>
@@ -14673,202 +15045,150 @@
           <a:solidFill>
             <a:srgbClr val="00A3FF"/>
           </a:solidFill>
-          <a:ln w="12700">
-            <a:solidFill>
-              <a:srgbClr val="00A3FF">
-                <a:alpha val="0"/>
-              </a:srgbClr>
-            </a:solidFill>
-            <a:prstDash val="solid"/>
+          <a:ln>
+            <a:noFill/>
           </a:ln>
         </p:spPr>
-      </p:sp>
-      <p:sp>
-        <p:nvSpPr>
-          <p:cNvPr id="3" name="Text 1"/>
-          <p:cNvSpPr/>
+        <p:style>
+          <a:lnRef idx="1">
+            <a:schemeClr val="accent1"/>
+          </a:lnRef>
+          <a:fillRef idx="3">
+            <a:schemeClr val="accent1"/>
+          </a:fillRef>
+          <a:effectRef idx="2">
+            <a:schemeClr val="accent1"/>
+          </a:effectRef>
+          <a:fontRef idx="minor">
+            <a:schemeClr val="lt1"/>
+          </a:fontRef>
+        </p:style>
+        <p:txBody>
+          <a:bodyPr rtlCol="0" anchor="ctr"/>
+          <a:lstStyle/>
+          <a:p>
+            <a:pPr algn="ctr"/>
+          </a:p>
+        </p:txBody>
+      </p:sp>
+      <p:sp>
+        <p:nvSpPr>
+          <p:cNvPr id="3" name="TextBox 2"/>
+          <p:cNvSpPr txBox="1"/>
           <p:nvPr/>
         </p:nvSpPr>
         <p:spPr>
           <a:xfrm>
             <a:off x="621792" y="320040"/>
-            <a:ext cx="3474720" cy="201168"/>
-          </a:xfrm>
-          <a:prstGeom prst="rect">
-            <a:avLst/>
-          </a:prstGeom>
-          <a:noFill/>
-          <a:ln/>
-        </p:spPr>
-        <p:txBody>
-          <a:bodyPr wrap="square" lIns="0" tIns="0" rIns="0" bIns="0" rtlCol="0" anchor="ctr"/>
-          <a:lstStyle/>
-          <a:p>
-            <a:pPr indent="0" marL="0">
-              <a:buNone/>
-            </a:pPr>
-            <a:r>
-              <a:rPr lang="en-US" sz="850" b="1" spc="110" kern="0" dirty="0">
+            <a:ext cx="2926080" cy="201168"/>
+          </a:xfrm>
+          <a:prstGeom prst="rect">
+            <a:avLst/>
+          </a:prstGeom>
+          <a:noFill/>
+        </p:spPr>
+        <p:txBody>
+          <a:bodyPr wrap="none" lIns="0" rIns="0" tIns="0" bIns="0" anchor="ctr">
+            <a:spAutoFit/>
+          </a:bodyPr>
+          <a:lstStyle/>
+          <a:p>
+            <a:pPr algn="l"/>
+            <a:r>
+              <a:rPr sz="850" b="1">
                 <a:solidFill>
                   <a:srgbClr val="00A3FF"/>
                 </a:solidFill>
+                <a:latin typeface="Aptos"/>
               </a:rPr>
               <a:t>ROBUSTNESS</a:t>
             </a:r>
-            <a:endParaRPr lang="en-US" sz="850" dirty="0"/>
-          </a:p>
-        </p:txBody>
-      </p:sp>
-      <p:sp>
-        <p:nvSpPr>
-          <p:cNvPr id="4" name="Text 2"/>
-          <p:cNvSpPr/>
+          </a:p>
+        </p:txBody>
+      </p:sp>
+      <p:sp>
+        <p:nvSpPr>
+          <p:cNvPr id="4" name="TextBox 3"/>
+          <p:cNvSpPr txBox="1"/>
           <p:nvPr/>
         </p:nvSpPr>
         <p:spPr>
           <a:xfrm>
             <a:off x="621792" y="612648"/>
-            <a:ext cx="10789920" cy="548640"/>
-          </a:xfrm>
-          <a:prstGeom prst="rect">
-            <a:avLst/>
-          </a:prstGeom>
-          <a:noFill/>
-          <a:ln/>
-        </p:spPr>
-        <p:txBody>
-          <a:bodyPr wrap="square" lIns="0" tIns="0" rIns="0" bIns="0" rtlCol="0" anchor="ctr">
-            <a:normAutofit/>
-          </a:bodyPr>
-          <a:lstStyle/>
-          <a:p>
-            <a:pPr indent="0" marL="0">
-              <a:buNone/>
-            </a:pPr>
-            <a:r>
-              <a:rPr lang="en-US" sz="2700" b="1" dirty="0">
+            <a:ext cx="10789920" cy="566928"/>
+          </a:xfrm>
+          <a:prstGeom prst="rect">
+            <a:avLst/>
+          </a:prstGeom>
+          <a:noFill/>
+        </p:spPr>
+        <p:txBody>
+          <a:bodyPr wrap="none" lIns="0" rIns="0" tIns="0" bIns="0" anchor="ctr">
+            <a:spAutoFit/>
+          </a:bodyPr>
+          <a:lstStyle/>
+          <a:p>
+            <a:pPr algn="l"/>
+            <a:r>
+              <a:rPr sz="2450" b="1">
                 <a:solidFill>
                   <a:srgbClr val="F7FAFC"/>
                 </a:solidFill>
+                <a:latin typeface="Aptos Display"/>
               </a:rPr>
               <a:t>A good recommendation should survive a reasonable argument about weights.</a:t>
             </a:r>
-            <a:endParaRPr lang="en-US" sz="2700" dirty="0"/>
-          </a:p>
-        </p:txBody>
-      </p:sp>
-      <p:sp>
-        <p:nvSpPr>
-          <p:cNvPr id="5" name="Text 3"/>
-          <p:cNvSpPr/>
+          </a:p>
+        </p:txBody>
+      </p:sp>
+      <p:sp>
+        <p:nvSpPr>
+          <p:cNvPr id="5" name="TextBox 4"/>
+          <p:cNvSpPr txBox="1"/>
           <p:nvPr/>
         </p:nvSpPr>
         <p:spPr>
           <a:xfrm>
             <a:off x="630936" y="1225296"/>
-            <a:ext cx="10698480" cy="420624"/>
-          </a:xfrm>
-          <a:prstGeom prst="rect">
-            <a:avLst/>
-          </a:prstGeom>
-          <a:noFill/>
-          <a:ln/>
-        </p:spPr>
-        <p:txBody>
-          <a:bodyPr wrap="square" lIns="0" tIns="0" rIns="0" bIns="0" rtlCol="0" anchor="ctr">
-            <a:normAutofit/>
-          </a:bodyPr>
-          <a:lstStyle/>
-          <a:p>
-            <a:pPr indent="0" marL="0">
-              <a:buNone/>
-            </a:pPr>
-            <a:r>
-              <a:rPr lang="en-US" sz="1250" dirty="0">
+            <a:ext cx="10698480" cy="411480"/>
+          </a:xfrm>
+          <a:prstGeom prst="rect">
+            <a:avLst/>
+          </a:prstGeom>
+          <a:noFill/>
+        </p:spPr>
+        <p:txBody>
+          <a:bodyPr wrap="none" lIns="0" rIns="0" tIns="0" bIns="0" anchor="ctr">
+            <a:spAutoFit/>
+          </a:bodyPr>
+          <a:lstStyle/>
+          <a:p>
+            <a:pPr algn="l"/>
+            <a:r>
+              <a:rPr sz="1250" b="0">
                 <a:solidFill>
                   <a:srgbClr val="A9BAC9"/>
                 </a:solidFill>
-              </a:rPr>
-              <a:t>Sensitivity testing turns “why 20%?” from a weakness into a testable question.</a:t>
-            </a:r>
-            <a:endParaRPr lang="en-US" sz="1250" dirty="0"/>
-          </a:p>
-        </p:txBody>
-      </p:sp>
-      <p:sp>
-        <p:nvSpPr>
-          <p:cNvPr id="6" name="Shape 4"/>
-          <p:cNvSpPr/>
-          <p:nvPr/>
-        </p:nvSpPr>
-        <p:spPr>
-          <a:xfrm>
-            <a:off x="566928" y="6455664"/>
-            <a:ext cx="11064240" cy="0"/>
-          </a:xfrm>
-          <a:prstGeom prst="line">
-            <a:avLst/>
-          </a:prstGeom>
-          <a:noFill/>
-          <a:ln w="8890">
-            <a:solidFill>
-              <a:srgbClr val="193B57"/>
-            </a:solidFill>
-            <a:prstDash val="solid"/>
-          </a:ln>
-        </p:spPr>
-      </p:sp>
-      <p:sp>
-        <p:nvSpPr>
-          <p:cNvPr id="7" name="Text 5"/>
-          <p:cNvSpPr/>
-          <p:nvPr/>
-        </p:nvSpPr>
-        <p:spPr>
-          <a:xfrm>
-            <a:off x="594360" y="6510528"/>
-            <a:ext cx="1737360" cy="146304"/>
-          </a:xfrm>
-          <a:prstGeom prst="rect">
-            <a:avLst/>
-          </a:prstGeom>
-          <a:noFill/>
-          <a:ln/>
-        </p:spPr>
-        <p:txBody>
-          <a:bodyPr wrap="square" lIns="0" tIns="0" rIns="0" bIns="0" rtlCol="0" anchor="ctr"/>
-          <a:lstStyle/>
-          <a:p>
-            <a:pPr indent="0" marL="0">
-              <a:buNone/>
-            </a:pPr>
-            <a:r>
-              <a:rPr lang="en-US" sz="580" b="1" spc="70" kern="0" dirty="0">
-                <a:solidFill>
-                  <a:srgbClr val="6F879A"/>
-                </a:solidFill>
-              </a:rPr>
-              <a:t>MAV METRICS  •  09</a:t>
-            </a:r>
-            <a:endParaRPr lang="en-US" sz="580" dirty="0"/>
-          </a:p>
-        </p:txBody>
-      </p:sp>
-      <p:sp>
-        <p:nvSpPr>
-          <p:cNvPr id="8" name="Shape 6"/>
-          <p:cNvSpPr/>
-          <p:nvPr/>
-        </p:nvSpPr>
-        <p:spPr>
-          <a:xfrm>
-            <a:off x="713232" y="1874520"/>
-            <a:ext cx="6812280" cy="3822192"/>
+                <a:latin typeface="Aptos"/>
+              </a:rPr>
+              <a:t>We predefine the robustness test before we look at the winner.</a:t>
+            </a:r>
+          </a:p>
+        </p:txBody>
+      </p:sp>
+      <p:sp>
+        <p:nvSpPr>
+          <p:cNvPr id="6" name="Rounded Rectangle 5"/>
+          <p:cNvSpPr/>
+          <p:nvPr/>
+        </p:nvSpPr>
+        <p:spPr>
+          <a:xfrm>
+            <a:off x="713232" y="1874519"/>
+            <a:ext cx="6995160" cy="3858768"/>
           </a:xfrm>
           <a:prstGeom prst="roundRect">
-            <a:avLst>
-              <a:gd name="adj" fmla="val 1914"/>
-            </a:avLst>
+            <a:avLst/>
           </a:prstGeom>
           <a:solidFill>
             <a:srgbClr val="081D31"/>
@@ -14877,407 +15197,514 @@
             <a:solidFill>
               <a:srgbClr val="193B57"/>
             </a:solidFill>
-            <a:prstDash val="solid"/>
           </a:ln>
         </p:spPr>
-      </p:sp>
-      <p:sp>
-        <p:nvSpPr>
-          <p:cNvPr id="9" name="Text 7"/>
-          <p:cNvSpPr/>
-          <p:nvPr/>
-        </p:nvSpPr>
-        <p:spPr>
-          <a:xfrm>
-            <a:off x="987552" y="2176272"/>
-            <a:ext cx="5029200" cy="256032"/>
-          </a:xfrm>
-          <a:prstGeom prst="rect">
-            <a:avLst/>
-          </a:prstGeom>
-          <a:noFill/>
-          <a:ln/>
-        </p:spPr>
-        <p:txBody>
-          <a:bodyPr wrap="square" lIns="254" tIns="254" rIns="254" bIns="254" rtlCol="0" anchor="ctr">
-            <a:normAutofit/>
-          </a:bodyPr>
-          <a:lstStyle/>
-          <a:p>
-            <a:pPr algn="l" indent="0" marL="0">
-              <a:buNone/>
-            </a:pPr>
-            <a:r>
-              <a:rPr lang="en-US" sz="800" b="1" dirty="0">
+        <p:style>
+          <a:lnRef idx="1">
+            <a:schemeClr val="accent1"/>
+          </a:lnRef>
+          <a:fillRef idx="3">
+            <a:schemeClr val="accent1"/>
+          </a:fillRef>
+          <a:effectRef idx="2">
+            <a:schemeClr val="accent1"/>
+          </a:effectRef>
+          <a:fontRef idx="minor">
+            <a:schemeClr val="lt1"/>
+          </a:fontRef>
+        </p:style>
+        <p:txBody>
+          <a:bodyPr rtlCol="0" anchor="ctr"/>
+          <a:lstStyle/>
+          <a:p>
+            <a:pPr algn="ctr"/>
+          </a:p>
+        </p:txBody>
+      </p:sp>
+      <p:sp>
+        <p:nvSpPr>
+          <p:cNvPr id="7" name="TextBox 6"/>
+          <p:cNvSpPr txBox="1"/>
+          <p:nvPr/>
+        </p:nvSpPr>
+        <p:spPr>
+          <a:xfrm>
+            <a:off x="987552" y="2157984"/>
+            <a:ext cx="2103120" cy="246888"/>
+          </a:xfrm>
+          <a:prstGeom prst="rect">
+            <a:avLst/>
+          </a:prstGeom>
+          <a:noFill/>
+        </p:spPr>
+        <p:txBody>
+          <a:bodyPr wrap="none" lIns="0" rIns="0" tIns="0" bIns="0" anchor="ctr">
+            <a:spAutoFit/>
+          </a:bodyPr>
+          <a:lstStyle/>
+          <a:p>
+            <a:pPr algn="l"/>
+            <a:r>
+              <a:rPr sz="800" b="1">
                 <a:solidFill>
                   <a:srgbClr val="00A3FF"/>
                 </a:solidFill>
-              </a:rPr>
-              <a:t>RANK STABILITY UNDER ±10-POINT WEIGHT SHIFTS</a:t>
-            </a:r>
-            <a:endParaRPr lang="en-US" sz="800" dirty="0"/>
-          </a:p>
-        </p:txBody>
-      </p:sp>
-      <p:sp>
-        <p:nvSpPr>
-          <p:cNvPr id="10" name="Text 8"/>
-          <p:cNvSpPr/>
-          <p:nvPr/>
-        </p:nvSpPr>
-        <p:spPr>
-          <a:xfrm>
-            <a:off x="987552" y="2788920"/>
-            <a:ext cx="1600200" cy="219456"/>
-          </a:xfrm>
-          <a:prstGeom prst="rect">
-            <a:avLst/>
-          </a:prstGeom>
-          <a:noFill/>
-          <a:ln/>
-        </p:spPr>
-        <p:txBody>
-          <a:bodyPr wrap="square" lIns="254" tIns="254" rIns="254" bIns="254" rtlCol="0" anchor="ctr">
-            <a:normAutofit/>
-          </a:bodyPr>
-          <a:lstStyle/>
-          <a:p>
-            <a:pPr algn="l" indent="0" marL="0">
-              <a:buNone/>
-            </a:pPr>
-            <a:r>
-              <a:rPr lang="en-US" sz="850" b="1" dirty="0">
+                <a:latin typeface="Aptos"/>
+              </a:rPr>
+              <a:t>SENSITIVITY TEST</a:t>
+            </a:r>
+          </a:p>
+        </p:txBody>
+      </p:sp>
+      <p:sp>
+        <p:nvSpPr>
+          <p:cNvPr id="8" name="TextBox 7"/>
+          <p:cNvSpPr txBox="1"/>
+          <p:nvPr/>
+        </p:nvSpPr>
+        <p:spPr>
+          <a:xfrm>
+            <a:off x="987552" y="2697480"/>
+            <a:ext cx="411480" cy="310896"/>
+          </a:xfrm>
+          <a:prstGeom prst="rect">
+            <a:avLst/>
+          </a:prstGeom>
+          <a:noFill/>
+        </p:spPr>
+        <p:txBody>
+          <a:bodyPr wrap="none" lIns="0" rIns="0" tIns="0" bIns="0" anchor="ctr">
+            <a:spAutoFit/>
+          </a:bodyPr>
+          <a:lstStyle/>
+          <a:p>
+            <a:pPr algn="l"/>
+            <a:r>
+              <a:rPr sz="1600" b="1">
+                <a:solidFill>
+                  <a:srgbClr val="00A3FF"/>
+                </a:solidFill>
+                <a:latin typeface="Aptos"/>
+              </a:rPr>
+              <a:t>01</a:t>
+            </a:r>
+          </a:p>
+        </p:txBody>
+      </p:sp>
+      <p:sp>
+        <p:nvSpPr>
+          <p:cNvPr id="9" name="TextBox 8"/>
+          <p:cNvSpPr txBox="1"/>
+          <p:nvPr/>
+        </p:nvSpPr>
+        <p:spPr>
+          <a:xfrm>
+            <a:off x="1572768" y="2697480"/>
+            <a:ext cx="1325880" cy="274320"/>
+          </a:xfrm>
+          <a:prstGeom prst="rect">
+            <a:avLst/>
+          </a:prstGeom>
+          <a:noFill/>
+        </p:spPr>
+        <p:txBody>
+          <a:bodyPr wrap="none" lIns="0" rIns="0" tIns="0" bIns="0" anchor="ctr">
+            <a:spAutoFit/>
+          </a:bodyPr>
+          <a:lstStyle/>
+          <a:p>
+            <a:pPr algn="l"/>
+            <a:r>
+              <a:rPr sz="850" b="1">
+                <a:solidFill>
+                  <a:srgbClr val="00A3FF"/>
+                </a:solidFill>
+                <a:latin typeface="Aptos"/>
+              </a:rPr>
+              <a:t>PERTURB</a:t>
+            </a:r>
+          </a:p>
+        </p:txBody>
+      </p:sp>
+      <p:sp>
+        <p:nvSpPr>
+          <p:cNvPr id="10" name="TextBox 9"/>
+          <p:cNvSpPr txBox="1"/>
+          <p:nvPr/>
+        </p:nvSpPr>
+        <p:spPr>
+          <a:xfrm>
+            <a:off x="2889504" y="2679192"/>
+            <a:ext cx="4261104" cy="420624"/>
+          </a:xfrm>
+          <a:prstGeom prst="rect">
+            <a:avLst/>
+          </a:prstGeom>
+          <a:noFill/>
+        </p:spPr>
+        <p:txBody>
+          <a:bodyPr wrap="none" lIns="0" rIns="0" tIns="0" bIns="0" anchor="ctr">
+            <a:spAutoFit/>
+          </a:bodyPr>
+          <a:lstStyle/>
+          <a:p>
+            <a:pPr algn="l"/>
+            <a:r>
+              <a:rPr sz="1050" b="1">
+                <a:solidFill>
+                  <a:srgbClr val="F7FAFC"/>
+                </a:solidFill>
+                <a:latin typeface="Aptos"/>
+              </a:rPr>
+              <a:t>Move each pillar weight up or down by as much as 10 points.</a:t>
+            </a:r>
+          </a:p>
+        </p:txBody>
+      </p:sp>
+      <p:sp>
+        <p:nvSpPr>
+          <p:cNvPr id="11" name="Rectangle 10"/>
+          <p:cNvSpPr/>
+          <p:nvPr/>
+        </p:nvSpPr>
+        <p:spPr>
+          <a:xfrm>
+            <a:off x="1060704" y="3172968"/>
+            <a:ext cx="8890" cy="301752"/>
+          </a:xfrm>
+          <a:prstGeom prst="rect">
+            <a:avLst/>
+          </a:prstGeom>
+          <a:solidFill>
+            <a:srgbClr val="193B57"/>
+          </a:solidFill>
+          <a:ln>
+            <a:noFill/>
+          </a:ln>
+        </p:spPr>
+        <p:style>
+          <a:lnRef idx="1">
+            <a:schemeClr val="accent1"/>
+          </a:lnRef>
+          <a:fillRef idx="3">
+            <a:schemeClr val="accent1"/>
+          </a:fillRef>
+          <a:effectRef idx="2">
+            <a:schemeClr val="accent1"/>
+          </a:effectRef>
+          <a:fontRef idx="minor">
+            <a:schemeClr val="lt1"/>
+          </a:fontRef>
+        </p:style>
+        <p:txBody>
+          <a:bodyPr rtlCol="0" anchor="ctr"/>
+          <a:lstStyle/>
+          <a:p>
+            <a:pPr algn="ctr"/>
+          </a:p>
+        </p:txBody>
+      </p:sp>
+      <p:sp>
+        <p:nvSpPr>
+          <p:cNvPr id="12" name="TextBox 11"/>
+          <p:cNvSpPr txBox="1"/>
+          <p:nvPr/>
+        </p:nvSpPr>
+        <p:spPr>
+          <a:xfrm>
+            <a:off x="987552" y="3566160"/>
+            <a:ext cx="411480" cy="310896"/>
+          </a:xfrm>
+          <a:prstGeom prst="rect">
+            <a:avLst/>
+          </a:prstGeom>
+          <a:noFill/>
+        </p:spPr>
+        <p:txBody>
+          <a:bodyPr wrap="none" lIns="0" rIns="0" tIns="0" bIns="0" anchor="ctr">
+            <a:spAutoFit/>
+          </a:bodyPr>
+          <a:lstStyle/>
+          <a:p>
+            <a:pPr algn="l"/>
+            <a:r>
+              <a:rPr sz="1600" b="1">
+                <a:solidFill>
+                  <a:srgbClr val="35D0BA"/>
+                </a:solidFill>
+                <a:latin typeface="Aptos"/>
+              </a:rPr>
+              <a:t>02</a:t>
+            </a:r>
+          </a:p>
+        </p:txBody>
+      </p:sp>
+      <p:sp>
+        <p:nvSpPr>
+          <p:cNvPr id="13" name="TextBox 12"/>
+          <p:cNvSpPr txBox="1"/>
+          <p:nvPr/>
+        </p:nvSpPr>
+        <p:spPr>
+          <a:xfrm>
+            <a:off x="1572768" y="3566160"/>
+            <a:ext cx="1325880" cy="274320"/>
+          </a:xfrm>
+          <a:prstGeom prst="rect">
+            <a:avLst/>
+          </a:prstGeom>
+          <a:noFill/>
+        </p:spPr>
+        <p:txBody>
+          <a:bodyPr wrap="none" lIns="0" rIns="0" tIns="0" bIns="0" anchor="ctr">
+            <a:spAutoFit/>
+          </a:bodyPr>
+          <a:lstStyle/>
+          <a:p>
+            <a:pPr algn="l"/>
+            <a:r>
+              <a:rPr sz="850" b="1">
+                <a:solidFill>
+                  <a:srgbClr val="35D0BA"/>
+                </a:solidFill>
+                <a:latin typeface="Aptos"/>
+              </a:rPr>
+              <a:t>RENORMALIZE</a:t>
+            </a:r>
+          </a:p>
+        </p:txBody>
+      </p:sp>
+      <p:sp>
+        <p:nvSpPr>
+          <p:cNvPr id="14" name="TextBox 13"/>
+          <p:cNvSpPr txBox="1"/>
+          <p:nvPr/>
+        </p:nvSpPr>
+        <p:spPr>
+          <a:xfrm>
+            <a:off x="2889504" y="3547872"/>
+            <a:ext cx="4261104" cy="420624"/>
+          </a:xfrm>
+          <a:prstGeom prst="rect">
+            <a:avLst/>
+          </a:prstGeom>
+          <a:noFill/>
+        </p:spPr>
+        <p:txBody>
+          <a:bodyPr wrap="none" lIns="0" rIns="0" tIns="0" bIns="0" anchor="ctr">
+            <a:spAutoFit/>
+          </a:bodyPr>
+          <a:lstStyle/>
+          <a:p>
+            <a:pPr algn="l"/>
+            <a:r>
+              <a:rPr sz="1050" b="1">
+                <a:solidFill>
+                  <a:srgbClr val="F7FAFC"/>
+                </a:solidFill>
+                <a:latin typeface="Aptos"/>
+              </a:rPr>
+              <a:t>Scale the new weights back to 100% so scenarios stay comparable.</a:t>
+            </a:r>
+          </a:p>
+        </p:txBody>
+      </p:sp>
+      <p:sp>
+        <p:nvSpPr>
+          <p:cNvPr id="15" name="Rectangle 14"/>
+          <p:cNvSpPr/>
+          <p:nvPr/>
+        </p:nvSpPr>
+        <p:spPr>
+          <a:xfrm>
+            <a:off x="1060704" y="4041648"/>
+            <a:ext cx="8890" cy="301752"/>
+          </a:xfrm>
+          <a:prstGeom prst="rect">
+            <a:avLst/>
+          </a:prstGeom>
+          <a:solidFill>
+            <a:srgbClr val="193B57"/>
+          </a:solidFill>
+          <a:ln>
+            <a:noFill/>
+          </a:ln>
+        </p:spPr>
+        <p:style>
+          <a:lnRef idx="1">
+            <a:schemeClr val="accent1"/>
+          </a:lnRef>
+          <a:fillRef idx="3">
+            <a:schemeClr val="accent1"/>
+          </a:fillRef>
+          <a:effectRef idx="2">
+            <a:schemeClr val="accent1"/>
+          </a:effectRef>
+          <a:fontRef idx="minor">
+            <a:schemeClr val="lt1"/>
+          </a:fontRef>
+        </p:style>
+        <p:txBody>
+          <a:bodyPr rtlCol="0" anchor="ctr"/>
+          <a:lstStyle/>
+          <a:p>
+            <a:pPr algn="ctr"/>
+          </a:p>
+        </p:txBody>
+      </p:sp>
+      <p:sp>
+        <p:nvSpPr>
+          <p:cNvPr id="16" name="TextBox 15"/>
+          <p:cNvSpPr txBox="1"/>
+          <p:nvPr/>
+        </p:nvSpPr>
+        <p:spPr>
+          <a:xfrm>
+            <a:off x="987552" y="4434840"/>
+            <a:ext cx="411480" cy="310896"/>
+          </a:xfrm>
+          <a:prstGeom prst="rect">
+            <a:avLst/>
+          </a:prstGeom>
+          <a:noFill/>
+        </p:spPr>
+        <p:txBody>
+          <a:bodyPr wrap="none" lIns="0" rIns="0" tIns="0" bIns="0" anchor="ctr">
+            <a:spAutoFit/>
+          </a:bodyPr>
+          <a:lstStyle/>
+          <a:p>
+            <a:pPr algn="l"/>
+            <a:r>
+              <a:rPr sz="1600" b="1">
+                <a:solidFill>
+                  <a:srgbClr val="F4C95D"/>
+                </a:solidFill>
+                <a:latin typeface="Aptos"/>
+              </a:rPr>
+              <a:t>03</a:t>
+            </a:r>
+          </a:p>
+        </p:txBody>
+      </p:sp>
+      <p:sp>
+        <p:nvSpPr>
+          <p:cNvPr id="17" name="TextBox 16"/>
+          <p:cNvSpPr txBox="1"/>
+          <p:nvPr/>
+        </p:nvSpPr>
+        <p:spPr>
+          <a:xfrm>
+            <a:off x="1572768" y="4434840"/>
+            <a:ext cx="1325880" cy="274320"/>
+          </a:xfrm>
+          <a:prstGeom prst="rect">
+            <a:avLst/>
+          </a:prstGeom>
+          <a:noFill/>
+        </p:spPr>
+        <p:txBody>
+          <a:bodyPr wrap="none" lIns="0" rIns="0" tIns="0" bIns="0" anchor="ctr">
+            <a:spAutoFit/>
+          </a:bodyPr>
+          <a:lstStyle/>
+          <a:p>
+            <a:pPr algn="l"/>
+            <a:r>
+              <a:rPr sz="850" b="1">
+                <a:solidFill>
+                  <a:srgbClr val="F4C95D"/>
+                </a:solidFill>
+                <a:latin typeface="Aptos"/>
+              </a:rPr>
+              <a:t>RE-RANK</a:t>
+            </a:r>
+          </a:p>
+        </p:txBody>
+      </p:sp>
+      <p:sp>
+        <p:nvSpPr>
+          <p:cNvPr id="18" name="TextBox 17"/>
+          <p:cNvSpPr txBox="1"/>
+          <p:nvPr/>
+        </p:nvSpPr>
+        <p:spPr>
+          <a:xfrm>
+            <a:off x="2889504" y="4416552"/>
+            <a:ext cx="4261104" cy="420624"/>
+          </a:xfrm>
+          <a:prstGeom prst="rect">
+            <a:avLst/>
+          </a:prstGeom>
+          <a:noFill/>
+        </p:spPr>
+        <p:txBody>
+          <a:bodyPr wrap="none" lIns="0" rIns="0" tIns="0" bIns="0" anchor="ctr">
+            <a:spAutoFit/>
+          </a:bodyPr>
+          <a:lstStyle/>
+          <a:p>
+            <a:pPr algn="l"/>
+            <a:r>
+              <a:rPr sz="1050" b="1">
+                <a:solidFill>
+                  <a:srgbClr val="F7FAFC"/>
+                </a:solidFill>
+                <a:latin typeface="Aptos"/>
+              </a:rPr>
+              <a:t>Recalculate the opportunity list across the plausible scenarios.</a:t>
+            </a:r>
+          </a:p>
+        </p:txBody>
+      </p:sp>
+      <p:sp>
+        <p:nvSpPr>
+          <p:cNvPr id="19" name="TextBox 18"/>
+          <p:cNvSpPr txBox="1"/>
+          <p:nvPr/>
+        </p:nvSpPr>
+        <p:spPr>
+          <a:xfrm>
+            <a:off x="987552" y="5276088"/>
+            <a:ext cx="6199632" cy="292608"/>
+          </a:xfrm>
+          <a:prstGeom prst="rect">
+            <a:avLst/>
+          </a:prstGeom>
+          <a:noFill/>
+        </p:spPr>
+        <p:txBody>
+          <a:bodyPr wrap="none" lIns="0" rIns="0" tIns="0" bIns="0" anchor="ctr">
+            <a:spAutoFit/>
+          </a:bodyPr>
+          <a:lstStyle/>
+          <a:p>
+            <a:pPr algn="l"/>
+            <a:r>
+              <a:rPr sz="950" b="0">
                 <a:solidFill>
                   <a:srgbClr val="A9BAC9"/>
                 </a:solidFill>
-              </a:rPr>
-              <a:t>Top opportunity A</a:t>
-            </a:r>
-            <a:endParaRPr lang="en-US" sz="850" dirty="0"/>
-          </a:p>
-        </p:txBody>
-      </p:sp>
-      <p:sp>
-        <p:nvSpPr>
-          <p:cNvPr id="11" name="Shape 9"/>
-          <p:cNvSpPr/>
-          <p:nvPr/>
-        </p:nvSpPr>
-        <p:spPr>
-          <a:xfrm>
-            <a:off x="2651760" y="2898648"/>
-            <a:ext cx="4160520" cy="0"/>
-          </a:xfrm>
-          <a:prstGeom prst="line">
-            <a:avLst/>
-          </a:prstGeom>
-          <a:noFill/>
-          <a:ln w="50800">
-            <a:solidFill>
-              <a:srgbClr val="193B57"/>
-            </a:solidFill>
-            <a:prstDash val="solid"/>
-          </a:ln>
-        </p:spPr>
-      </p:sp>
-      <p:sp>
-        <p:nvSpPr>
-          <p:cNvPr id="12" name="Shape 10"/>
-          <p:cNvSpPr/>
-          <p:nvPr/>
-        </p:nvSpPr>
-        <p:spPr>
-          <a:xfrm>
-            <a:off x="3017520" y="2898648"/>
-            <a:ext cx="2651760" cy="0"/>
-          </a:xfrm>
-          <a:prstGeom prst="line">
-            <a:avLst/>
-          </a:prstGeom>
-          <a:noFill/>
-          <a:ln w="76200">
-            <a:solidFill>
-              <a:srgbClr val="35D0BA"/>
-            </a:solidFill>
-            <a:prstDash val="solid"/>
-            <a:headEnd type="none"/>
-            <a:tailEnd type="none"/>
-          </a:ln>
-        </p:spPr>
-      </p:sp>
-      <p:sp>
-        <p:nvSpPr>
-          <p:cNvPr id="13" name="Text 11"/>
-          <p:cNvSpPr/>
-          <p:nvPr/>
-        </p:nvSpPr>
-        <p:spPr>
-          <a:xfrm>
-            <a:off x="987552" y="3401568"/>
-            <a:ext cx="1600200" cy="219456"/>
-          </a:xfrm>
-          <a:prstGeom prst="rect">
-            <a:avLst/>
-          </a:prstGeom>
-          <a:noFill/>
-          <a:ln/>
-        </p:spPr>
-        <p:txBody>
-          <a:bodyPr wrap="square" lIns="254" tIns="254" rIns="254" bIns="254" rtlCol="0" anchor="ctr">
-            <a:normAutofit/>
-          </a:bodyPr>
-          <a:lstStyle/>
-          <a:p>
-            <a:pPr algn="l" indent="0" marL="0">
-              <a:buNone/>
-            </a:pPr>
-            <a:r>
-              <a:rPr lang="en-US" sz="850" b="1" dirty="0">
-                <a:solidFill>
-                  <a:srgbClr val="A9BAC9"/>
-                </a:solidFill>
-              </a:rPr>
-              <a:t>Top opportunity B</a:t>
-            </a:r>
-            <a:endParaRPr lang="en-US" sz="850" dirty="0"/>
-          </a:p>
-        </p:txBody>
-      </p:sp>
-      <p:sp>
-        <p:nvSpPr>
-          <p:cNvPr id="14" name="Shape 12"/>
-          <p:cNvSpPr/>
-          <p:nvPr/>
-        </p:nvSpPr>
-        <p:spPr>
-          <a:xfrm>
-            <a:off x="2651760" y="3511296"/>
-            <a:ext cx="4160520" cy="0"/>
-          </a:xfrm>
-          <a:prstGeom prst="line">
-            <a:avLst/>
-          </a:prstGeom>
-          <a:noFill/>
-          <a:ln w="50800">
-            <a:solidFill>
-              <a:srgbClr val="193B57"/>
-            </a:solidFill>
-            <a:prstDash val="solid"/>
-          </a:ln>
-        </p:spPr>
-      </p:sp>
-      <p:sp>
-        <p:nvSpPr>
-          <p:cNvPr id="15" name="Shape 13"/>
-          <p:cNvSpPr/>
-          <p:nvPr/>
-        </p:nvSpPr>
-        <p:spPr>
-          <a:xfrm>
-            <a:off x="3657600" y="3511296"/>
-            <a:ext cx="2194560" cy="0"/>
-          </a:xfrm>
-          <a:prstGeom prst="line">
-            <a:avLst/>
-          </a:prstGeom>
-          <a:noFill/>
-          <a:ln w="76200">
-            <a:solidFill>
-              <a:srgbClr val="00A3FF"/>
-            </a:solidFill>
-            <a:prstDash val="solid"/>
-            <a:headEnd type="none"/>
-            <a:tailEnd type="none"/>
-          </a:ln>
-        </p:spPr>
-      </p:sp>
-      <p:sp>
-        <p:nvSpPr>
-          <p:cNvPr id="16" name="Text 14"/>
-          <p:cNvSpPr/>
-          <p:nvPr/>
-        </p:nvSpPr>
-        <p:spPr>
-          <a:xfrm>
-            <a:off x="987552" y="4014216"/>
-            <a:ext cx="1600200" cy="219456"/>
-          </a:xfrm>
-          <a:prstGeom prst="rect">
-            <a:avLst/>
-          </a:prstGeom>
-          <a:noFill/>
-          <a:ln/>
-        </p:spPr>
-        <p:txBody>
-          <a:bodyPr wrap="square" lIns="254" tIns="254" rIns="254" bIns="254" rtlCol="0" anchor="ctr">
-            <a:normAutofit/>
-          </a:bodyPr>
-          <a:lstStyle/>
-          <a:p>
-            <a:pPr algn="l" indent="0" marL="0">
-              <a:buNone/>
-            </a:pPr>
-            <a:r>
-              <a:rPr lang="en-US" sz="850" b="1" dirty="0">
-                <a:solidFill>
-                  <a:srgbClr val="A9BAC9"/>
-                </a:solidFill>
-              </a:rPr>
-              <a:t>Top opportunity C</a:t>
-            </a:r>
-            <a:endParaRPr lang="en-US" sz="850" dirty="0"/>
-          </a:p>
-        </p:txBody>
-      </p:sp>
-      <p:sp>
-        <p:nvSpPr>
-          <p:cNvPr id="17" name="Shape 15"/>
-          <p:cNvSpPr/>
-          <p:nvPr/>
-        </p:nvSpPr>
-        <p:spPr>
-          <a:xfrm>
-            <a:off x="2651760" y="4123944"/>
-            <a:ext cx="4160520" cy="0"/>
-          </a:xfrm>
-          <a:prstGeom prst="line">
-            <a:avLst/>
-          </a:prstGeom>
-          <a:noFill/>
-          <a:ln w="50800">
-            <a:solidFill>
-              <a:srgbClr val="193B57"/>
-            </a:solidFill>
-            <a:prstDash val="solid"/>
-          </a:ln>
-        </p:spPr>
-      </p:sp>
-      <p:sp>
-        <p:nvSpPr>
-          <p:cNvPr id="18" name="Shape 16"/>
-          <p:cNvSpPr/>
-          <p:nvPr/>
-        </p:nvSpPr>
-        <p:spPr>
-          <a:xfrm>
-            <a:off x="4297680" y="4123944"/>
-            <a:ext cx="1828800" cy="0"/>
-          </a:xfrm>
-          <a:prstGeom prst="line">
-            <a:avLst/>
-          </a:prstGeom>
-          <a:noFill/>
-          <a:ln w="76200">
-            <a:solidFill>
-              <a:srgbClr val="F4C95D"/>
-            </a:solidFill>
-            <a:prstDash val="solid"/>
-            <a:headEnd type="none"/>
-            <a:tailEnd type="none"/>
-          </a:ln>
-        </p:spPr>
-      </p:sp>
-      <p:sp>
-        <p:nvSpPr>
-          <p:cNvPr id="19" name="Text 17"/>
-          <p:cNvSpPr/>
-          <p:nvPr/>
-        </p:nvSpPr>
-        <p:spPr>
-          <a:xfrm>
-            <a:off x="987552" y="4626864"/>
-            <a:ext cx="1600200" cy="219456"/>
-          </a:xfrm>
-          <a:prstGeom prst="rect">
-            <a:avLst/>
-          </a:prstGeom>
-          <a:noFill/>
-          <a:ln/>
-        </p:spPr>
-        <p:txBody>
-          <a:bodyPr wrap="square" lIns="254" tIns="254" rIns="254" bIns="254" rtlCol="0" anchor="ctr">
-            <a:normAutofit/>
-          </a:bodyPr>
-          <a:lstStyle/>
-          <a:p>
-            <a:pPr algn="l" indent="0" marL="0">
-              <a:buNone/>
-            </a:pPr>
-            <a:r>
-              <a:rPr lang="en-US" sz="850" b="1" dirty="0">
-                <a:solidFill>
-                  <a:srgbClr val="A9BAC9"/>
-                </a:solidFill>
-              </a:rPr>
-              <a:t>Top opportunity D</a:t>
-            </a:r>
-            <a:endParaRPr lang="en-US" sz="850" dirty="0"/>
-          </a:p>
-        </p:txBody>
-      </p:sp>
-      <p:sp>
-        <p:nvSpPr>
-          <p:cNvPr id="20" name="Shape 18"/>
-          <p:cNvSpPr/>
-          <p:nvPr/>
-        </p:nvSpPr>
-        <p:spPr>
-          <a:xfrm>
-            <a:off x="2651760" y="4736592"/>
-            <a:ext cx="4160520" cy="0"/>
-          </a:xfrm>
-          <a:prstGeom prst="line">
-            <a:avLst/>
-          </a:prstGeom>
-          <a:noFill/>
-          <a:ln w="50800">
-            <a:solidFill>
-              <a:srgbClr val="193B57"/>
-            </a:solidFill>
-            <a:prstDash val="solid"/>
-          </a:ln>
-        </p:spPr>
-      </p:sp>
-      <p:sp>
-        <p:nvSpPr>
-          <p:cNvPr id="21" name="Shape 19"/>
-          <p:cNvSpPr/>
-          <p:nvPr/>
-        </p:nvSpPr>
-        <p:spPr>
-          <a:xfrm>
-            <a:off x="5074920" y="4736592"/>
-            <a:ext cx="1280160" cy="0"/>
-          </a:xfrm>
-          <a:prstGeom prst="line">
-            <a:avLst/>
-          </a:prstGeom>
-          <a:noFill/>
-          <a:ln w="76200">
-            <a:solidFill>
-              <a:srgbClr val="9B8CFF"/>
-            </a:solidFill>
-            <a:prstDash val="solid"/>
-            <a:headEnd type="none"/>
-            <a:tailEnd type="none"/>
-          </a:ln>
-        </p:spPr>
-      </p:sp>
-      <p:sp>
-        <p:nvSpPr>
-          <p:cNvPr id="22" name="Shape 20"/>
-          <p:cNvSpPr/>
-          <p:nvPr/>
-        </p:nvSpPr>
-        <p:spPr>
-          <a:xfrm>
-            <a:off x="7863840" y="1874520"/>
-            <a:ext cx="3493008" cy="3822192"/>
+                <a:latin typeface="Aptos"/>
+              </a:rPr>
+              <a:t>The goal is not to prove one exact coefficient is “right.” It is to see whether the decision survives.</a:t>
+            </a:r>
+          </a:p>
+        </p:txBody>
+      </p:sp>
+      <p:sp>
+        <p:nvSpPr>
+          <p:cNvPr id="20" name="Rounded Rectangle 19"/>
+          <p:cNvSpPr/>
+          <p:nvPr/>
+        </p:nvSpPr>
+        <p:spPr>
+          <a:xfrm>
+            <a:off x="7955279" y="1874519"/>
+            <a:ext cx="3520440" cy="3858768"/>
           </a:xfrm>
           <a:prstGeom prst="roundRect">
-            <a:avLst>
-              <a:gd name="adj" fmla="val 2094"/>
-            </a:avLst>
+            <a:avLst/>
           </a:prstGeom>
           <a:solidFill>
             <a:srgbClr val="0B2741"/>
@@ -15286,190 +15713,360 @@
             <a:solidFill>
               <a:srgbClr val="193B57"/>
             </a:solidFill>
-            <a:prstDash val="solid"/>
           </a:ln>
         </p:spPr>
-      </p:sp>
-      <p:sp>
-        <p:nvSpPr>
-          <p:cNvPr id="23" name="Text 21"/>
-          <p:cNvSpPr/>
-          <p:nvPr/>
-        </p:nvSpPr>
-        <p:spPr>
-          <a:xfrm>
-            <a:off x="8174736" y="2212848"/>
-            <a:ext cx="2011680" cy="256032"/>
-          </a:xfrm>
-          <a:prstGeom prst="rect">
-            <a:avLst/>
-          </a:prstGeom>
-          <a:noFill/>
-          <a:ln/>
-        </p:spPr>
-        <p:txBody>
-          <a:bodyPr wrap="square" lIns="254" tIns="254" rIns="254" bIns="254" rtlCol="0" anchor="ctr">
-            <a:normAutofit/>
-          </a:bodyPr>
-          <a:lstStyle/>
-          <a:p>
-            <a:pPr algn="l" indent="0" marL="0">
-              <a:buNone/>
-            </a:pPr>
-            <a:r>
-              <a:rPr lang="en-US" sz="800" b="1" dirty="0">
+        <p:style>
+          <a:lnRef idx="1">
+            <a:schemeClr val="accent1"/>
+          </a:lnRef>
+          <a:fillRef idx="3">
+            <a:schemeClr val="accent1"/>
+          </a:fillRef>
+          <a:effectRef idx="2">
+            <a:schemeClr val="accent1"/>
+          </a:effectRef>
+          <a:fontRef idx="minor">
+            <a:schemeClr val="lt1"/>
+          </a:fontRef>
+        </p:style>
+        <p:txBody>
+          <a:bodyPr rtlCol="0" anchor="ctr"/>
+          <a:lstStyle/>
+          <a:p>
+            <a:pPr algn="ctr"/>
+          </a:p>
+        </p:txBody>
+      </p:sp>
+      <p:sp>
+        <p:nvSpPr>
+          <p:cNvPr id="21" name="TextBox 20"/>
+          <p:cNvSpPr txBox="1"/>
+          <p:nvPr/>
+        </p:nvSpPr>
+        <p:spPr>
+          <a:xfrm>
+            <a:off x="8257031" y="2157984"/>
+            <a:ext cx="1920240" cy="246888"/>
+          </a:xfrm>
+          <a:prstGeom prst="rect">
+            <a:avLst/>
+          </a:prstGeom>
+          <a:noFill/>
+        </p:spPr>
+        <p:txBody>
+          <a:bodyPr wrap="none" lIns="0" rIns="0" tIns="0" bIns="0" anchor="ctr">
+            <a:spAutoFit/>
+          </a:bodyPr>
+          <a:lstStyle/>
+          <a:p>
+            <a:pPr algn="l"/>
+            <a:r>
+              <a:rPr sz="800" b="1">
                 <a:solidFill>
                   <a:srgbClr val="35D0BA"/>
                 </a:solidFill>
+                <a:latin typeface="Aptos"/>
               </a:rPr>
               <a:t>DECISION RULE</a:t>
             </a:r>
-            <a:endParaRPr lang="en-US" sz="800" dirty="0"/>
-          </a:p>
-        </p:txBody>
-      </p:sp>
-      <p:sp>
-        <p:nvSpPr>
-          <p:cNvPr id="24" name="Text 22"/>
-          <p:cNvSpPr/>
-          <p:nvPr/>
-        </p:nvSpPr>
-        <p:spPr>
-          <a:xfrm>
-            <a:off x="8174736" y="2761488"/>
-            <a:ext cx="2578608" cy="960120"/>
-          </a:xfrm>
-          <a:prstGeom prst="rect">
-            <a:avLst/>
-          </a:prstGeom>
-          <a:noFill/>
-          <a:ln/>
-        </p:spPr>
-        <p:txBody>
-          <a:bodyPr wrap="square" lIns="254" tIns="254" rIns="254" bIns="254" rtlCol="0" anchor="ctr">
-            <a:normAutofit/>
-          </a:bodyPr>
-          <a:lstStyle/>
-          <a:p>
-            <a:pPr algn="l" indent="0" marL="0">
-              <a:buNone/>
-            </a:pPr>
-            <a:r>
-              <a:rPr lang="en-US" sz="1400" b="1" dirty="0">
+          </a:p>
+        </p:txBody>
+      </p:sp>
+      <p:sp>
+        <p:nvSpPr>
+          <p:cNvPr id="22" name="TextBox 21"/>
+          <p:cNvSpPr txBox="1"/>
+          <p:nvPr/>
+        </p:nvSpPr>
+        <p:spPr>
+          <a:xfrm>
+            <a:off x="8257031" y="2770632"/>
+            <a:ext cx="2194560" cy="566928"/>
+          </a:xfrm>
+          <a:prstGeom prst="rect">
+            <a:avLst/>
+          </a:prstGeom>
+          <a:noFill/>
+        </p:spPr>
+        <p:txBody>
+          <a:bodyPr wrap="none" lIns="0" rIns="0" tIns="0" bIns="0" anchor="ctr">
+            <a:spAutoFit/>
+          </a:bodyPr>
+          <a:lstStyle/>
+          <a:p>
+            <a:pPr algn="l"/>
+            <a:r>
+              <a:rPr sz="3000" b="1">
+                <a:solidFill>
+                  <a:srgbClr val="35D0BA"/>
+                </a:solidFill>
+                <a:latin typeface="Aptos"/>
+              </a:rPr>
+              <a:t>≥ 80%</a:t>
+            </a:r>
+          </a:p>
+        </p:txBody>
+      </p:sp>
+      <p:sp>
+        <p:nvSpPr>
+          <p:cNvPr id="23" name="TextBox 22"/>
+          <p:cNvSpPr txBox="1"/>
+          <p:nvPr/>
+        </p:nvSpPr>
+        <p:spPr>
+          <a:xfrm>
+            <a:off x="8257031" y="3401568"/>
+            <a:ext cx="2697480" cy="1024128"/>
+          </a:xfrm>
+          <a:prstGeom prst="rect">
+            <a:avLst/>
+          </a:prstGeom>
+          <a:noFill/>
+        </p:spPr>
+        <p:txBody>
+          <a:bodyPr wrap="none" lIns="0" rIns="0" tIns="0" bIns="0" anchor="ctr">
+            <a:spAutoFit/>
+          </a:bodyPr>
+          <a:lstStyle/>
+          <a:p>
+            <a:pPr algn="l"/>
+            <a:r>
+              <a:rPr sz="1300" b="1">
                 <a:solidFill>
                   <a:srgbClr val="FFFFFF"/>
                 </a:solidFill>
-              </a:rPr>
-              <a:t>Keep the recommendation only if it stays near the top across plausible weight choices.</a:t>
-            </a:r>
-            <a:endParaRPr lang="en-US" sz="1400" dirty="0"/>
-          </a:p>
-        </p:txBody>
-      </p:sp>
-      <p:sp>
-        <p:nvSpPr>
-          <p:cNvPr id="25" name="Text 23"/>
-          <p:cNvSpPr/>
-          <p:nvPr/>
-        </p:nvSpPr>
-        <p:spPr>
-          <a:xfrm>
-            <a:off x="8174736" y="4078224"/>
-            <a:ext cx="2578608" cy="685800"/>
-          </a:xfrm>
-          <a:prstGeom prst="rect">
-            <a:avLst/>
-          </a:prstGeom>
-          <a:noFill/>
-          <a:ln/>
-        </p:spPr>
-        <p:txBody>
-          <a:bodyPr wrap="square" lIns="254" tIns="254" rIns="254" bIns="254" rtlCol="0" anchor="ctr">
-            <a:normAutofit/>
-          </a:bodyPr>
-          <a:lstStyle/>
-          <a:p>
-            <a:pPr algn="l" indent="0" marL="0">
-              <a:buNone/>
-            </a:pPr>
-            <a:r>
-              <a:rPr lang="en-US" sz="1000" dirty="0">
+                <a:latin typeface="Aptos"/>
+              </a:rPr>
+              <a:t>Keep a candidate only if it remains in the top opportunity set in at least 80% of plausible weight scenarios.</a:t>
+            </a:r>
+          </a:p>
+        </p:txBody>
+      </p:sp>
+      <p:sp>
+        <p:nvSpPr>
+          <p:cNvPr id="24" name="TextBox 23"/>
+          <p:cNvSpPr txBox="1"/>
+          <p:nvPr/>
+        </p:nvSpPr>
+        <p:spPr>
+          <a:xfrm>
+            <a:off x="8257031" y="4626864"/>
+            <a:ext cx="2651760" cy="585216"/>
+          </a:xfrm>
+          <a:prstGeom prst="rect">
+            <a:avLst/>
+          </a:prstGeom>
+          <a:noFill/>
+        </p:spPr>
+        <p:txBody>
+          <a:bodyPr wrap="none" lIns="0" rIns="0" tIns="0" bIns="0" anchor="ctr">
+            <a:spAutoFit/>
+          </a:bodyPr>
+          <a:lstStyle/>
+          <a:p>
+            <a:pPr algn="l"/>
+            <a:r>
+              <a:rPr sz="950" b="0">
                 <a:solidFill>
                   <a:srgbClr val="A9BAC9"/>
                 </a:solidFill>
-              </a:rPr>
-              <a:t>That protects the story from one arbitrary coefficient.</a:t>
-            </a:r>
-            <a:endParaRPr lang="en-US" sz="1000" dirty="0"/>
-          </a:p>
-        </p:txBody>
-      </p:sp>
-      <p:sp>
-        <p:nvSpPr>
-          <p:cNvPr id="26" name="Shape 24"/>
-          <p:cNvSpPr/>
-          <p:nvPr/>
-        </p:nvSpPr>
-        <p:spPr>
-          <a:xfrm>
-            <a:off x="8174736" y="5047488"/>
-            <a:ext cx="1664208" cy="310896"/>
+                <a:latin typeface="Aptos"/>
+              </a:rPr>
+              <a:t>Threshold is a policy choice—not something tuned after seeing the result.</a:t>
+            </a:r>
+          </a:p>
+        </p:txBody>
+      </p:sp>
+      <p:sp>
+        <p:nvSpPr>
+          <p:cNvPr id="25" name="Rounded Rectangle 24"/>
+          <p:cNvSpPr/>
+          <p:nvPr/>
+        </p:nvSpPr>
+        <p:spPr>
+          <a:xfrm>
+            <a:off x="8257031" y="5230368"/>
+            <a:ext cx="1554480" cy="310896"/>
           </a:xfrm>
           <a:prstGeom prst="roundRect">
-            <a:avLst>
-              <a:gd name="adj" fmla="val 29412"/>
-            </a:avLst>
+            <a:avLst/>
           </a:prstGeom>
           <a:solidFill>
-            <a:srgbClr val="35D0BA">
-              <a:alpha val="18000"/>
-            </a:srgbClr>
+            <a:srgbClr val="0D344F"/>
           </a:solidFill>
-          <a:ln w="7620">
+          <a:ln w="8890">
             <a:solidFill>
-              <a:srgbClr val="35D0BA">
-                <a:alpha val="65000"/>
-              </a:srgbClr>
+              <a:srgbClr val="35D0BA"/>
             </a:solidFill>
-            <a:prstDash val="solid"/>
           </a:ln>
         </p:spPr>
-      </p:sp>
-      <p:sp>
-        <p:nvSpPr>
-          <p:cNvPr id="27" name="Text 25"/>
-          <p:cNvSpPr/>
-          <p:nvPr/>
-        </p:nvSpPr>
-        <p:spPr>
-          <a:xfrm>
-            <a:off x="8229600" y="5084064"/>
-            <a:ext cx="1554480" cy="219456"/>
-          </a:xfrm>
-          <a:prstGeom prst="rect">
-            <a:avLst/>
-          </a:prstGeom>
-          <a:noFill/>
-          <a:ln/>
-        </p:spPr>
-        <p:txBody>
-          <a:bodyPr wrap="square" lIns="254" tIns="254" rIns="254" bIns="254" rtlCol="0" anchor="ctr">
-            <a:normAutofit/>
-          </a:bodyPr>
-          <a:lstStyle/>
-          <a:p>
-            <a:pPr algn="ctr" indent="0" marL="0">
-              <a:buNone/>
-            </a:pPr>
-            <a:r>
-              <a:rPr lang="en-US" sz="730" b="1" dirty="0">
+        <p:style>
+          <a:lnRef idx="1">
+            <a:schemeClr val="accent1"/>
+          </a:lnRef>
+          <a:fillRef idx="3">
+            <a:schemeClr val="accent1"/>
+          </a:fillRef>
+          <a:effectRef idx="2">
+            <a:schemeClr val="accent1"/>
+          </a:effectRef>
+          <a:fontRef idx="minor">
+            <a:schemeClr val="lt1"/>
+          </a:fontRef>
+        </p:style>
+        <p:txBody>
+          <a:bodyPr rtlCol="0" anchor="ctr"/>
+          <a:lstStyle/>
+          <a:p>
+            <a:pPr algn="ctr"/>
+          </a:p>
+        </p:txBody>
+      </p:sp>
+      <p:sp>
+        <p:nvSpPr>
+          <p:cNvPr id="26" name="TextBox 25"/>
+          <p:cNvSpPr txBox="1"/>
+          <p:nvPr/>
+        </p:nvSpPr>
+        <p:spPr>
+          <a:xfrm>
+            <a:off x="8311896" y="5257800"/>
+            <a:ext cx="1444752" cy="228600"/>
+          </a:xfrm>
+          <a:prstGeom prst="rect">
+            <a:avLst/>
+          </a:prstGeom>
+          <a:noFill/>
+        </p:spPr>
+        <p:txBody>
+          <a:bodyPr wrap="none" lIns="0" rIns="0" tIns="0" bIns="0" anchor="ctr">
+            <a:spAutoFit/>
+          </a:bodyPr>
+          <a:lstStyle/>
+          <a:p>
+            <a:pPr algn="ctr"/>
+            <a:r>
+              <a:rPr sz="720" b="1">
                 <a:solidFill>
                   <a:srgbClr val="F7FAFC"/>
                 </a:solidFill>
+                <a:latin typeface="Aptos"/>
               </a:rPr>
               <a:t>ROBUST &gt; PRECISE</a:t>
             </a:r>
-            <a:endParaRPr lang="en-US" sz="730" dirty="0"/>
+          </a:p>
+        </p:txBody>
+      </p:sp>
+      <p:sp>
+        <p:nvSpPr>
+          <p:cNvPr id="27" name="Rectangle 26"/>
+          <p:cNvSpPr/>
+          <p:nvPr/>
+        </p:nvSpPr>
+        <p:spPr>
+          <a:xfrm>
+            <a:off x="566928" y="6455664"/>
+            <a:ext cx="11064240" cy="7620"/>
+          </a:xfrm>
+          <a:prstGeom prst="rect">
+            <a:avLst/>
+          </a:prstGeom>
+          <a:solidFill>
+            <a:srgbClr val="193B57"/>
+          </a:solidFill>
+          <a:ln>
+            <a:noFill/>
+          </a:ln>
+        </p:spPr>
+        <p:style>
+          <a:lnRef idx="1">
+            <a:schemeClr val="accent1"/>
+          </a:lnRef>
+          <a:fillRef idx="3">
+            <a:schemeClr val="accent1"/>
+          </a:fillRef>
+          <a:effectRef idx="2">
+            <a:schemeClr val="accent1"/>
+          </a:effectRef>
+          <a:fontRef idx="minor">
+            <a:schemeClr val="lt1"/>
+          </a:fontRef>
+        </p:style>
+        <p:txBody>
+          <a:bodyPr rtlCol="0" anchor="ctr"/>
+          <a:lstStyle/>
+          <a:p>
+            <a:pPr algn="ctr"/>
+          </a:p>
+        </p:txBody>
+      </p:sp>
+      <p:sp>
+        <p:nvSpPr>
+          <p:cNvPr id="28" name="TextBox 27"/>
+          <p:cNvSpPr txBox="1"/>
+          <p:nvPr/>
+        </p:nvSpPr>
+        <p:spPr>
+          <a:xfrm>
+            <a:off x="594360" y="6492240"/>
+            <a:ext cx="1828800" cy="155448"/>
+          </a:xfrm>
+          <a:prstGeom prst="rect">
+            <a:avLst/>
+          </a:prstGeom>
+          <a:noFill/>
+        </p:spPr>
+        <p:txBody>
+          <a:bodyPr wrap="none" lIns="0" rIns="0" tIns="0" bIns="0" anchor="ctr">
+            <a:spAutoFit/>
+          </a:bodyPr>
+          <a:lstStyle/>
+          <a:p>
+            <a:pPr algn="l"/>
+            <a:r>
+              <a:rPr sz="580" b="1">
+                <a:solidFill>
+                  <a:srgbClr val="6F879A"/>
+                </a:solidFill>
+                <a:latin typeface="Aptos"/>
+              </a:rPr>
+              <a:t>MAV METRICS  •  08</a:t>
+            </a:r>
+          </a:p>
+        </p:txBody>
+      </p:sp>
+      <p:sp>
+        <p:nvSpPr>
+          <p:cNvPr id="29" name="TextBox 28"/>
+          <p:cNvSpPr txBox="1"/>
+          <p:nvPr/>
+        </p:nvSpPr>
+        <p:spPr>
+          <a:xfrm>
+            <a:off x="2377440" y="6473952"/>
+            <a:ext cx="9189720" cy="182880"/>
+          </a:xfrm>
+          <a:prstGeom prst="rect">
+            <a:avLst/>
+          </a:prstGeom>
+          <a:noFill/>
+        </p:spPr>
+        <p:txBody>
+          <a:bodyPr wrap="none" lIns="0" rIns="0" tIns="0" bIns="0" anchor="ctr">
+            <a:spAutoFit/>
+          </a:bodyPr>
+          <a:lstStyle/>
+          <a:p>
+            <a:pPr algn="r"/>
+            <a:r>
+              <a:rPr sz="509" b="0">
+                <a:solidFill>
+                  <a:srgbClr val="63798B"/>
+                </a:solidFill>
+                <a:latin typeface="Aptos"/>
+              </a:rPr>
+              <a:t>Robustness rule proposed for model governance; threshold can be adjusted</a:t>
+            </a:r>
           </a:p>
         </p:txBody>
       </p:sp>
@@ -15531,6 +16128,10 @@
             <a:prstDash val="solid"/>
           </a:ln>
         </p:spPr>
+        <p:txBody>
+          <a:bodyPr/>
+          <a:p/>
+        </p:txBody>
       </p:sp>
       <p:sp>
         <p:nvSpPr>
@@ -15666,6 +16267,10 @@
             <a:prstDash val="solid"/>
           </a:ln>
         </p:spPr>
+        <p:txBody>
+          <a:bodyPr/>
+          <a:p/>
+        </p:txBody>
       </p:sp>
       <p:sp>
         <p:nvSpPr>
@@ -15696,8 +16301,9 @@
                 <a:solidFill>
                   <a:srgbClr val="6F879A"/>
                 </a:solidFill>
-              </a:rPr>
-              <a:t>MAV METRICS  •  10</a:t>
+                <a:latin typeface="Aptos"/>
+              </a:rPr>
+              <a:t>MAV METRICS  •  09</a:t>
             </a:r>
             <a:endParaRPr lang="en-US" sz="580" dirty="0"/>
           </a:p>
@@ -15729,6 +16335,10 @@
             <a:prstDash val="solid"/>
           </a:ln>
         </p:spPr>
+        <p:txBody>
+          <a:bodyPr/>
+          <a:p/>
+        </p:txBody>
       </p:sp>
       <p:sp>
         <p:nvSpPr>
@@ -15794,6 +16404,10 @@
             <a:prstDash val="solid"/>
           </a:ln>
         </p:spPr>
+        <p:txBody>
+          <a:bodyPr/>
+          <a:p/>
+        </p:txBody>
       </p:sp>
       <p:sp>
         <p:nvSpPr>
@@ -15863,6 +16477,10 @@
             <a:prstDash val="solid"/>
           </a:ln>
         </p:spPr>
+        <p:txBody>
+          <a:bodyPr/>
+          <a:p/>
+        </p:txBody>
       </p:sp>
       <p:sp>
         <p:nvSpPr>
@@ -15932,6 +16550,10 @@
             <a:prstDash val="solid"/>
           </a:ln>
         </p:spPr>
+        <p:txBody>
+          <a:bodyPr/>
+          <a:p/>
+        </p:txBody>
       </p:sp>
       <p:sp>
         <p:nvSpPr>
@@ -16001,6 +16623,10 @@
             <a:prstDash val="solid"/>
           </a:ln>
         </p:spPr>
+        <p:txBody>
+          <a:bodyPr/>
+          <a:p/>
+        </p:txBody>
       </p:sp>
       <p:sp>
         <p:nvSpPr>
@@ -16100,6 +16726,10 @@
             <a:prstDash val="solid"/>
           </a:ln>
         </p:spPr>
+        <p:txBody>
+          <a:bodyPr/>
+          <a:p/>
+        </p:txBody>
       </p:sp>
       <p:sp>
         <p:nvSpPr>
@@ -16127,6 +16757,10 @@
             <a:prstDash val="solid"/>
           </a:ln>
         </p:spPr>
+        <p:txBody>
+          <a:bodyPr/>
+          <a:p/>
+        </p:txBody>
       </p:sp>
       <p:sp>
         <p:nvSpPr>
@@ -16150,6 +16784,10 @@
             <a:prstDash val="solid"/>
           </a:ln>
         </p:spPr>
+        <p:txBody>
+          <a:bodyPr/>
+          <a:p/>
+        </p:txBody>
       </p:sp>
       <p:sp>
         <p:nvSpPr>
@@ -16177,6 +16815,10 @@
             <a:prstDash val="solid"/>
           </a:ln>
         </p:spPr>
+        <p:txBody>
+          <a:bodyPr/>
+          <a:p/>
+        </p:txBody>
       </p:sp>
       <p:sp>
         <p:nvSpPr>
@@ -16200,6 +16842,10 @@
             <a:prstDash val="solid"/>
           </a:ln>
         </p:spPr>
+        <p:txBody>
+          <a:bodyPr/>
+          <a:p/>
+        </p:txBody>
       </p:sp>
       <p:sp>
         <p:nvSpPr>
@@ -16227,6 +16873,10 @@
             <a:prstDash val="solid"/>
           </a:ln>
         </p:spPr>
+        <p:txBody>
+          <a:bodyPr/>
+          <a:p/>
+        </p:txBody>
       </p:sp>
       <p:sp>
         <p:nvSpPr>
@@ -16254,6 +16904,10 @@
             <a:prstDash val="solid"/>
           </a:ln>
         </p:spPr>
+        <p:txBody>
+          <a:bodyPr/>
+          <a:p/>
+        </p:txBody>
       </p:sp>
       <p:sp>
         <p:nvSpPr>
@@ -16315,6 +16969,10 @@
             <a:prstDash val="solid"/>
           </a:ln>
         </p:spPr>
+        <p:txBody>
+          <a:bodyPr/>
+          <a:p/>
+        </p:txBody>
       </p:sp>
       <p:sp>
         <p:nvSpPr>
@@ -16338,6 +16996,10 @@
             <a:prstDash val="solid"/>
           </a:ln>
         </p:spPr>
+        <p:txBody>
+          <a:bodyPr/>
+          <a:p/>
+        </p:txBody>
       </p:sp>
       <p:sp>
         <p:nvSpPr>
@@ -16365,6 +17027,10 @@
             <a:prstDash val="solid"/>
           </a:ln>
         </p:spPr>
+        <p:txBody>
+          <a:bodyPr/>
+          <a:p/>
+        </p:txBody>
       </p:sp>
       <p:sp>
         <p:nvSpPr>
@@ -16392,6 +17058,10 @@
             <a:prstDash val="solid"/>
           </a:ln>
         </p:spPr>
+        <p:txBody>
+          <a:bodyPr/>
+          <a:p/>
+        </p:txBody>
       </p:sp>
       <p:sp>
         <p:nvSpPr>
@@ -16419,6 +17089,10 @@
             <a:prstDash val="solid"/>
           </a:ln>
         </p:spPr>
+        <p:txBody>
+          <a:bodyPr/>
+          <a:p/>
+        </p:txBody>
       </p:sp>
       <p:sp>
         <p:nvSpPr>
@@ -16446,6 +17120,10 @@
             <a:prstDash val="solid"/>
           </a:ln>
         </p:spPr>
+        <p:txBody>
+          <a:bodyPr/>
+          <a:p/>
+        </p:txBody>
       </p:sp>
       <p:sp>
         <p:nvSpPr>
@@ -16473,6 +17151,10 @@
             <a:prstDash val="solid"/>
           </a:ln>
         </p:spPr>
+        <p:txBody>
+          <a:bodyPr/>
+          <a:p/>
+        </p:txBody>
       </p:sp>
       <p:sp>
         <p:nvSpPr>
@@ -16500,6 +17182,10 @@
             <a:prstDash val="solid"/>
           </a:ln>
         </p:spPr>
+        <p:txBody>
+          <a:bodyPr/>
+          <a:p/>
+        </p:txBody>
       </p:sp>
       <p:sp>
         <p:nvSpPr>
@@ -16835,6 +17521,10 @@
             <a:prstDash val="solid"/>
           </a:ln>
         </p:spPr>
+        <p:txBody>
+          <a:bodyPr/>
+          <a:p/>
+        </p:txBody>
       </p:sp>
       <p:sp>
         <p:nvSpPr>

--- a/presentation/Mav_Metrics_Final.pptx
+++ b/presentation/Mav_Metrics_Final.pptx
@@ -513,7 +513,25 @@
           <a:lstStyle/>
           <a:p>
             <a:r>
-              <a:t>PRESENTER: Joshua\nTIME: ~35 sec\n\nSAY:\nMost marketability models answer the easy question: who is already famous? We wanted to answer the more useful question: who is about to become commercially valuable before everyone else sees it? Mav Metrics combines performance, reach, attention, engagement, momentum, and brand signals into one explainable system. The output is not just a ranking—it is a decision tool.\n\nHANDOFF: I’ll start with the opportunity signal that makes the model useful.</a:t>
+              <a:t>PRESENTER: Joshua</a:t>
+            </a:r>
+            <a:br/>
+            <a:r>
+              <a:t>TIME: ~35 sec</a:t>
+            </a:r>
+            <a:br/>
+            <a:br/>
+            <a:r>
+              <a:t>SAY:</a:t>
+            </a:r>
+            <a:br/>
+            <a:r>
+              <a:t>Most marketability models answer the easy question: who is already famous? We wanted to answer the more useful question: who is about to become commercially valuable before everyone else sees it? Mav Metrics combines performance, reach, attention, engagement, momentum, and brand signals into one explainable system. The output is not just a ranking—it is a decision tool.</a:t>
+            </a:r>
+            <a:br/>
+            <a:br/>
+            <a:r>
+              <a:t>HANDOFF: I’ll start with the opportunity signal that makes the model useful.</a:t>
             </a:r>
             <a:endParaRPr lang="en-US" dirty="0"/>
           </a:p>
@@ -600,7 +618,25 @@
           <a:lstStyle/>
           <a:p>
             <a:r>
-              <a:t>PRESENTER: Sejal\nTIME: ~35 sec\n\nSAY:\nCooper Flagg shows the sequence we want the momentum signal to capture. He debuted at number eleven in the midseason jersey rankings, finished ninth for the full 2025–26 regular season as the only rookie in the top fifteen, and then won Rookie of the Year after leading rookies at 21 points per game. The lesson is not that our model discovered Flagg. It is that attention growth can become measurable commercial proof—and we want to detect that pattern earlier in less obvious players.\n\nTRANSITION: That leads to how Dallas could operationalize the framework.</a:t>
+              <a:t>PRESENTER: Sejal</a:t>
+            </a:r>
+            <a:br/>
+            <a:r>
+              <a:t>TIME: ~35 sec</a:t>
+            </a:r>
+            <a:br/>
+            <a:br/>
+            <a:r>
+              <a:t>SAY:</a:t>
+            </a:r>
+            <a:br/>
+            <a:r>
+              <a:t>Cooper Flagg shows the sequence we want the momentum signal to capture. He debuted at number eleven in the midseason jersey rankings, finished ninth for the full 2025–26 regular season as the only rookie in the top fifteen, and then won Rookie of the Year after leading rookies at 21 points per game. The lesson is not that our model discovered Flagg. It is that attention growth can become measurable commercial proof—and we want to detect that pattern earlier in less obvious players.</a:t>
+            </a:r>
+            <a:br/>
+            <a:br/>
+            <a:r>
+              <a:t>TRANSITION: That leads to how Dallas could operationalize the framework.</a:t>
             </a:r>
             <a:endParaRPr lang="en-US" dirty="0"/>
           </a:p>
@@ -687,7 +723,25 @@
           <a:lstStyle/>
           <a:p>
             <a:r>
-              <a:t>PRESENTER: Sejal\nTIME: ~30 sec\n\nSAY:\nOur recommendation is a quarterly scouting process, not a one-time score. Refresh the same public signals on a fixed date, validate against observable outcomes, create a watchlist, run one small content or sponsor activation, and measure the lift. Start with 10 to 20 players so the team can learn quickly before scaling or adding internal Mavericks data.\n\nHANDOFF: Shresta will close the model section with what we would—and would not—claim from public data.</a:t>
+              <a:t>PRESENTER: Sejal</a:t>
+            </a:r>
+            <a:br/>
+            <a:r>
+              <a:t>TIME: ~30 sec</a:t>
+            </a:r>
+            <a:br/>
+            <a:br/>
+            <a:r>
+              <a:t>SAY:</a:t>
+            </a:r>
+            <a:br/>
+            <a:r>
+              <a:t>Our recommendation is a quarterly scouting process, not a one-time score. Refresh the same public signals on a fixed date, validate against observable outcomes, create a watchlist, run one small content or sponsor activation, and measure the lift. Start with 10 to 20 players so the team can learn quickly before scaling or adding internal Mavericks data.</a:t>
+            </a:r>
+            <a:br/>
+            <a:br/>
+            <a:r>
+              <a:t>HANDOFF: Shresta will close the model section with what we would—and would not—claim from public data.</a:t>
             </a:r>
             <a:endParaRPr lang="en-US" dirty="0"/>
           </a:p>
@@ -774,7 +828,25 @@
           <a:lstStyle/>
           <a:p>
             <a:r>
-              <a:t>PRESENTER: Shresta\nTIME: ~30 sec\n\nSAY:\nThere are important limits. Public data cannot reveal the exact economics of private endorsement deals, and correlation does not prove causation. We would use Mav Metrics to prioritize where humans should investigate, not to automate decisions. Every recommendation still needs brand-safety review, business judgment, and internal data where available.\n\nHANDOFF: Joshua will close with the one idea we want you to remember.</a:t>
+              <a:t>PRESENTER: Shresta</a:t>
+            </a:r>
+            <a:br/>
+            <a:r>
+              <a:t>TIME: ~30 sec</a:t>
+            </a:r>
+            <a:br/>
+            <a:br/>
+            <a:r>
+              <a:t>SAY:</a:t>
+            </a:r>
+            <a:br/>
+            <a:r>
+              <a:t>There are important limits. Public data cannot reveal the exact economics of private endorsement deals, and correlation does not prove causation. We would use Mav Metrics to prioritize where humans should investigate, not to automate decisions. Every recommendation still needs brand-safety review, business judgment, and internal data where available.</a:t>
+            </a:r>
+            <a:br/>
+            <a:br/>
+            <a:r>
+              <a:t>HANDOFF: Joshua will close with the one idea we want you to remember.</a:t>
             </a:r>
             <a:endParaRPr lang="en-US" dirty="0"/>
           </a:p>
@@ -861,7 +933,25 @@
           <a:lstStyle/>
           <a:p>
             <a:r>
-              <a:t>PRESENTER: Joshua\nTIME: ~20 sec\n\nSAY:\nMav Metrics is built around one idea: commercial opportunity lives in the gap between what a player is doing on the court and how much value the market has captured off it. We measure the gap, track momentum, validate against real fan behavior, and turn the result into an action. Thank you—we’re happy to take questions.\n\nQ&amp;A ROUTING: Veer = model, weights, validation. Shresta = market logic and limitations. Sejal = dashboard and operating process. Joshua = strategy and close.</a:t>
+              <a:t>PRESENTER: Joshua</a:t>
+            </a:r>
+            <a:br/>
+            <a:r>
+              <a:t>TIME: ~20 sec</a:t>
+            </a:r>
+            <a:br/>
+            <a:br/>
+            <a:r>
+              <a:t>SAY:</a:t>
+            </a:r>
+            <a:br/>
+            <a:r>
+              <a:t>Mav Metrics is built around one idea: commercial opportunity lives in the gap between what a player is doing on the court and how much value the market has captured off it. We measure the gap, track momentum, validate against real fan behavior, and turn the result into an action. Thank you—we’re happy to take questions.</a:t>
+            </a:r>
+            <a:br/>
+            <a:br/>
+            <a:r>
+              <a:t>Q&amp;A ROUTING: Veer = model, weights, validation. Shresta = market logic and limitations. Sejal = dashboard and operating process. Joshua = strategy and close.</a:t>
             </a:r>
             <a:endParaRPr lang="en-US" dirty="0"/>
           </a:p>
@@ -948,7 +1038,25 @@
           <a:lstStyle/>
           <a:p>
             <a:r>
-              <a:t>PRESENTER: Joshua\nTIME: ~35 sec\n\nSAY:\nThe centerpiece is the marketability gap. We estimate how marketable a player should be from basketball performance, then compare that benchmark with the marketability signals we actually observe. A negative gap does not mean a player is bad at marketing. It means performance may be ahead of commercial attention, which is exactly where a team, agent, or sponsor can act early.\n\nHANDOFF: Shresta will show who uses this and what goes into the score.</a:t>
+              <a:t>PRESENTER: Joshua</a:t>
+            </a:r>
+            <a:br/>
+            <a:r>
+              <a:t>TIME: ~35 sec</a:t>
+            </a:r>
+            <a:br/>
+            <a:br/>
+            <a:r>
+              <a:t>SAY:</a:t>
+            </a:r>
+            <a:br/>
+            <a:r>
+              <a:t>The centerpiece is the marketability gap. We estimate how marketable a player should be from basketball performance, then compare that benchmark with the marketability signals we actually observe. A negative gap does not mean a player is bad at marketing. It means performance may be ahead of commercial attention, which is exactly where a team, agent, or sponsor can act early.</a:t>
+            </a:r>
+            <a:br/>
+            <a:br/>
+            <a:r>
+              <a:t>HANDOFF: Shresta will show who uses this and what goes into the score.</a:t>
             </a:r>
             <a:endParaRPr lang="en-US" dirty="0"/>
           </a:p>
@@ -1035,7 +1143,25 @@
           <a:lstStyle/>
           <a:p>
             <a:r>
-              <a:t>PRESENTER: Shresta\nTIME: ~30 sec\n\nSAY:\nWe designed the output around decisions, not math for its own sake. A team can use it to decide where to spend content resources. An agent can support a player’s commercial story with evidence. A sponsor can identify rising talent before pricing fully catches up. That is why every score needs both an explanation and a next action.\n\nTRANSITION: To make those decisions defensible, the model uses six public-data pillars.</a:t>
+              <a:t>PRESENTER: Shresta</a:t>
+            </a:r>
+            <a:br/>
+            <a:r>
+              <a:t>TIME: ~30 sec</a:t>
+            </a:r>
+            <a:br/>
+            <a:br/>
+            <a:r>
+              <a:t>SAY:</a:t>
+            </a:r>
+            <a:br/>
+            <a:r>
+              <a:t>We designed the output around decisions, not math for its own sake. A team can use it to decide where to spend content resources. An agent can support a player’s commercial story with evidence. A sponsor can identify rising talent before pricing fully catches up. That is why every score needs both an explanation and a next action.</a:t>
+            </a:r>
+            <a:br/>
+            <a:br/>
+            <a:r>
+              <a:t>TRANSITION: To make those decisions defensible, the model uses six public-data pillars.</a:t>
             </a:r>
             <a:endParaRPr lang="en-US" dirty="0"/>
           </a:p>
@@ -1122,7 +1248,25 @@
           <a:lstStyle/>
           <a:p>
             <a:r>
-              <a:t>PRESENTER: Shresta\nTIME: ~35 sec\n\nSAY:\nThe six pillars are performance, reach, attention, engagement, momentum, and brand. Performance creates credibility. Reach measures distribution. Attention captures demand beyond a player’s own accounts. Engagement shows audience quality. Momentum measures change. Brand captures commercial proof and fit. We put unlike variables on the same 0-to-100 percentile scale before weighting them.\n\nHANDOFF: Veer will show exactly how those six pillars turn into the gap.</a:t>
+              <a:t>PRESENTER: Shresta</a:t>
+            </a:r>
+            <a:br/>
+            <a:r>
+              <a:t>TIME: ~35 sec</a:t>
+            </a:r>
+            <a:br/>
+            <a:br/>
+            <a:r>
+              <a:t>SAY:</a:t>
+            </a:r>
+            <a:br/>
+            <a:r>
+              <a:t>The six pillars are performance, reach, attention, engagement, momentum, and brand. Performance creates credibility. Reach measures distribution. Attention captures demand beyond a player’s own accounts. Engagement shows audience quality. Momentum measures change. Brand captures commercial proof and fit. We put unlike variables on the same 0-to-100 percentile scale before weighting them.</a:t>
+            </a:r>
+            <a:br/>
+            <a:br/>
+            <a:r>
+              <a:t>HANDOFF: Veer will show exactly how those six pillars turn into the gap.</a:t>
             </a:r>
             <a:endParaRPr lang="en-US" dirty="0"/>
           </a:p>
@@ -1209,7 +1353,25 @@
           <a:lstStyle/>
           <a:p>
             <a:r>
-              <a:t>PRESENTER: Veer\nTIME: ~40 sec\n\nSAY:\nThe pipeline has three transparent steps. First, we normalize large count variables with a log transform and convert features to percentiles. Second, we combine the six pillars using the disclosed weights. Third, we estimate expected marketability from basketball performance and subtract it from the observed score. That residual is the marketability gap. Negative gap plus strong momentum is where we scout first.\n\nTRANSITION: Then we test the framework against outcomes we did not invent.</a:t>
+              <a:t>PRESENTER: Veer</a:t>
+            </a:r>
+            <a:br/>
+            <a:r>
+              <a:t>TIME: ~40 sec</a:t>
+            </a:r>
+            <a:br/>
+            <a:br/>
+            <a:r>
+              <a:t>SAY:</a:t>
+            </a:r>
+            <a:br/>
+            <a:r>
+              <a:t>The pipeline has three transparent steps. First, we normalize large count variables with a log transform and convert features to percentiles. Second, we combine the six pillars using the disclosed weights. Third, we estimate expected marketability from basketball performance and subtract it from the observed score. That residual is the marketability gap. Negative gap plus strong momentum is where we scout first.</a:t>
+            </a:r>
+            <a:br/>
+            <a:br/>
+            <a:r>
+              <a:t>TRANSITION: Then we test the framework against outcomes we did not invent.</a:t>
             </a:r>
             <a:endParaRPr lang="en-US" dirty="0"/>
           </a:p>
@@ -1296,7 +1458,25 @@
           <a:lstStyle/>
           <a:p>
             <a:r>
-              <a:t>PRESENTER: Veer\nTIME: ~35 sec\n\nSAY:\nNBA Communications gives us an outside measure of real fan attention. In the 2024–25 regular season, LeBron James generated 3.23 billion NBA social and digital views, Stephen Curry 2.56 billion, and Luka Dončić 1.82 billion. These are observed outcomes, not our score. A useful model should explain or anticipate behavior like this rather than simply reproduce an internal ranking.\n\nSOURCE: NBA Communications, Apr. 14, 2025.</a:t>
+              <a:t>PRESENTER: Veer</a:t>
+            </a:r>
+            <a:br/>
+            <a:r>
+              <a:t>TIME: ~35 sec</a:t>
+            </a:r>
+            <a:br/>
+            <a:br/>
+            <a:r>
+              <a:t>SAY:</a:t>
+            </a:r>
+            <a:br/>
+            <a:r>
+              <a:t>NBA Communications gives us an outside measure of real fan attention. In the 2024–25 regular season, LeBron James generated 3.23 billion NBA social and digital views, Stephen Curry 2.56 billion, and Luka Dončić 1.82 billion. These are observed outcomes, not our score. A useful model should explain or anticipate behavior like this rather than simply reproduce an internal ranking.</a:t>
+            </a:r>
+            <a:br/>
+            <a:br/>
+            <a:r>
+              <a:t>SOURCE: NBA Communications, Apr. 14, 2025.</a:t>
             </a:r>
             <a:endParaRPr lang="en-US" dirty="0"/>
           </a:p>
@@ -1383,7 +1563,25 @@
           <a:lstStyle/>
           <a:p>
             <a:r>
-              <a:t>PRESENTER: Veer\nTIME: ~35 sec\n\nSAY:\nThe second outside check is merchandise. For the 2025–26 regular season, Curry ranked first in jersey sales, Luka second, Brunson third, Wembanyama fourth, LeBron fifth, and Dallas rookie Cooper Flagg ninth. We keep jersey sales out of the score and use them as an independent commercial outcome. With enough history, we would evaluate rank correlation, top-K hit rate, and the biggest misses.\n\nTRANSITION: We also test whether our answer survives reasonable changes to the weights.</a:t>
+              <a:t>PRESENTER: Veer</a:t>
+            </a:r>
+            <a:br/>
+            <a:r>
+              <a:t>TIME: ~35 sec</a:t>
+            </a:r>
+            <a:br/>
+            <a:br/>
+            <a:r>
+              <a:t>SAY:</a:t>
+            </a:r>
+            <a:br/>
+            <a:r>
+              <a:t>The second outside check is merchandise. For the 2025–26 regular season, Curry ranked first in jersey sales, Luka second, Brunson third, Wembanyama fourth, LeBron fifth, and Dallas rookie Cooper Flagg ninth. We keep jersey sales out of the score and use them as an independent commercial outcome. With enough history, we would evaluate rank correlation, top-K hit rate, and the biggest misses.</a:t>
+            </a:r>
+            <a:br/>
+            <a:br/>
+            <a:r>
+              <a:t>TRANSITION: We also test whether our answer survives reasonable changes to the weights.</a:t>
             </a:r>
             <a:endParaRPr lang="en-US" dirty="0"/>
           </a:p>
@@ -1470,7 +1668,25 @@
           <a:lstStyle/>
           <a:p>
             <a:r>
-              <a:t>PRESENTER: Veer\nTIME: ~30 sec\n\nSAY:\nInstead of arguing that one exact set of weights is perfect, we stress-test the decision. We move each pillar by up to ten points, renormalize, and rerank the players. Our governance rule is simple: keep a recommendation only if it stays in the top opportunity set in at least 80 percent of plausible scenarios. The threshold can change; the important part is defining it before seeing the winner.\n\nHANDOFF: Sejal will show how this becomes a reusable product rather than a one-time deck.</a:t>
+              <a:t>PRESENTER: Veer</a:t>
+            </a:r>
+            <a:br/>
+            <a:r>
+              <a:t>TIME: ~30 sec</a:t>
+            </a:r>
+            <a:br/>
+            <a:br/>
+            <a:r>
+              <a:t>SAY:</a:t>
+            </a:r>
+            <a:br/>
+            <a:r>
+              <a:t>Instead of arguing that one exact set of weights is perfect, we stress-test the decision. We move each pillar by up to ten points, renormalize, and rerank the players. Our governance rule is simple: keep a recommendation only if it stays in the top opportunity set in at least 80 percent of plausible scenarios. The threshold can change; the important part is defining it before seeing the winner.</a:t>
+            </a:r>
+            <a:br/>
+            <a:br/>
+            <a:r>
+              <a:t>HANDOFF: Sejal will show how this becomes a reusable product rather than a one-time deck.</a:t>
             </a:r>
             <a:endParaRPr lang="en-US" dirty="0"/>
           </a:p>
@@ -1557,7 +1773,25 @@
           <a:lstStyle/>
           <a:p>
             <a:r>
-              <a:t>PRESENTER: Sejal\nTIME: ~30 sec\n\nSAY:\nThe dashboard is deliberately one screen. We can search players, compare them, change assumptions, and see the opportunity map without rebuilding the analysis. The point is not to replace the presentation with software. It is to prove the framework is reusable after the case ends. If we demo it live, we would show only one weight change and one player filter—about thirty seconds total.\n\nTRANSITION: Dallas already gives us a strong example of why momentum belongs in the model.</a:t>
+              <a:t>PRESENTER: Sejal</a:t>
+            </a:r>
+            <a:br/>
+            <a:r>
+              <a:t>TIME: ~30 sec</a:t>
+            </a:r>
+            <a:br/>
+            <a:br/>
+            <a:r>
+              <a:t>SAY:</a:t>
+            </a:r>
+            <a:br/>
+            <a:r>
+              <a:t>The dashboard is deliberately one screen. We can search players, compare them, change assumptions, and see the opportunity map without rebuilding the analysis. The point is not to replace the presentation with software. It is to prove the framework is reusable after the case ends. If we demo it live, we would show only one weight change and one player filter—about thirty seconds total.</a:t>
+            </a:r>
+            <a:br/>
+            <a:br/>
+            <a:r>
+              <a:t>TRANSITION: Dallas already gives us a strong example of why momentum belongs in the model.</a:t>
             </a:r>
             <a:endParaRPr lang="en-US" dirty="0"/>
           </a:p>

--- a/presentation/Mav_Metrics_Final.pptx
+++ b/presentation/Mav_Metrics_Final.pptx
@@ -17830,7 +17830,7 @@
                   <a:srgbClr val="71879A"/>
                 </a:solidFill>
               </a:rPr>
-              <a:t>Product mockup built from the Mav Metrics workflow; values shown are illustrative until the final data pull.</a:t>
+              <a:t>Prototype interface built from the Mav Metrics workflow; benchmark values shown for demonstration.</a:t>
             </a:r>
             <a:endParaRPr lang="en-US" sz="560" dirty="0"/>
           </a:p>
